--- a/presentation/lei-hackathon-pitch.pptx
+++ b/presentation/lei-hackathon-pitch.pptx
@@ -10,10 +10,6 @@
     <p:sldId id="258" r:id="rId9"/>
     <p:sldId id="259" r:id="rId10"/>
     <p:sldId id="260" r:id="rId11"/>
-    <p:sldId id="261" r:id="rId12"/>
-    <p:sldId id="262" r:id="rId13"/>
-    <p:sldId id="263" r:id="rId14"/>
-    <p:sldId id="264" r:id="rId15"/>
   </p:sldIdLst>
   <p:sldSz cx="12191695" cy="6858000" type="screen4x3"/>
   <p:notesSz cx="6858000" cy="9144000"/>
@@ -3147,14 +3143,14 @@
         </p:nvSpPr>
         <p:spPr>
           <a:xfrm>
-            <a:off x="7955279" y="-731520"/>
-            <a:ext cx="5029200" cy="8229600"/>
+            <a:off x="7863840" y="-914400"/>
+            <a:ext cx="5669280" cy="6400800"/>
           </a:xfrm>
           <a:prstGeom prst="roundRect">
             <a:avLst/>
           </a:prstGeom>
           <a:solidFill>
-            <a:srgbClr val="875D78"/>
+            <a:srgbClr val="43283A"/>
           </a:solidFill>
           <a:ln>
             <a:noFill/>
@@ -3190,8 +3186,8 @@
         </p:nvSpPr>
         <p:spPr>
           <a:xfrm>
-            <a:off x="9144000" y="914400"/>
-            <a:ext cx="3200400" cy="5212080"/>
+            <a:off x="9509760" y="1005840"/>
+            <a:ext cx="3383280" cy="4389120"/>
           </a:xfrm>
           <a:prstGeom prst="roundRect">
             <a:avLst/>
@@ -3227,14 +3223,315 @@
       </p:sp>
       <p:sp>
         <p:nvSpPr>
-          <p:cNvPr id="5" name="TextBox 4"/>
+          <p:cNvPr id="5" name="Rounded Rectangle 4"/>
+          <p:cNvSpPr/>
+          <p:nvPr/>
+        </p:nvSpPr>
+        <p:spPr>
+          <a:xfrm rot="20760000">
+            <a:off x="17785080" y="47594520"/>
+            <a:ext cx="48280320" cy="105613200"/>
+          </a:xfrm>
+          <a:prstGeom prst="roundRect">
+            <a:avLst/>
+          </a:prstGeom>
+          <a:solidFill>
+            <a:srgbClr val="B98DA9"/>
+          </a:solidFill>
+          <a:ln>
+            <a:noFill/>
+          </a:ln>
+        </p:spPr>
+        <p:style>
+          <a:lnRef idx="1">
+            <a:schemeClr val="accent1"/>
+          </a:lnRef>
+          <a:fillRef idx="3">
+            <a:schemeClr val="accent1"/>
+          </a:fillRef>
+          <a:effectRef idx="2">
+            <a:schemeClr val="accent1"/>
+          </a:effectRef>
+          <a:fontRef idx="minor">
+            <a:schemeClr val="lt1"/>
+          </a:fontRef>
+        </p:style>
+        <p:txBody>
+          <a:bodyPr rtlCol="0" anchor="ctr"/>
+          <a:lstStyle/>
+          <a:p>
+            <a:pPr algn="ctr"/>
+          </a:p>
+        </p:txBody>
+      </p:sp>
+      <p:sp>
+        <p:nvSpPr>
+          <p:cNvPr id="6" name="Rounded Rectangle 5"/>
+          <p:cNvSpPr/>
+          <p:nvPr/>
+        </p:nvSpPr>
+        <p:spPr>
+          <a:xfrm rot="21180000">
+            <a:off x="38907720" y="14401800"/>
+            <a:ext cx="48280320" cy="105613200"/>
+          </a:xfrm>
+          <a:prstGeom prst="roundRect">
+            <a:avLst/>
+          </a:prstGeom>
+          <a:solidFill>
+            <a:srgbClr val="B98DA9"/>
+          </a:solidFill>
+          <a:ln>
+            <a:noFill/>
+          </a:ln>
+        </p:spPr>
+        <p:style>
+          <a:lnRef idx="1">
+            <a:schemeClr val="accent1"/>
+          </a:lnRef>
+          <a:fillRef idx="3">
+            <a:schemeClr val="accent1"/>
+          </a:fillRef>
+          <a:effectRef idx="2">
+            <a:schemeClr val="accent1"/>
+          </a:effectRef>
+          <a:fontRef idx="minor">
+            <a:schemeClr val="lt1"/>
+          </a:fontRef>
+        </p:style>
+        <p:txBody>
+          <a:bodyPr rtlCol="0" anchor="ctr"/>
+          <a:lstStyle/>
+          <a:p>
+            <a:pPr algn="ctr"/>
+          </a:p>
+        </p:txBody>
+      </p:sp>
+      <p:sp>
+        <p:nvSpPr>
+          <p:cNvPr id="7" name="Rounded Rectangle 6"/>
+          <p:cNvSpPr/>
+          <p:nvPr/>
+        </p:nvSpPr>
+        <p:spPr>
+          <a:xfrm>
+            <a:off x="60030359" y="-685800"/>
+            <a:ext cx="48280320" cy="105613200"/>
+          </a:xfrm>
+          <a:prstGeom prst="roundRect">
+            <a:avLst/>
+          </a:prstGeom>
+          <a:solidFill>
+            <a:srgbClr val="B98DA9"/>
+          </a:solidFill>
+          <a:ln>
+            <a:noFill/>
+          </a:ln>
+        </p:spPr>
+        <p:style>
+          <a:lnRef idx="1">
+            <a:schemeClr val="accent1"/>
+          </a:lnRef>
+          <a:fillRef idx="3">
+            <a:schemeClr val="accent1"/>
+          </a:fillRef>
+          <a:effectRef idx="2">
+            <a:schemeClr val="accent1"/>
+          </a:effectRef>
+          <a:fontRef idx="minor">
+            <a:schemeClr val="lt1"/>
+          </a:fontRef>
+        </p:style>
+        <p:txBody>
+          <a:bodyPr rtlCol="0" anchor="ctr"/>
+          <a:lstStyle/>
+          <a:p>
+            <a:pPr algn="ctr"/>
+          </a:p>
+        </p:txBody>
+      </p:sp>
+      <p:sp>
+        <p:nvSpPr>
+          <p:cNvPr id="8" name="Rounded Rectangle 7"/>
+          <p:cNvSpPr/>
+          <p:nvPr/>
+        </p:nvSpPr>
+        <p:spPr>
+          <a:xfrm rot="420000">
+            <a:off x="81152999" y="14401800"/>
+            <a:ext cx="48280320" cy="105613200"/>
+          </a:xfrm>
+          <a:prstGeom prst="roundRect">
+            <a:avLst/>
+          </a:prstGeom>
+          <a:solidFill>
+            <a:srgbClr val="B98DA9"/>
+          </a:solidFill>
+          <a:ln>
+            <a:noFill/>
+          </a:ln>
+        </p:spPr>
+        <p:style>
+          <a:lnRef idx="1">
+            <a:schemeClr val="accent1"/>
+          </a:lnRef>
+          <a:fillRef idx="3">
+            <a:schemeClr val="accent1"/>
+          </a:fillRef>
+          <a:effectRef idx="2">
+            <a:schemeClr val="accent1"/>
+          </a:effectRef>
+          <a:fontRef idx="minor">
+            <a:schemeClr val="lt1"/>
+          </a:fontRef>
+        </p:style>
+        <p:txBody>
+          <a:bodyPr rtlCol="0" anchor="ctr"/>
+          <a:lstStyle/>
+          <a:p>
+            <a:pPr algn="ctr"/>
+          </a:p>
+        </p:txBody>
+      </p:sp>
+      <p:sp>
+        <p:nvSpPr>
+          <p:cNvPr id="9" name="Rounded Rectangle 8"/>
+          <p:cNvSpPr/>
+          <p:nvPr/>
+        </p:nvSpPr>
+        <p:spPr>
+          <a:xfrm rot="840000">
+            <a:off x="102275640" y="47594520"/>
+            <a:ext cx="48280320" cy="105613200"/>
+          </a:xfrm>
+          <a:prstGeom prst="roundRect">
+            <a:avLst/>
+          </a:prstGeom>
+          <a:solidFill>
+            <a:srgbClr val="B98DA9"/>
+          </a:solidFill>
+          <a:ln>
+            <a:noFill/>
+          </a:ln>
+        </p:spPr>
+        <p:style>
+          <a:lnRef idx="1">
+            <a:schemeClr val="accent1"/>
+          </a:lnRef>
+          <a:fillRef idx="3">
+            <a:schemeClr val="accent1"/>
+          </a:fillRef>
+          <a:effectRef idx="2">
+            <a:schemeClr val="accent1"/>
+          </a:effectRef>
+          <a:fontRef idx="minor">
+            <a:schemeClr val="lt1"/>
+          </a:fontRef>
+        </p:style>
+        <p:txBody>
+          <a:bodyPr rtlCol="0" anchor="ctr"/>
+          <a:lstStyle/>
+          <a:p>
+            <a:pPr algn="ctr"/>
+          </a:p>
+        </p:txBody>
+      </p:sp>
+      <p:sp>
+        <p:nvSpPr>
+          <p:cNvPr id="10" name="Rounded Rectangle 9"/>
+          <p:cNvSpPr/>
+          <p:nvPr/>
+        </p:nvSpPr>
+        <p:spPr>
+          <a:xfrm>
+            <a:off x="53995320" y="43068239"/>
+            <a:ext cx="60350400" cy="60350400"/>
+          </a:xfrm>
+          <a:prstGeom prst="roundRect">
+            <a:avLst/>
+          </a:prstGeom>
+          <a:solidFill>
+            <a:srgbClr val="F5C46B"/>
+          </a:solidFill>
+          <a:ln>
+            <a:noFill/>
+          </a:ln>
+        </p:spPr>
+        <p:style>
+          <a:lnRef idx="1">
+            <a:schemeClr val="accent1"/>
+          </a:lnRef>
+          <a:fillRef idx="3">
+            <a:schemeClr val="accent1"/>
+          </a:fillRef>
+          <a:effectRef idx="2">
+            <a:schemeClr val="accent1"/>
+          </a:effectRef>
+          <a:fontRef idx="minor">
+            <a:schemeClr val="lt1"/>
+          </a:fontRef>
+        </p:style>
+        <p:txBody>
+          <a:bodyPr rtlCol="0" anchor="ctr"/>
+          <a:lstStyle/>
+          <a:p>
+            <a:pPr algn="ctr"/>
+          </a:p>
+        </p:txBody>
+      </p:sp>
+      <p:sp>
+        <p:nvSpPr>
+          <p:cNvPr id="11" name="Rectangle 10"/>
+          <p:cNvSpPr/>
+          <p:nvPr/>
+        </p:nvSpPr>
+        <p:spPr>
+          <a:xfrm rot="21480000">
+            <a:off x="81152999" y="95874840"/>
+            <a:ext cx="6035040" cy="218770200"/>
+          </a:xfrm>
+          <a:prstGeom prst="rect">
+            <a:avLst/>
+          </a:prstGeom>
+          <a:solidFill>
+            <a:srgbClr val="5A3D52"/>
+          </a:solidFill>
+          <a:ln>
+            <a:noFill/>
+          </a:ln>
+        </p:spPr>
+        <p:style>
+          <a:lnRef idx="1">
+            <a:schemeClr val="accent1"/>
+          </a:lnRef>
+          <a:fillRef idx="3">
+            <a:schemeClr val="accent1"/>
+          </a:fillRef>
+          <a:effectRef idx="2">
+            <a:schemeClr val="accent1"/>
+          </a:effectRef>
+          <a:fontRef idx="minor">
+            <a:schemeClr val="lt1"/>
+          </a:fontRef>
+        </p:style>
+        <p:txBody>
+          <a:bodyPr rtlCol="0" anchor="ctr"/>
+          <a:lstStyle/>
+          <a:p>
+            <a:pPr algn="ctr"/>
+          </a:p>
+        </p:txBody>
+      </p:sp>
+      <p:sp>
+        <p:nvSpPr>
+          <p:cNvPr id="12" name="TextBox 11"/>
           <p:cNvSpPr txBox="1"/>
           <p:nvPr/>
         </p:nvSpPr>
         <p:spPr>
           <a:xfrm>
-            <a:off x="777240" y="914400"/>
-            <a:ext cx="4114800" cy="731520"/>
+            <a:off x="777240" y="749808"/>
+            <a:ext cx="3200400" cy="411480"/>
           </a:xfrm>
           <a:prstGeom prst="rect">
             <a:avLst/>
@@ -3242,7 +3539,7 @@
           <a:noFill/>
         </p:spPr>
         <p:txBody>
-          <a:bodyPr wrap="square" lIns="18288" rIns="18288" anchor="ctr">
+          <a:bodyPr wrap="square" lIns="27432" rIns="27432" anchor="ctr">
             <a:spAutoFit/>
           </a:bodyPr>
           <a:lstStyle/>
@@ -3255,21 +3552,21 @@
                 </a:solidFill>
                 <a:latin typeface="Aptos"/>
               </a:rPr>
-              <a:t>LEI</a:t>
-            </a:r>
-          </a:p>
-        </p:txBody>
-      </p:sp>
-      <p:sp>
-        <p:nvSpPr>
-          <p:cNvPr id="6" name="TextBox 5"/>
+              <a:t>LÈI</a:t>
+            </a:r>
+          </a:p>
+        </p:txBody>
+      </p:sp>
+      <p:sp>
+        <p:nvSpPr>
+          <p:cNvPr id="13" name="TextBox 12"/>
           <p:cNvSpPr txBox="1"/>
           <p:nvPr/>
         </p:nvSpPr>
         <p:spPr>
           <a:xfrm>
-            <a:off x="777240" y="1828800"/>
-            <a:ext cx="7863840" cy="1645920"/>
+            <a:off x="777240" y="1645920"/>
+            <a:ext cx="6675120" cy="2194560"/>
           </a:xfrm>
           <a:prstGeom prst="rect">
             <a:avLst/>
@@ -3277,35 +3574,37 @@
           <a:noFill/>
         </p:spPr>
         <p:txBody>
-          <a:bodyPr wrap="square" lIns="18288" rIns="18288" anchor="ctr">
+          <a:bodyPr wrap="square" lIns="27432" rIns="27432" anchor="ctr">
             <a:spAutoFit/>
           </a:bodyPr>
           <a:lstStyle/>
           <a:p>
             <a:pPr algn="l"/>
             <a:r>
-              <a:rPr sz="3800" b="1">
-                <a:solidFill>
-                  <a:srgbClr val="F4E8EE"/>
+              <a:rPr sz="3400" b="1">
+                <a:solidFill>
+                  <a:srgbClr val="EEDCE6"/>
                 </a:solidFill>
                 <a:latin typeface="Aptos Display"/>
               </a:rPr>
-              <a:t>From isolation
-to momentum.</a:t>
-            </a:r>
-          </a:p>
-        </p:txBody>
-      </p:sp>
-      <p:sp>
-        <p:nvSpPr>
-          <p:cNvPr id="7" name="TextBox 6"/>
+              <a:t>The internet was built
+for engagement.
+Women need it built
+for safety.</a:t>
+            </a:r>
+          </a:p>
+        </p:txBody>
+      </p:sp>
+      <p:sp>
+        <p:nvSpPr>
+          <p:cNvPr id="14" name="TextBox 13"/>
           <p:cNvSpPr txBox="1"/>
           <p:nvPr/>
         </p:nvSpPr>
         <p:spPr>
           <a:xfrm>
-            <a:off x="822960" y="3886200"/>
-            <a:ext cx="6675120" cy="822960"/>
+            <a:off x="822960" y="4160520"/>
+            <a:ext cx="6583680" cy="777240"/>
           </a:xfrm>
           <a:prstGeom prst="rect">
             <a:avLst/>
@@ -3313,35 +3612,34 @@
           <a:noFill/>
         </p:spPr>
         <p:txBody>
-          <a:bodyPr wrap="square" lIns="18288" rIns="18288" anchor="ctr">
+          <a:bodyPr wrap="square" lIns="27432" rIns="27432" anchor="ctr">
             <a:spAutoFit/>
           </a:bodyPr>
           <a:lstStyle/>
           <a:p>
             <a:pPr algn="l"/>
             <a:r>
-              <a:rPr sz="2000" b="0">
-                <a:solidFill>
-                  <a:srgbClr val="F4E8EE"/>
+              <a:rPr sz="1800" b="0">
+                <a:solidFill>
+                  <a:srgbClr val="EEDCE6"/>
                 </a:solidFill>
                 <a:latin typeface="Aptos"/>
               </a:rPr>
-              <a:t>A protected ecosystem where women learn, grow careers,
-and build meaningful connections.</a:t>
-            </a:r>
-          </a:p>
-        </p:txBody>
-      </p:sp>
-      <p:sp>
-        <p:nvSpPr>
-          <p:cNvPr id="8" name="TextBox 7"/>
+              <a:t>Every day, women navigate digital spaces that are fragmented, unsafe, or optimized for engagement rather than safety.</a:t>
+            </a:r>
+          </a:p>
+        </p:txBody>
+      </p:sp>
+      <p:sp>
+        <p:nvSpPr>
+          <p:cNvPr id="15" name="TextBox 14"/>
           <p:cNvSpPr txBox="1"/>
           <p:nvPr/>
         </p:nvSpPr>
         <p:spPr>
           <a:xfrm>
-            <a:off x="822960" y="5212080"/>
-            <a:ext cx="6675120" cy="365760"/>
+            <a:off x="822960" y="5230368"/>
+            <a:ext cx="6675120" cy="640080"/>
           </a:xfrm>
           <a:prstGeom prst="rect">
             <a:avLst/>
@@ -3349,34 +3647,34 @@
           <a:noFill/>
         </p:spPr>
         <p:txBody>
-          <a:bodyPr wrap="square" lIns="18288" rIns="18288" anchor="ctr">
+          <a:bodyPr wrap="square" lIns="27432" rIns="27432" anchor="ctr">
             <a:spAutoFit/>
           </a:bodyPr>
           <a:lstStyle/>
           <a:p>
             <a:pPr algn="l"/>
             <a:r>
-              <a:rPr sz="1300" b="1">
+              <a:rPr sz="1600" b="1">
                 <a:solidFill>
                   <a:srgbClr val="F5C46B"/>
                 </a:solidFill>
                 <a:latin typeface="Aptos"/>
               </a:rPr>
-              <a:t>Education  |  Career growth  |  Belonging</a:t>
-            </a:r>
-          </a:p>
-        </p:txBody>
-      </p:sp>
-      <p:sp>
-        <p:nvSpPr>
-          <p:cNvPr id="9" name="TextBox 8"/>
+              <a:t>Meet Lèi - a gated, trauma-informed digital ecosystem built exclusively for women to connect, discover, and grow safely.</a:t>
+            </a:r>
+          </a:p>
+        </p:txBody>
+      </p:sp>
+      <p:sp>
+        <p:nvSpPr>
+          <p:cNvPr id="16" name="TextBox 15"/>
           <p:cNvSpPr txBox="1"/>
           <p:nvPr/>
         </p:nvSpPr>
         <p:spPr>
           <a:xfrm>
-            <a:off x="822960" y="5989320"/>
-            <a:ext cx="2743200" cy="228600"/>
+            <a:off x="658368" y="6473952"/>
+            <a:ext cx="3657600" cy="182880"/>
           </a:xfrm>
           <a:prstGeom prst="rect">
             <a:avLst/>
@@ -3384,51 +3682,16 @@
           <a:noFill/>
         </p:spPr>
         <p:txBody>
-          <a:bodyPr wrap="square" lIns="18288" rIns="18288" anchor="ctr">
+          <a:bodyPr wrap="square" lIns="27432" rIns="27432" anchor="ctr">
             <a:spAutoFit/>
           </a:bodyPr>
           <a:lstStyle/>
           <a:p>
             <a:pPr algn="l"/>
             <a:r>
-              <a:rPr sz="1000" b="0">
-                <a:solidFill>
-                  <a:srgbClr val="F4E8EE"/>
-                </a:solidFill>
-                <a:latin typeface="Aptos"/>
-              </a:rPr>
-              <a:t>Hackathon demo</a:t>
-            </a:r>
-          </a:p>
-        </p:txBody>
-      </p:sp>
-      <p:sp>
-        <p:nvSpPr>
-          <p:cNvPr id="10" name="TextBox 9"/>
-          <p:cNvSpPr txBox="1"/>
-          <p:nvPr/>
-        </p:nvSpPr>
-        <p:spPr>
-          <a:xfrm>
-            <a:off x="658368" y="6473952"/>
-            <a:ext cx="3657600" cy="182880"/>
-          </a:xfrm>
-          <a:prstGeom prst="rect">
-            <a:avLst/>
-          </a:prstGeom>
-          <a:noFill/>
-        </p:spPr>
-        <p:txBody>
-          <a:bodyPr wrap="square" lIns="18288" rIns="18288" anchor="ctr">
-            <a:spAutoFit/>
-          </a:bodyPr>
-          <a:lstStyle/>
-          <a:p>
-            <a:pPr algn="l"/>
-            <a:r>
               <a:rPr sz="900" b="0">
                 <a:solidFill>
-                  <a:srgbClr val="F4E8EE"/>
+                  <a:srgbClr val="EEDCE6"/>
                 </a:solidFill>
                 <a:latin typeface="Aptos"/>
               </a:rPr>
@@ -3439,7 +3702,7 @@
       </p:sp>
       <p:sp>
         <p:nvSpPr>
-          <p:cNvPr id="11" name="TextBox 10"/>
+          <p:cNvPr id="17" name="TextBox 16"/>
           <p:cNvSpPr txBox="1"/>
           <p:nvPr/>
         </p:nvSpPr>
@@ -3454,7 +3717,7 @@
           <a:noFill/>
         </p:spPr>
         <p:txBody>
-          <a:bodyPr wrap="square" lIns="18288" rIns="18288" anchor="ctr">
+          <a:bodyPr wrap="square" lIns="27432" rIns="27432" anchor="ctr">
             <a:spAutoFit/>
           </a:bodyPr>
           <a:lstStyle/>
@@ -3505,7 +3768,7 @@
             <a:avLst/>
           </a:prstGeom>
           <a:solidFill>
-            <a:srgbClr val="FCFBF9"/>
+            <a:srgbClr val="120B10"/>
           </a:solidFill>
           <a:ln>
             <a:noFill/>
@@ -3541,8 +3804,8 @@
         </p:nvSpPr>
         <p:spPr>
           <a:xfrm>
-            <a:off x="658368" y="438912"/>
-            <a:ext cx="4114800" cy="274320"/>
+            <a:off x="658368" y="384048"/>
+            <a:ext cx="5029200" cy="228600"/>
           </a:xfrm>
           <a:prstGeom prst="rect">
             <a:avLst/>
@@ -3550,7 +3813,7 @@
           <a:noFill/>
         </p:spPr>
         <p:txBody>
-          <a:bodyPr wrap="square" lIns="18288" rIns="18288" anchor="ctr">
+          <a:bodyPr wrap="square" lIns="27432" rIns="27432" anchor="ctr">
             <a:spAutoFit/>
           </a:bodyPr>
           <a:lstStyle/>
@@ -3559,11 +3822,11 @@
             <a:r>
               <a:rPr sz="1000" b="1">
                 <a:solidFill>
-                  <a:srgbClr val="875D78"/>
+                  <a:srgbClr val="F5C46B"/>
                 </a:solidFill>
                 <a:latin typeface="Aptos"/>
               </a:rPr>
-              <a:t>01  /  THE PROBLEM</a:t>
+              <a:t>02  /  TRACK ALIGNMENT</a:t>
             </a:r>
           </a:p>
         </p:txBody>
@@ -3576,8 +3839,8 @@
         </p:nvSpPr>
         <p:spPr>
           <a:xfrm>
-            <a:off x="658368" y="768096"/>
-            <a:ext cx="10789920" cy="658368"/>
+            <a:off x="658368" y="713232"/>
+            <a:ext cx="10607040" cy="685800"/>
           </a:xfrm>
           <a:prstGeom prst="rect">
             <a:avLst/>
@@ -3585,20 +3848,20 @@
           <a:noFill/>
         </p:spPr>
         <p:txBody>
-          <a:bodyPr wrap="square" lIns="18288" rIns="18288" anchor="ctr">
+          <a:bodyPr wrap="square" lIns="27432" rIns="27432" anchor="ctr">
             <a:spAutoFit/>
           </a:bodyPr>
           <a:lstStyle/>
           <a:p>
             <a:pPr algn="l"/>
             <a:r>
-              <a:rPr sz="2800" b="1">
-                <a:solidFill>
-                  <a:srgbClr val="241C17"/>
+              <a:rPr sz="2900" b="1">
+                <a:solidFill>
+                  <a:srgbClr val="EEDCE6"/>
                 </a:solidFill>
                 <a:latin typeface="Aptos Display"/>
               </a:rPr>
-              <a:t>The opportunity is not another social feed</a:t>
+              <a:t>Empowerment becomes tangible when support leads somewhere.</a:t>
             </a:r>
           </a:p>
         </p:txBody>
@@ -3611,285 +3874,8 @@
         </p:nvSpPr>
         <p:spPr>
           <a:xfrm>
-            <a:off x="658368" y="1572768"/>
-            <a:ext cx="1005840" cy="36576"/>
-          </a:xfrm>
-          <a:prstGeom prst="rect">
-            <a:avLst/>
-          </a:prstGeom>
-          <a:solidFill>
-            <a:srgbClr val="875D78"/>
-          </a:solidFill>
-          <a:ln>
-            <a:noFill/>
-          </a:ln>
-        </p:spPr>
-        <p:style>
-          <a:lnRef idx="1">
-            <a:schemeClr val="accent1"/>
-          </a:lnRef>
-          <a:fillRef idx="3">
-            <a:schemeClr val="accent1"/>
-          </a:fillRef>
-          <a:effectRef idx="2">
-            <a:schemeClr val="accent1"/>
-          </a:effectRef>
-          <a:fontRef idx="minor">
-            <a:schemeClr val="lt1"/>
-          </a:fontRef>
-        </p:style>
-        <p:txBody>
-          <a:bodyPr rtlCol="0" anchor="ctr"/>
-          <a:lstStyle/>
-          <a:p>
-            <a:pPr algn="ctr"/>
-          </a:p>
-        </p:txBody>
-      </p:sp>
-      <p:sp>
-        <p:nvSpPr>
-          <p:cNvPr id="6" name="TextBox 5"/>
-          <p:cNvSpPr txBox="1"/>
-          <p:nvPr/>
-        </p:nvSpPr>
-        <p:spPr>
-          <a:xfrm>
-            <a:off x="731520" y="1965960"/>
-            <a:ext cx="10698480" cy="411480"/>
-          </a:xfrm>
-          <a:prstGeom prst="rect">
-            <a:avLst/>
-          </a:prstGeom>
-          <a:noFill/>
-        </p:spPr>
-        <p:txBody>
-          <a:bodyPr wrap="square" lIns="18288" rIns="18288" anchor="ctr">
-            <a:spAutoFit/>
-          </a:bodyPr>
-          <a:lstStyle/>
-          <a:p>
-            <a:pPr algn="l"/>
-            <a:r>
-              <a:rPr sz="2100" b="0">
-                <a:solidFill>
-                  <a:srgbClr val="241C17"/>
-                </a:solidFill>
-                <a:latin typeface="Aptos"/>
-              </a:rPr>
-              <a:t>Women often have to stitch together support from disconnected places:</a:t>
-            </a:r>
-          </a:p>
-        </p:txBody>
-      </p:sp>
-      <p:sp>
-        <p:nvSpPr>
-          <p:cNvPr id="7" name="Rounded Rectangle 6"/>
-          <p:cNvSpPr/>
-          <p:nvPr/>
-        </p:nvSpPr>
-        <p:spPr>
-          <a:xfrm>
-            <a:off x="731520" y="2743200"/>
-            <a:ext cx="3337560" cy="2240280"/>
-          </a:xfrm>
-          <a:prstGeom prst="roundRect">
-            <a:avLst/>
-          </a:prstGeom>
-          <a:solidFill>
-            <a:srgbClr val="FFFFFF"/>
-          </a:solidFill>
-          <a:ln>
-            <a:noFill/>
-          </a:ln>
-        </p:spPr>
-        <p:style>
-          <a:lnRef idx="1">
-            <a:schemeClr val="accent1"/>
-          </a:lnRef>
-          <a:fillRef idx="3">
-            <a:schemeClr val="accent1"/>
-          </a:fillRef>
-          <a:effectRef idx="2">
-            <a:schemeClr val="accent1"/>
-          </a:effectRef>
-          <a:fontRef idx="minor">
-            <a:schemeClr val="lt1"/>
-          </a:fontRef>
-        </p:style>
-        <p:txBody>
-          <a:bodyPr rtlCol="0" anchor="ctr"/>
-          <a:lstStyle/>
-          <a:p>
-            <a:pPr algn="ctr"/>
-          </a:p>
-        </p:txBody>
-      </p:sp>
-      <p:sp>
-        <p:nvSpPr>
-          <p:cNvPr id="8" name="Rectangle 7"/>
-          <p:cNvSpPr/>
-          <p:nvPr/>
-        </p:nvSpPr>
-        <p:spPr>
-          <a:xfrm>
-            <a:off x="731520" y="2743200"/>
-            <a:ext cx="91440" cy="2240280"/>
-          </a:xfrm>
-          <a:prstGeom prst="rect">
-            <a:avLst/>
-          </a:prstGeom>
-          <a:solidFill>
-            <a:srgbClr val="875D78"/>
-          </a:solidFill>
-          <a:ln>
-            <a:noFill/>
-          </a:ln>
-        </p:spPr>
-        <p:style>
-          <a:lnRef idx="1">
-            <a:schemeClr val="accent1"/>
-          </a:lnRef>
-          <a:fillRef idx="3">
-            <a:schemeClr val="accent1"/>
-          </a:fillRef>
-          <a:effectRef idx="2">
-            <a:schemeClr val="accent1"/>
-          </a:effectRef>
-          <a:fontRef idx="minor">
-            <a:schemeClr val="lt1"/>
-          </a:fontRef>
-        </p:style>
-        <p:txBody>
-          <a:bodyPr rtlCol="0" anchor="ctr"/>
-          <a:lstStyle/>
-          <a:p>
-            <a:pPr algn="ctr"/>
-          </a:p>
-        </p:txBody>
-      </p:sp>
-      <p:sp>
-        <p:nvSpPr>
-          <p:cNvPr id="9" name="TextBox 8"/>
-          <p:cNvSpPr txBox="1"/>
-          <p:nvPr/>
-        </p:nvSpPr>
-        <p:spPr>
-          <a:xfrm>
-            <a:off x="1005840" y="3063240"/>
-            <a:ext cx="2651760" cy="347472"/>
-          </a:xfrm>
-          <a:prstGeom prst="rect">
-            <a:avLst/>
-          </a:prstGeom>
-          <a:noFill/>
-        </p:spPr>
-        <p:txBody>
-          <a:bodyPr wrap="square" lIns="18288" rIns="18288" anchor="ctr">
-            <a:spAutoFit/>
-          </a:bodyPr>
-          <a:lstStyle/>
-          <a:p>
-            <a:pPr algn="l"/>
-            <a:r>
-              <a:rPr sz="2200" b="1">
-                <a:solidFill>
-                  <a:srgbClr val="241C17"/>
-                </a:solidFill>
-                <a:latin typeface="Aptos"/>
-              </a:rPr>
-              <a:t>Learn</a:t>
-            </a:r>
-          </a:p>
-        </p:txBody>
-      </p:sp>
-      <p:sp>
-        <p:nvSpPr>
-          <p:cNvPr id="10" name="TextBox 9"/>
-          <p:cNvSpPr txBox="1"/>
-          <p:nvPr/>
-        </p:nvSpPr>
-        <p:spPr>
-          <a:xfrm>
-            <a:off x="1005840" y="3566160"/>
-            <a:ext cx="2697480" cy="1005840"/>
-          </a:xfrm>
-          <a:prstGeom prst="rect">
-            <a:avLst/>
-          </a:prstGeom>
-          <a:noFill/>
-        </p:spPr>
-        <p:txBody>
-          <a:bodyPr wrap="square" lIns="18288" rIns="18288" anchor="ctr">
-            <a:spAutoFit/>
-          </a:bodyPr>
-          <a:lstStyle/>
-          <a:p>
-            <a:pPr algn="l"/>
-            <a:r>
-              <a:rPr sz="1500" b="0">
-                <a:solidFill>
-                  <a:srgbClr val="786B62"/>
-                </a:solidFill>
-                <a:latin typeface="Aptos"/>
-              </a:rPr>
-              <a:t>Campus resources and practical knowledge are hard to find at the moment they matter.</a:t>
-            </a:r>
-          </a:p>
-        </p:txBody>
-      </p:sp>
-      <p:sp>
-        <p:nvSpPr>
-          <p:cNvPr id="11" name="Rounded Rectangle 10"/>
-          <p:cNvSpPr/>
-          <p:nvPr/>
-        </p:nvSpPr>
-        <p:spPr>
-          <a:xfrm>
-            <a:off x="4526280" y="2743200"/>
-            <a:ext cx="3337560" cy="2240280"/>
-          </a:xfrm>
-          <a:prstGeom prst="roundRect">
-            <a:avLst/>
-          </a:prstGeom>
-          <a:solidFill>
-            <a:srgbClr val="FFFFFF"/>
-          </a:solidFill>
-          <a:ln>
-            <a:noFill/>
-          </a:ln>
-        </p:spPr>
-        <p:style>
-          <a:lnRef idx="1">
-            <a:schemeClr val="accent1"/>
-          </a:lnRef>
-          <a:fillRef idx="3">
-            <a:schemeClr val="accent1"/>
-          </a:fillRef>
-          <a:effectRef idx="2">
-            <a:schemeClr val="accent1"/>
-          </a:effectRef>
-          <a:fontRef idx="minor">
-            <a:schemeClr val="lt1"/>
-          </a:fontRef>
-        </p:style>
-        <p:txBody>
-          <a:bodyPr rtlCol="0" anchor="ctr"/>
-          <a:lstStyle/>
-          <a:p>
-            <a:pPr algn="ctr"/>
-          </a:p>
-        </p:txBody>
-      </p:sp>
-      <p:sp>
-        <p:nvSpPr>
-          <p:cNvPr id="12" name="Rectangle 11"/>
-          <p:cNvSpPr/>
-          <p:nvPr/>
-        </p:nvSpPr>
-        <p:spPr>
-          <a:xfrm>
-            <a:off x="4526280" y="2743200"/>
-            <a:ext cx="91440" cy="2240280"/>
+            <a:off x="658368" y="1536192"/>
+            <a:ext cx="960120" cy="36576"/>
           </a:xfrm>
           <a:prstGeom prst="rect">
             <a:avLst/>
@@ -3925,14 +3911,14 @@
       </p:sp>
       <p:sp>
         <p:nvSpPr>
-          <p:cNvPr id="13" name="TextBox 12"/>
+          <p:cNvPr id="6" name="TextBox 5"/>
           <p:cNvSpPr txBox="1"/>
           <p:nvPr/>
         </p:nvSpPr>
         <p:spPr>
           <a:xfrm>
-            <a:off x="4800600" y="3063240"/>
-            <a:ext cx="2651760" cy="347472"/>
+            <a:off x="658368" y="6473952"/>
+            <a:ext cx="3657600" cy="182880"/>
           </a:xfrm>
           <a:prstGeom prst="rect">
             <a:avLst/>
@@ -3940,34 +3926,34 @@
           <a:noFill/>
         </p:spPr>
         <p:txBody>
-          <a:bodyPr wrap="square" lIns="18288" rIns="18288" anchor="ctr">
+          <a:bodyPr wrap="square" lIns="27432" rIns="27432" anchor="ctr">
             <a:spAutoFit/>
           </a:bodyPr>
           <a:lstStyle/>
           <a:p>
             <a:pPr algn="l"/>
             <a:r>
-              <a:rPr sz="2200" b="1">
-                <a:solidFill>
-                  <a:srgbClr val="241C17"/>
+              <a:rPr sz="900" b="0">
+                <a:solidFill>
+                  <a:srgbClr val="EEDCE6"/>
                 </a:solidFill>
                 <a:latin typeface="Aptos"/>
               </a:rPr>
-              <a:t>Grow</a:t>
-            </a:r>
-          </a:p>
-        </p:txBody>
-      </p:sp>
-      <p:sp>
-        <p:nvSpPr>
-          <p:cNvPr id="14" name="TextBox 13"/>
+              <a:t>LEI  /  Hackathon pitch</a:t>
+            </a:r>
+          </a:p>
+        </p:txBody>
+      </p:sp>
+      <p:sp>
+        <p:nvSpPr>
+          <p:cNvPr id="7" name="TextBox 6"/>
           <p:cNvSpPr txBox="1"/>
           <p:nvPr/>
         </p:nvSpPr>
         <p:spPr>
           <a:xfrm>
-            <a:off x="4800600" y="3566160"/>
-            <a:ext cx="2697480" cy="1005840"/>
+            <a:off x="11064240" y="6473952"/>
+            <a:ext cx="457200" cy="182880"/>
           </a:xfrm>
           <a:prstGeom prst="rect">
             <a:avLst/>
@@ -3975,40 +3961,75 @@
           <a:noFill/>
         </p:spPr>
         <p:txBody>
-          <a:bodyPr wrap="square" lIns="18288" rIns="18288" anchor="ctr">
+          <a:bodyPr wrap="square" lIns="27432" rIns="27432" anchor="ctr">
             <a:spAutoFit/>
           </a:bodyPr>
           <a:lstStyle/>
           <a:p>
-            <a:pPr algn="l"/>
-            <a:r>
-              <a:rPr sz="1500" b="0">
-                <a:solidFill>
-                  <a:srgbClr val="786B62"/>
+            <a:pPr algn="r"/>
+            <a:r>
+              <a:rPr sz="900" b="1">
+                <a:solidFill>
+                  <a:srgbClr val="F5C46B"/>
                 </a:solidFill>
                 <a:latin typeface="Aptos"/>
               </a:rPr>
-              <a:t>Career advice is scattered across cold networking, generic content, and one-off events.</a:t>
-            </a:r>
-          </a:p>
-        </p:txBody>
-      </p:sp>
-      <p:sp>
-        <p:nvSpPr>
-          <p:cNvPr id="15" name="Rounded Rectangle 14"/>
+              <a:t>02</a:t>
+            </a:r>
+          </a:p>
+        </p:txBody>
+      </p:sp>
+      <p:sp>
+        <p:nvSpPr>
+          <p:cNvPr id="8" name="TextBox 7"/>
+          <p:cNvSpPr txBox="1"/>
+          <p:nvPr/>
+        </p:nvSpPr>
+        <p:spPr>
+          <a:xfrm>
+            <a:off x="749808" y="1828800"/>
+            <a:ext cx="10607040" cy="438912"/>
+          </a:xfrm>
+          <a:prstGeom prst="rect">
+            <a:avLst/>
+          </a:prstGeom>
+          <a:noFill/>
+        </p:spPr>
+        <p:txBody>
+          <a:bodyPr wrap="square" lIns="27432" rIns="27432" anchor="ctr">
+            <a:spAutoFit/>
+          </a:bodyPr>
+          <a:lstStyle/>
+          <a:p>
+            <a:pPr algn="l"/>
+            <a:r>
+              <a:rPr sz="1900" b="0">
+                <a:solidFill>
+                  <a:srgbClr val="EEDCE6"/>
+                </a:solidFill>
+                <a:latin typeface="Aptos"/>
+              </a:rPr>
+              <a:t>Lèi goes beyond a chat app: it turns knowledge, opportunity, and immediate help into an accessible daily experience.</a:t>
+            </a:r>
+          </a:p>
+        </p:txBody>
+      </p:sp>
+      <p:sp>
+        <p:nvSpPr>
+          <p:cNvPr id="9" name="Rounded Rectangle 8"/>
           <p:cNvSpPr/>
           <p:nvPr/>
         </p:nvSpPr>
         <p:spPr>
           <a:xfrm>
-            <a:off x="8321040" y="2743200"/>
-            <a:ext cx="3337560" cy="2240280"/>
+            <a:off x="749808" y="2697480"/>
+            <a:ext cx="3246120" cy="2423160"/>
           </a:xfrm>
           <a:prstGeom prst="roundRect">
             <a:avLst/>
           </a:prstGeom>
           <a:solidFill>
-            <a:srgbClr val="FFFFFF"/>
+            <a:srgbClr val="2A1C26"/>
           </a:solidFill>
           <a:ln>
             <a:noFill/>
@@ -4038,20 +4059,20 @@
       </p:sp>
       <p:sp>
         <p:nvSpPr>
-          <p:cNvPr id="16" name="Rectangle 15"/>
+          <p:cNvPr id="10" name="Rectangle 9"/>
           <p:cNvSpPr/>
           <p:nvPr/>
         </p:nvSpPr>
         <p:spPr>
           <a:xfrm>
-            <a:off x="8321040" y="2743200"/>
-            <a:ext cx="91440" cy="2240280"/>
+            <a:off x="749808" y="2697480"/>
+            <a:ext cx="91440" cy="2423160"/>
           </a:xfrm>
           <a:prstGeom prst="rect">
             <a:avLst/>
           </a:prstGeom>
           <a:solidFill>
-            <a:srgbClr val="2D8A43"/>
+            <a:srgbClr val="B98DA9"/>
           </a:solidFill>
           <a:ln>
             <a:noFill/>
@@ -4081,14 +4102,240 @@
       </p:sp>
       <p:sp>
         <p:nvSpPr>
+          <p:cNvPr id="11" name="TextBox 10"/>
+          <p:cNvSpPr txBox="1"/>
+          <p:nvPr/>
+        </p:nvSpPr>
+        <p:spPr>
+          <a:xfrm>
+            <a:off x="1024127" y="2971800"/>
+            <a:ext cx="2514600" cy="219456"/>
+          </a:xfrm>
+          <a:prstGeom prst="rect">
+            <a:avLst/>
+          </a:prstGeom>
+          <a:noFill/>
+        </p:spPr>
+        <p:txBody>
+          <a:bodyPr wrap="square" lIns="27432" rIns="27432" anchor="ctr">
+            <a:spAutoFit/>
+          </a:bodyPr>
+          <a:lstStyle/>
+          <a:p>
+            <a:pPr algn="l"/>
+            <a:r>
+              <a:rPr sz="1000" b="1">
+                <a:solidFill>
+                  <a:srgbClr val="F5C46B"/>
+                </a:solidFill>
+                <a:latin typeface="Aptos"/>
+              </a:rPr>
+              <a:t>EDUCATION</a:t>
+            </a:r>
+          </a:p>
+        </p:txBody>
+      </p:sp>
+      <p:sp>
+        <p:nvSpPr>
+          <p:cNvPr id="12" name="TextBox 11"/>
+          <p:cNvSpPr txBox="1"/>
+          <p:nvPr/>
+        </p:nvSpPr>
+        <p:spPr>
+          <a:xfrm>
+            <a:off x="1024127" y="3364992"/>
+            <a:ext cx="2651760" cy="457200"/>
+          </a:xfrm>
+          <a:prstGeom prst="rect">
+            <a:avLst/>
+          </a:prstGeom>
+          <a:noFill/>
+        </p:spPr>
+        <p:txBody>
+          <a:bodyPr wrap="square" lIns="27432" rIns="27432" anchor="ctr">
+            <a:spAutoFit/>
+          </a:bodyPr>
+          <a:lstStyle/>
+          <a:p>
+            <a:pPr algn="l"/>
+            <a:r>
+              <a:rPr sz="2200" b="1">
+                <a:solidFill>
+                  <a:srgbClr val="EEDCE6"/>
+                </a:solidFill>
+                <a:latin typeface="Aptos Display"/>
+              </a:rPr>
+              <a:t>Discord-style hubs</a:t>
+            </a:r>
+          </a:p>
+        </p:txBody>
+      </p:sp>
+      <p:sp>
+        <p:nvSpPr>
+          <p:cNvPr id="13" name="TextBox 12"/>
+          <p:cNvSpPr txBox="1"/>
+          <p:nvPr/>
+        </p:nvSpPr>
+        <p:spPr>
+          <a:xfrm>
+            <a:off x="1024127" y="4069080"/>
+            <a:ext cx="2651760" cy="777240"/>
+          </a:xfrm>
+          <a:prstGeom prst="rect">
+            <a:avLst/>
+          </a:prstGeom>
+          <a:noFill/>
+        </p:spPr>
+        <p:txBody>
+          <a:bodyPr wrap="square" lIns="27432" rIns="27432" anchor="ctr">
+            <a:spAutoFit/>
+          </a:bodyPr>
+          <a:lstStyle/>
+          <a:p>
+            <a:pPr algn="l"/>
+            <a:r>
+              <a:rPr sz="1400" b="0">
+                <a:solidFill>
+                  <a:srgbClr val="EEDCE6"/>
+                </a:solidFill>
+                <a:latin typeface="Aptos"/>
+              </a:rPr>
+              <a:t>Women in STEM, higher education, grad research, and first-gen communities share knowledge and opportunities.</a:t>
+            </a:r>
+          </a:p>
+        </p:txBody>
+      </p:sp>
+      <p:sp>
+        <p:nvSpPr>
+          <p:cNvPr id="14" name="Rounded Rectangle 13"/>
+          <p:cNvSpPr/>
+          <p:nvPr/>
+        </p:nvSpPr>
+        <p:spPr>
+          <a:xfrm>
+            <a:off x="4498848" y="2697480"/>
+            <a:ext cx="3246120" cy="2423160"/>
+          </a:xfrm>
+          <a:prstGeom prst="roundRect">
+            <a:avLst/>
+          </a:prstGeom>
+          <a:solidFill>
+            <a:srgbClr val="2A1C26"/>
+          </a:solidFill>
+          <a:ln>
+            <a:noFill/>
+          </a:ln>
+        </p:spPr>
+        <p:style>
+          <a:lnRef idx="1">
+            <a:schemeClr val="accent1"/>
+          </a:lnRef>
+          <a:fillRef idx="3">
+            <a:schemeClr val="accent1"/>
+          </a:fillRef>
+          <a:effectRef idx="2">
+            <a:schemeClr val="accent1"/>
+          </a:effectRef>
+          <a:fontRef idx="minor">
+            <a:schemeClr val="lt1"/>
+          </a:fontRef>
+        </p:style>
+        <p:txBody>
+          <a:bodyPr rtlCol="0" anchor="ctr"/>
+          <a:lstStyle/>
+          <a:p>
+            <a:pPr algn="ctr"/>
+          </a:p>
+        </p:txBody>
+      </p:sp>
+      <p:sp>
+        <p:nvSpPr>
+          <p:cNvPr id="15" name="Rectangle 14"/>
+          <p:cNvSpPr/>
+          <p:nvPr/>
+        </p:nvSpPr>
+        <p:spPr>
+          <a:xfrm>
+            <a:off x="4498848" y="2697480"/>
+            <a:ext cx="91440" cy="2423160"/>
+          </a:xfrm>
+          <a:prstGeom prst="rect">
+            <a:avLst/>
+          </a:prstGeom>
+          <a:solidFill>
+            <a:srgbClr val="F5C46B"/>
+          </a:solidFill>
+          <a:ln>
+            <a:noFill/>
+          </a:ln>
+        </p:spPr>
+        <p:style>
+          <a:lnRef idx="1">
+            <a:schemeClr val="accent1"/>
+          </a:lnRef>
+          <a:fillRef idx="3">
+            <a:schemeClr val="accent1"/>
+          </a:fillRef>
+          <a:effectRef idx="2">
+            <a:schemeClr val="accent1"/>
+          </a:effectRef>
+          <a:fontRef idx="minor">
+            <a:schemeClr val="lt1"/>
+          </a:fontRef>
+        </p:style>
+        <p:txBody>
+          <a:bodyPr rtlCol="0" anchor="ctr"/>
+          <a:lstStyle/>
+          <a:p>
+            <a:pPr algn="ctr"/>
+          </a:p>
+        </p:txBody>
+      </p:sp>
+      <p:sp>
+        <p:nvSpPr>
+          <p:cNvPr id="16" name="TextBox 15"/>
+          <p:cNvSpPr txBox="1"/>
+          <p:nvPr/>
+        </p:nvSpPr>
+        <p:spPr>
+          <a:xfrm>
+            <a:off x="4773168" y="2971800"/>
+            <a:ext cx="2514600" cy="219456"/>
+          </a:xfrm>
+          <a:prstGeom prst="rect">
+            <a:avLst/>
+          </a:prstGeom>
+          <a:noFill/>
+        </p:spPr>
+        <p:txBody>
+          <a:bodyPr wrap="square" lIns="27432" rIns="27432" anchor="ctr">
+            <a:spAutoFit/>
+          </a:bodyPr>
+          <a:lstStyle/>
+          <a:p>
+            <a:pPr algn="l"/>
+            <a:r>
+              <a:rPr sz="1000" b="1">
+                <a:solidFill>
+                  <a:srgbClr val="F5C46B"/>
+                </a:solidFill>
+                <a:latin typeface="Aptos"/>
+              </a:rPr>
+              <a:t>MUTUAL AID</a:t>
+            </a:r>
+          </a:p>
+        </p:txBody>
+      </p:sp>
+      <p:sp>
+        <p:nvSpPr>
           <p:cNvPr id="17" name="TextBox 16"/>
           <p:cNvSpPr txBox="1"/>
           <p:nvPr/>
         </p:nvSpPr>
         <p:spPr>
           <a:xfrm>
-            <a:off x="8595360" y="3063240"/>
-            <a:ext cx="2651760" cy="347472"/>
+            <a:off x="4773168" y="3364992"/>
+            <a:ext cx="2651760" cy="457200"/>
           </a:xfrm>
           <a:prstGeom prst="rect">
             <a:avLst/>
@@ -4096,7 +4343,7 @@
           <a:noFill/>
         </p:spPr>
         <p:txBody>
-          <a:bodyPr wrap="square" lIns="18288" rIns="18288" anchor="ctr">
+          <a:bodyPr wrap="square" lIns="27432" rIns="27432" anchor="ctr">
             <a:spAutoFit/>
           </a:bodyPr>
           <a:lstStyle/>
@@ -4105,25 +4352,146 @@
             <a:r>
               <a:rPr sz="2200" b="1">
                 <a:solidFill>
-                  <a:srgbClr val="241C17"/>
+                  <a:srgbClr val="EEDCE6"/>
+                </a:solidFill>
+                <a:latin typeface="Aptos Display"/>
+              </a:rPr>
+              <a:t>Campus SOS</a:t>
+            </a:r>
+          </a:p>
+        </p:txBody>
+      </p:sp>
+      <p:sp>
+        <p:nvSpPr>
+          <p:cNvPr id="18" name="TextBox 17"/>
+          <p:cNvSpPr txBox="1"/>
+          <p:nvPr/>
+        </p:nvSpPr>
+        <p:spPr>
+          <a:xfrm>
+            <a:off x="4773168" y="4069080"/>
+            <a:ext cx="2651760" cy="777240"/>
+          </a:xfrm>
+          <a:prstGeom prst="rect">
+            <a:avLst/>
+          </a:prstGeom>
+          <a:noFill/>
+        </p:spPr>
+        <p:txBody>
+          <a:bodyPr wrap="square" lIns="27432" rIns="27432" anchor="ctr">
+            <a:spAutoFit/>
+          </a:bodyPr>
+          <a:lstStyle/>
+          <a:p>
+            <a:pPr algn="l"/>
+            <a:r>
+              <a:rPr sz="1400" b="0">
+                <a:solidFill>
+                  <a:srgbClr val="EEDCE6"/>
                 </a:solidFill>
                 <a:latin typeface="Aptos"/>
               </a:rPr>
-              <a:t>Belong</a:t>
-            </a:r>
-          </a:p>
-        </p:txBody>
-      </p:sp>
-      <p:sp>
-        <p:nvSpPr>
-          <p:cNvPr id="18" name="TextBox 17"/>
+              <a:t>A student at GSU can request a sanitary pad, form a study circle, or reach nearby peers in minutes.</a:t>
+            </a:r>
+          </a:p>
+        </p:txBody>
+      </p:sp>
+      <p:sp>
+        <p:nvSpPr>
+          <p:cNvPr id="19" name="Rounded Rectangle 18"/>
+          <p:cNvSpPr/>
+          <p:nvPr/>
+        </p:nvSpPr>
+        <p:spPr>
+          <a:xfrm>
+            <a:off x="8247888" y="2697480"/>
+            <a:ext cx="3246120" cy="2423160"/>
+          </a:xfrm>
+          <a:prstGeom prst="roundRect">
+            <a:avLst/>
+          </a:prstGeom>
+          <a:solidFill>
+            <a:srgbClr val="2A1C26"/>
+          </a:solidFill>
+          <a:ln>
+            <a:noFill/>
+          </a:ln>
+        </p:spPr>
+        <p:style>
+          <a:lnRef idx="1">
+            <a:schemeClr val="accent1"/>
+          </a:lnRef>
+          <a:fillRef idx="3">
+            <a:schemeClr val="accent1"/>
+          </a:fillRef>
+          <a:effectRef idx="2">
+            <a:schemeClr val="accent1"/>
+          </a:effectRef>
+          <a:fontRef idx="minor">
+            <a:schemeClr val="lt1"/>
+          </a:fontRef>
+        </p:style>
+        <p:txBody>
+          <a:bodyPr rtlCol="0" anchor="ctr"/>
+          <a:lstStyle/>
+          <a:p>
+            <a:pPr algn="ctr"/>
+          </a:p>
+        </p:txBody>
+      </p:sp>
+      <p:sp>
+        <p:nvSpPr>
+          <p:cNvPr id="20" name="Rectangle 19"/>
+          <p:cNvSpPr/>
+          <p:nvPr/>
+        </p:nvSpPr>
+        <p:spPr>
+          <a:xfrm>
+            <a:off x="8247888" y="2697480"/>
+            <a:ext cx="91440" cy="2423160"/>
+          </a:xfrm>
+          <a:prstGeom prst="rect">
+            <a:avLst/>
+          </a:prstGeom>
+          <a:solidFill>
+            <a:srgbClr val="B98DA9"/>
+          </a:solidFill>
+          <a:ln>
+            <a:noFill/>
+          </a:ln>
+        </p:spPr>
+        <p:style>
+          <a:lnRef idx="1">
+            <a:schemeClr val="accent1"/>
+          </a:lnRef>
+          <a:fillRef idx="3">
+            <a:schemeClr val="accent1"/>
+          </a:fillRef>
+          <a:effectRef idx="2">
+            <a:schemeClr val="accent1"/>
+          </a:effectRef>
+          <a:fontRef idx="minor">
+            <a:schemeClr val="lt1"/>
+          </a:fontRef>
+        </p:style>
+        <p:txBody>
+          <a:bodyPr rtlCol="0" anchor="ctr"/>
+          <a:lstStyle/>
+          <a:p>
+            <a:pPr algn="ctr"/>
+          </a:p>
+        </p:txBody>
+      </p:sp>
+      <p:sp>
+        <p:nvSpPr>
+          <p:cNvPr id="21" name="TextBox 20"/>
           <p:cNvSpPr txBox="1"/>
           <p:nvPr/>
         </p:nvSpPr>
         <p:spPr>
           <a:xfrm>
-            <a:off x="8595360" y="3566160"/>
-            <a:ext cx="2697480" cy="1005840"/>
+            <a:off x="8522208" y="2971800"/>
+            <a:ext cx="2514600" cy="219456"/>
           </a:xfrm>
           <a:prstGeom prst="rect">
             <a:avLst/>
@@ -4131,34 +4499,34 @@
           <a:noFill/>
         </p:spPr>
         <p:txBody>
-          <a:bodyPr wrap="square" lIns="18288" rIns="18288" anchor="ctr">
+          <a:bodyPr wrap="square" lIns="27432" rIns="27432" anchor="ctr">
             <a:spAutoFit/>
           </a:bodyPr>
           <a:lstStyle/>
           <a:p>
             <a:pPr algn="l"/>
             <a:r>
-              <a:rPr sz="1500" b="0">
-                <a:solidFill>
-                  <a:srgbClr val="786B62"/>
+              <a:rPr sz="1000" b="1">
+                <a:solidFill>
+                  <a:srgbClr val="F5C46B"/>
                 </a:solidFill>
                 <a:latin typeface="Aptos"/>
               </a:rPr>
-              <a:t>Connection is valuable only when people feel safe enough to ask, share, and return.</a:t>
-            </a:r>
-          </a:p>
-        </p:txBody>
-      </p:sp>
-      <p:sp>
-        <p:nvSpPr>
-          <p:cNvPr id="19" name="TextBox 18"/>
+              <a:t>CAREER</a:t>
+            </a:r>
+          </a:p>
+        </p:txBody>
+      </p:sp>
+      <p:sp>
+        <p:nvSpPr>
+          <p:cNvPr id="22" name="TextBox 21"/>
           <p:cNvSpPr txBox="1"/>
           <p:nvPr/>
         </p:nvSpPr>
         <p:spPr>
           <a:xfrm>
-            <a:off x="731520" y="5486400"/>
-            <a:ext cx="10789920" cy="411480"/>
+            <a:off x="8522208" y="3364992"/>
+            <a:ext cx="2651760" cy="457200"/>
           </a:xfrm>
           <a:prstGeom prst="rect">
             <a:avLst/>
@@ -4166,34 +4534,69 @@
           <a:noFill/>
         </p:spPr>
         <p:txBody>
-          <a:bodyPr wrap="square" lIns="18288" rIns="18288" anchor="ctr">
+          <a:bodyPr wrap="square" lIns="27432" rIns="27432" anchor="ctr">
             <a:spAutoFit/>
           </a:bodyPr>
           <a:lstStyle/>
           <a:p>
             <a:pPr algn="l"/>
             <a:r>
-              <a:rPr sz="2100" b="1">
-                <a:solidFill>
-                  <a:srgbClr val="875D78"/>
+              <a:rPr sz="2200" b="1">
+                <a:solidFill>
+                  <a:srgbClr val="EEDCE6"/>
+                </a:solidFill>
+                <a:latin typeface="Aptos Display"/>
+              </a:rPr>
+              <a:t>Lèi AI Concierge</a:t>
+            </a:r>
+          </a:p>
+        </p:txBody>
+      </p:sp>
+      <p:sp>
+        <p:nvSpPr>
+          <p:cNvPr id="23" name="TextBox 22"/>
+          <p:cNvSpPr txBox="1"/>
+          <p:nvPr/>
+        </p:nvSpPr>
+        <p:spPr>
+          <a:xfrm>
+            <a:off x="8522208" y="4069080"/>
+            <a:ext cx="2651760" cy="777240"/>
+          </a:xfrm>
+          <a:prstGeom prst="rect">
+            <a:avLst/>
+          </a:prstGeom>
+          <a:noFill/>
+        </p:spPr>
+        <p:txBody>
+          <a:bodyPr wrap="square" lIns="27432" rIns="27432" anchor="ctr">
+            <a:spAutoFit/>
+          </a:bodyPr>
+          <a:lstStyle/>
+          <a:p>
+            <a:pPr algn="l"/>
+            <a:r>
+              <a:rPr sz="1400" b="0">
+                <a:solidFill>
+                  <a:srgbClr val="EEDCE6"/>
                 </a:solidFill>
                 <a:latin typeface="Aptos"/>
               </a:rPr>
-              <a:t>The gap: support exists, but it is not connected to the woman's next step.</a:t>
-            </a:r>
-          </a:p>
-        </p:txBody>
-      </p:sp>
-      <p:sp>
-        <p:nvSpPr>
-          <p:cNvPr id="20" name="TextBox 19"/>
+              <a:t>Resume feedback, career coaching, wellness grounding, and a clear next action in one private conversation.</a:t>
+            </a:r>
+          </a:p>
+        </p:txBody>
+      </p:sp>
+      <p:sp>
+        <p:nvSpPr>
+          <p:cNvPr id="24" name="TextBox 23"/>
           <p:cNvSpPr txBox="1"/>
           <p:nvPr/>
         </p:nvSpPr>
         <p:spPr>
           <a:xfrm>
-            <a:off x="658368" y="6473952"/>
-            <a:ext cx="3657600" cy="182880"/>
+            <a:off x="749808" y="5715000"/>
+            <a:ext cx="10607040" cy="365760"/>
           </a:xfrm>
           <a:prstGeom prst="rect">
             <a:avLst/>
@@ -4201,55 +4604,20 @@
           <a:noFill/>
         </p:spPr>
         <p:txBody>
-          <a:bodyPr wrap="square" lIns="18288" rIns="18288" anchor="ctr">
+          <a:bodyPr wrap="square" lIns="27432" rIns="27432" anchor="ctr">
             <a:spAutoFit/>
           </a:bodyPr>
           <a:lstStyle/>
           <a:p>
             <a:pPr algn="l"/>
             <a:r>
-              <a:rPr sz="900" b="0">
-                <a:solidFill>
-                  <a:srgbClr val="786B62"/>
+              <a:rPr sz="1800" b="1">
+                <a:solidFill>
+                  <a:srgbClr val="F5C46B"/>
                 </a:solidFill>
                 <a:latin typeface="Aptos"/>
               </a:rPr>
-              <a:t>LEI  /  Hackathon pitch</a:t>
-            </a:r>
-          </a:p>
-        </p:txBody>
-      </p:sp>
-      <p:sp>
-        <p:nvSpPr>
-          <p:cNvPr id="21" name="TextBox 20"/>
-          <p:cNvSpPr txBox="1"/>
-          <p:nvPr/>
-        </p:nvSpPr>
-        <p:spPr>
-          <a:xfrm>
-            <a:off x="11064240" y="6473952"/>
-            <a:ext cx="457200" cy="182880"/>
-          </a:xfrm>
-          <a:prstGeom prst="rect">
-            <a:avLst/>
-          </a:prstGeom>
-          <a:noFill/>
-        </p:spPr>
-        <p:txBody>
-          <a:bodyPr wrap="square" lIns="18288" rIns="18288" anchor="ctr">
-            <a:spAutoFit/>
-          </a:bodyPr>
-          <a:lstStyle/>
-          <a:p>
-            <a:pPr algn="r"/>
-            <a:r>
-              <a:rPr sz="900" b="1">
-                <a:solidFill>
-                  <a:srgbClr val="875D78"/>
-                </a:solidFill>
-                <a:latin typeface="Aptos"/>
-              </a:rPr>
-              <a:t>02</a:t>
+              <a:t>Track outcome: more access to learning, more career agency, more women able to help one another.</a:t>
             </a:r>
           </a:p>
         </p:txBody>
@@ -4287,7 +4655,7 @@
             <a:avLst/>
           </a:prstGeom>
           <a:solidFill>
-            <a:srgbClr val="120B10"/>
+            <a:srgbClr val="FCFBF9"/>
           </a:solidFill>
           <a:ln>
             <a:noFill/>
@@ -4323,8 +4691,8 @@
         </p:nvSpPr>
         <p:spPr>
           <a:xfrm>
-            <a:off x="658368" y="438912"/>
-            <a:ext cx="4114800" cy="274320"/>
+            <a:off x="658368" y="384048"/>
+            <a:ext cx="5029200" cy="228600"/>
           </a:xfrm>
           <a:prstGeom prst="rect">
             <a:avLst/>
@@ -4332,7 +4700,7 @@
           <a:noFill/>
         </p:spPr>
         <p:txBody>
-          <a:bodyPr wrap="square" lIns="18288" rIns="18288" anchor="ctr">
+          <a:bodyPr wrap="square" lIns="27432" rIns="27432" anchor="ctr">
             <a:spAutoFit/>
           </a:bodyPr>
           <a:lstStyle/>
@@ -4345,7 +4713,7 @@
                 </a:solidFill>
                 <a:latin typeface="Aptos"/>
               </a:rPr>
-              <a:t>02  /  THE SOLUTION</a:t>
+              <a:t>03  /  MEANINGFUL CONNECTION</a:t>
             </a:r>
           </a:p>
         </p:txBody>
@@ -4358,8 +4726,8 @@
         </p:nvSpPr>
         <p:spPr>
           <a:xfrm>
-            <a:off x="658368" y="768096"/>
-            <a:ext cx="10789920" cy="658368"/>
+            <a:off x="658368" y="713232"/>
+            <a:ext cx="10607040" cy="685800"/>
           </a:xfrm>
           <a:prstGeom prst="rect">
             <a:avLst/>
@@ -4367,20 +4735,20 @@
           <a:noFill/>
         </p:spPr>
         <p:txBody>
-          <a:bodyPr wrap="square" lIns="18288" rIns="18288" anchor="ctr">
+          <a:bodyPr wrap="square" lIns="27432" rIns="27432" anchor="ctr">
             <a:spAutoFit/>
           </a:bodyPr>
           <a:lstStyle/>
           <a:p>
             <a:pPr algn="l"/>
             <a:r>
-              <a:rPr sz="2800" b="1">
-                <a:solidFill>
-                  <a:srgbClr val="F4E8EE"/>
+              <a:rPr sz="2900" b="1">
+                <a:solidFill>
+                  <a:srgbClr val="EEDCE6"/>
                 </a:solidFill>
                 <a:latin typeface="Aptos Display"/>
               </a:rPr>
-              <a:t>Lèi turns support into a guided journey</a:t>
+              <a:t>Digital connection should translate into real-world safety.</a:t>
             </a:r>
           </a:p>
         </p:txBody>
@@ -4393,8 +4761,8 @@
         </p:nvSpPr>
         <p:spPr>
           <a:xfrm>
-            <a:off x="658368" y="1572768"/>
-            <a:ext cx="1005840" cy="36576"/>
+            <a:off x="658368" y="1536192"/>
+            <a:ext cx="960120" cy="36576"/>
           </a:xfrm>
           <a:prstGeom prst="rect">
             <a:avLst/>
@@ -4436,8 +4804,8 @@
         </p:nvSpPr>
         <p:spPr>
           <a:xfrm>
-            <a:off x="731520" y="1965960"/>
-            <a:ext cx="10698480" cy="411480"/>
+            <a:off x="658368" y="6473952"/>
+            <a:ext cx="3657600" cy="182880"/>
           </a:xfrm>
           <a:prstGeom prst="rect">
             <a:avLst/>
@@ -4445,40 +4813,110 @@
           <a:noFill/>
         </p:spPr>
         <p:txBody>
-          <a:bodyPr wrap="square" lIns="18288" rIns="18288" anchor="ctr">
+          <a:bodyPr wrap="square" lIns="27432" rIns="27432" anchor="ctr">
             <a:spAutoFit/>
           </a:bodyPr>
           <a:lstStyle/>
           <a:p>
             <a:pPr algn="l"/>
             <a:r>
-              <a:rPr sz="2100" b="0">
-                <a:solidFill>
-                  <a:srgbClr val="F4E8EE"/>
+              <a:rPr sz="900" b="0">
+                <a:solidFill>
+                  <a:srgbClr val="EEDCE6"/>
                 </a:solidFill>
                 <a:latin typeface="Aptos"/>
               </a:rPr>
-              <a:t>One trusted front door. Three pathways to momentum.</a:t>
-            </a:r>
-          </a:p>
-        </p:txBody>
-      </p:sp>
-      <p:sp>
-        <p:nvSpPr>
-          <p:cNvPr id="7" name="Rounded Rectangle 6"/>
+              <a:t>LEI  /  Hackathon pitch</a:t>
+            </a:r>
+          </a:p>
+        </p:txBody>
+      </p:sp>
+      <p:sp>
+        <p:nvSpPr>
+          <p:cNvPr id="7" name="TextBox 6"/>
+          <p:cNvSpPr txBox="1"/>
+          <p:nvPr/>
+        </p:nvSpPr>
+        <p:spPr>
+          <a:xfrm>
+            <a:off x="11064240" y="6473952"/>
+            <a:ext cx="457200" cy="182880"/>
+          </a:xfrm>
+          <a:prstGeom prst="rect">
+            <a:avLst/>
+          </a:prstGeom>
+          <a:noFill/>
+        </p:spPr>
+        <p:txBody>
+          <a:bodyPr wrap="square" lIns="27432" rIns="27432" anchor="ctr">
+            <a:spAutoFit/>
+          </a:bodyPr>
+          <a:lstStyle/>
+          <a:p>
+            <a:pPr algn="r"/>
+            <a:r>
+              <a:rPr sz="900" b="1">
+                <a:solidFill>
+                  <a:srgbClr val="F5C46B"/>
+                </a:solidFill>
+                <a:latin typeface="Aptos"/>
+              </a:rPr>
+              <a:t>03</a:t>
+            </a:r>
+          </a:p>
+        </p:txBody>
+      </p:sp>
+      <p:sp>
+        <p:nvSpPr>
+          <p:cNvPr id="8" name="TextBox 7"/>
+          <p:cNvSpPr txBox="1"/>
+          <p:nvPr/>
+        </p:nvSpPr>
+        <p:spPr>
+          <a:xfrm>
+            <a:off x="749808" y="1828800"/>
+            <a:ext cx="10607040" cy="438912"/>
+          </a:xfrm>
+          <a:prstGeom prst="rect">
+            <a:avLst/>
+          </a:prstGeom>
+          <a:noFill/>
+        </p:spPr>
+        <p:txBody>
+          <a:bodyPr wrap="square" lIns="27432" rIns="27432" anchor="ctr">
+            <a:spAutoFit/>
+          </a:bodyPr>
+          <a:lstStyle/>
+          <a:p>
+            <a:pPr algn="l"/>
+            <a:r>
+              <a:rPr sz="1900" b="0">
+                <a:solidFill>
+                  <a:srgbClr val="241C17"/>
+                </a:solidFill>
+                <a:latin typeface="Aptos"/>
+              </a:rPr>
+              <a:t>Lèi gives connection context: how I feel, where I am, and what kind of support I need today.</a:t>
+            </a:r>
+          </a:p>
+        </p:txBody>
+      </p:sp>
+      <p:sp>
+        <p:nvSpPr>
+          <p:cNvPr id="9" name="Rounded Rectangle 8"/>
           <p:cNvSpPr/>
           <p:nvPr/>
         </p:nvSpPr>
         <p:spPr>
           <a:xfrm>
-            <a:off x="777240" y="2743200"/>
-            <a:ext cx="3246120" cy="2286000"/>
+            <a:off x="749808" y="2697480"/>
+            <a:ext cx="3246120" cy="2423160"/>
           </a:xfrm>
           <a:prstGeom prst="roundRect">
             <a:avLst/>
           </a:prstGeom>
           <a:solidFill>
-            <a:srgbClr val="2A1C26"/>
+            <a:srgbClr val="FFFFFF"/>
           </a:solidFill>
           <a:ln>
             <a:noFill/>
@@ -4508,14 +4946,14 @@
       </p:sp>
       <p:sp>
         <p:nvSpPr>
-          <p:cNvPr id="8" name="TextBox 7"/>
+          <p:cNvPr id="10" name="TextBox 9"/>
           <p:cNvSpPr txBox="1"/>
           <p:nvPr/>
         </p:nvSpPr>
         <p:spPr>
           <a:xfrm>
-            <a:off x="1033271" y="2999232"/>
-            <a:ext cx="594360" cy="365760"/>
+            <a:off x="1005840" y="2971800"/>
+            <a:ext cx="2651760" cy="228600"/>
           </a:xfrm>
           <a:prstGeom prst="rect">
             <a:avLst/>
@@ -4523,34 +4961,34 @@
           <a:noFill/>
         </p:spPr>
         <p:txBody>
-          <a:bodyPr wrap="square" lIns="18288" rIns="18288" anchor="ctr">
+          <a:bodyPr wrap="square" lIns="27432" rIns="27432" anchor="ctr">
             <a:spAutoFit/>
           </a:bodyPr>
           <a:lstStyle/>
           <a:p>
             <a:pPr algn="l"/>
             <a:r>
-              <a:rPr sz="1500" b="1">
-                <a:solidFill>
-                  <a:srgbClr val="F5C46B"/>
+              <a:rPr sz="1000" b="1">
+                <a:solidFill>
+                  <a:srgbClr val="43283A"/>
                 </a:solidFill>
                 <a:latin typeface="Aptos"/>
               </a:rPr>
-              <a:t>01</a:t>
-            </a:r>
-          </a:p>
-        </p:txBody>
-      </p:sp>
-      <p:sp>
-        <p:nvSpPr>
-          <p:cNvPr id="9" name="TextBox 8"/>
+              <a:t>WELLBEING</a:t>
+            </a:r>
+          </a:p>
+        </p:txBody>
+      </p:sp>
+      <p:sp>
+        <p:nvSpPr>
+          <p:cNvPr id="11" name="TextBox 10"/>
           <p:cNvSpPr txBox="1"/>
           <p:nvPr/>
         </p:nvSpPr>
         <p:spPr>
           <a:xfrm>
-            <a:off x="1033271" y="3456432"/>
-            <a:ext cx="2560320" cy="411480"/>
+            <a:off x="1005840" y="3355848"/>
+            <a:ext cx="2651760" cy="566928"/>
           </a:xfrm>
           <a:prstGeom prst="rect">
             <a:avLst/>
@@ -4558,34 +4996,34 @@
           <a:noFill/>
         </p:spPr>
         <p:txBody>
-          <a:bodyPr wrap="square" lIns="18288" rIns="18288" anchor="ctr">
+          <a:bodyPr wrap="square" lIns="27432" rIns="27432" anchor="ctr">
             <a:spAutoFit/>
           </a:bodyPr>
           <a:lstStyle/>
           <a:p>
             <a:pPr algn="l"/>
             <a:r>
-              <a:rPr sz="2500" b="1">
-                <a:solidFill>
-                  <a:srgbClr val="F4E8EE"/>
+              <a:rPr sz="2000" b="1">
+                <a:solidFill>
+                  <a:srgbClr val="241C17"/>
                 </a:solidFill>
                 <a:latin typeface="Aptos Display"/>
               </a:rPr>
-              <a:t>Learn</a:t>
-            </a:r>
-          </a:p>
-        </p:txBody>
-      </p:sp>
-      <p:sp>
-        <p:nvSpPr>
-          <p:cNvPr id="10" name="TextBox 9"/>
+              <a:t>What part of HER are you today?</a:t>
+            </a:r>
+          </a:p>
+        </p:txBody>
+      </p:sp>
+      <p:sp>
+        <p:nvSpPr>
+          <p:cNvPr id="12" name="TextBox 11"/>
           <p:cNvSpPr txBox="1"/>
           <p:nvPr/>
         </p:nvSpPr>
         <p:spPr>
           <a:xfrm>
-            <a:off x="1033271" y="4069080"/>
-            <a:ext cx="2560320" cy="685800"/>
+            <a:off x="1005840" y="4114800"/>
+            <a:ext cx="2670048" cy="713232"/>
           </a:xfrm>
           <a:prstGeom prst="rect">
             <a:avLst/>
@@ -4593,40 +5031,40 @@
           <a:noFill/>
         </p:spPr>
         <p:txBody>
-          <a:bodyPr wrap="square" lIns="18288" rIns="18288" anchor="ctr">
+          <a:bodyPr wrap="square" lIns="27432" rIns="27432" anchor="ctr">
             <a:spAutoFit/>
           </a:bodyPr>
           <a:lstStyle/>
           <a:p>
             <a:pPr algn="l"/>
             <a:r>
-              <a:rPr sz="1500" b="0">
-                <a:solidFill>
-                  <a:srgbClr val="F4E8EE"/>
+              <a:rPr sz="1400" b="0">
+                <a:solidFill>
+                  <a:srgbClr val="786B62"/>
                 </a:solidFill>
                 <a:latin typeface="Aptos"/>
               </a:rPr>
-              <a:t>Campus SOS, student aid, grounding resources, and peer knowledge.</a:t>
-            </a:r>
-          </a:p>
-        </p:txBody>
-      </p:sp>
-      <p:sp>
-        <p:nvSpPr>
-          <p:cNvPr id="11" name="Rounded Rectangle 10"/>
+              <a:t>Teams-style status lets members signal their state without changing what the algorithm shows them.</a:t>
+            </a:r>
+          </a:p>
+        </p:txBody>
+      </p:sp>
+      <p:sp>
+        <p:nvSpPr>
+          <p:cNvPr id="13" name="Rounded Rectangle 12"/>
           <p:cNvSpPr/>
           <p:nvPr/>
         </p:nvSpPr>
         <p:spPr>
           <a:xfrm>
-            <a:off x="4544568" y="2743200"/>
-            <a:ext cx="3246120" cy="2286000"/>
+            <a:off x="4498848" y="2697480"/>
+            <a:ext cx="3246120" cy="2423160"/>
           </a:xfrm>
           <a:prstGeom prst="roundRect">
             <a:avLst/>
           </a:prstGeom>
           <a:solidFill>
-            <a:srgbClr val="2A1C26"/>
+            <a:srgbClr val="FFFFFF"/>
           </a:solidFill>
           <a:ln>
             <a:noFill/>
@@ -4656,14 +5094,14 @@
       </p:sp>
       <p:sp>
         <p:nvSpPr>
-          <p:cNvPr id="12" name="TextBox 11"/>
+          <p:cNvPr id="14" name="TextBox 13"/>
           <p:cNvSpPr txBox="1"/>
           <p:nvPr/>
         </p:nvSpPr>
         <p:spPr>
           <a:xfrm>
-            <a:off x="4800600" y="2999232"/>
-            <a:ext cx="594360" cy="365760"/>
+            <a:off x="4754880" y="2971800"/>
+            <a:ext cx="2651760" cy="228600"/>
           </a:xfrm>
           <a:prstGeom prst="rect">
             <a:avLst/>
@@ -4671,34 +5109,34 @@
           <a:noFill/>
         </p:spPr>
         <p:txBody>
-          <a:bodyPr wrap="square" lIns="18288" rIns="18288" anchor="ctr">
+          <a:bodyPr wrap="square" lIns="27432" rIns="27432" anchor="ctr">
             <a:spAutoFit/>
           </a:bodyPr>
           <a:lstStyle/>
           <a:p>
             <a:pPr algn="l"/>
             <a:r>
-              <a:rPr sz="1500" b="1">
-                <a:solidFill>
-                  <a:srgbClr val="F5C46B"/>
+              <a:rPr sz="1000" b="1">
+                <a:solidFill>
+                  <a:srgbClr val="43283A"/>
                 </a:solidFill>
                 <a:latin typeface="Aptos"/>
               </a:rPr>
-              <a:t>02</a:t>
-            </a:r>
-          </a:p>
-        </p:txBody>
-      </p:sp>
-      <p:sp>
-        <p:nvSpPr>
-          <p:cNvPr id="13" name="TextBox 12"/>
+              <a:t>LOCAL</a:t>
+            </a:r>
+          </a:p>
+        </p:txBody>
+      </p:sp>
+      <p:sp>
+        <p:nvSpPr>
+          <p:cNvPr id="15" name="TextBox 14"/>
           <p:cNvSpPr txBox="1"/>
           <p:nvPr/>
         </p:nvSpPr>
         <p:spPr>
           <a:xfrm>
-            <a:off x="4800600" y="3456432"/>
-            <a:ext cx="2560320" cy="411480"/>
+            <a:off x="4754880" y="3355848"/>
+            <a:ext cx="2651760" cy="566928"/>
           </a:xfrm>
           <a:prstGeom prst="rect">
             <a:avLst/>
@@ -4706,34 +5144,34 @@
           <a:noFill/>
         </p:spPr>
         <p:txBody>
-          <a:bodyPr wrap="square" lIns="18288" rIns="18288" anchor="ctr">
+          <a:bodyPr wrap="square" lIns="27432" rIns="27432" anchor="ctr">
             <a:spAutoFit/>
           </a:bodyPr>
           <a:lstStyle/>
           <a:p>
             <a:pPr algn="l"/>
             <a:r>
-              <a:rPr sz="2500" b="1">
-                <a:solidFill>
-                  <a:srgbClr val="F4E8EE"/>
+              <a:rPr sz="2000" b="1">
+                <a:solidFill>
+                  <a:srgbClr val="241C17"/>
                 </a:solidFill>
                 <a:latin typeface="Aptos Display"/>
               </a:rPr>
-              <a:t>Grow</a:t>
-            </a:r>
-          </a:p>
-        </p:txBody>
-      </p:sp>
-      <p:sp>
-        <p:nvSpPr>
-          <p:cNvPr id="14" name="TextBox 13"/>
+              <a:t>USA City Meetups</a:t>
+            </a:r>
+          </a:p>
+        </p:txBody>
+      </p:sp>
+      <p:sp>
+        <p:nvSpPr>
+          <p:cNvPr id="16" name="TextBox 15"/>
           <p:cNvSpPr txBox="1"/>
           <p:nvPr/>
         </p:nvSpPr>
         <p:spPr>
           <a:xfrm>
-            <a:off x="4800600" y="4069080"/>
-            <a:ext cx="2560320" cy="685800"/>
+            <a:off x="4754880" y="4114800"/>
+            <a:ext cx="2670048" cy="713232"/>
           </a:xfrm>
           <a:prstGeom prst="rect">
             <a:avLst/>
@@ -4741,40 +5179,40 @@
           <a:noFill/>
         </p:spPr>
         <p:txBody>
-          <a:bodyPr wrap="square" lIns="18288" rIns="18288" anchor="ctr">
+          <a:bodyPr wrap="square" lIns="27432" rIns="27432" anchor="ctr">
             <a:spAutoFit/>
           </a:bodyPr>
           <a:lstStyle/>
           <a:p>
             <a:pPr algn="l"/>
             <a:r>
-              <a:rPr sz="1500" b="0">
-                <a:solidFill>
-                  <a:srgbClr val="F4E8EE"/>
+              <a:rPr sz="1400" b="0">
+                <a:solidFill>
+                  <a:srgbClr val="786B62"/>
                 </a:solidFill>
                 <a:latin typeface="Aptos"/>
               </a:rPr>
-              <a:t>Career conversations, AI coaching, milestones, and opportunity sharing.</a:t>
-            </a:r>
-          </a:p>
-        </p:txBody>
-      </p:sp>
-      <p:sp>
-        <p:nvSpPr>
-          <p:cNvPr id="15" name="Rounded Rectangle 14"/>
+              <a:t>Filter by city and state to build trusted friendships in verified public settings, like NFS in Atlanta.</a:t>
+            </a:r>
+          </a:p>
+        </p:txBody>
+      </p:sp>
+      <p:sp>
+        <p:nvSpPr>
+          <p:cNvPr id="17" name="Rounded Rectangle 16"/>
           <p:cNvSpPr/>
           <p:nvPr/>
         </p:nvSpPr>
         <p:spPr>
           <a:xfrm>
-            <a:off x="8311896" y="2743200"/>
-            <a:ext cx="3246120" cy="2286000"/>
+            <a:off x="8247888" y="2697480"/>
+            <a:ext cx="3246120" cy="2423160"/>
           </a:xfrm>
           <a:prstGeom prst="roundRect">
             <a:avLst/>
           </a:prstGeom>
           <a:solidFill>
-            <a:srgbClr val="2A1C26"/>
+            <a:srgbClr val="FFFFFF"/>
           </a:solidFill>
           <a:ln>
             <a:noFill/>
@@ -4804,14 +5242,14 @@
       </p:sp>
       <p:sp>
         <p:nvSpPr>
-          <p:cNvPr id="16" name="TextBox 15"/>
+          <p:cNvPr id="18" name="TextBox 17"/>
           <p:cNvSpPr txBox="1"/>
           <p:nvPr/>
         </p:nvSpPr>
         <p:spPr>
           <a:xfrm>
-            <a:off x="8567928" y="2999232"/>
-            <a:ext cx="594360" cy="365760"/>
+            <a:off x="8503919" y="2971800"/>
+            <a:ext cx="2651760" cy="228600"/>
           </a:xfrm>
           <a:prstGeom prst="rect">
             <a:avLst/>
@@ -4819,34 +5257,34 @@
           <a:noFill/>
         </p:spPr>
         <p:txBody>
-          <a:bodyPr wrap="square" lIns="18288" rIns="18288" anchor="ctr">
+          <a:bodyPr wrap="square" lIns="27432" rIns="27432" anchor="ctr">
             <a:spAutoFit/>
           </a:bodyPr>
           <a:lstStyle/>
           <a:p>
             <a:pPr algn="l"/>
             <a:r>
-              <a:rPr sz="1500" b="1">
-                <a:solidFill>
-                  <a:srgbClr val="F5C46B"/>
+              <a:rPr sz="1000" b="1">
+                <a:solidFill>
+                  <a:srgbClr val="43283A"/>
                 </a:solidFill>
                 <a:latin typeface="Aptos"/>
               </a:rPr>
-              <a:t>03</a:t>
-            </a:r>
-          </a:p>
-        </p:txBody>
-      </p:sp>
-      <p:sp>
-        <p:nvSpPr>
-          <p:cNvPr id="17" name="TextBox 16"/>
+              <a:t>SAFETY</a:t>
+            </a:r>
+          </a:p>
+        </p:txBody>
+      </p:sp>
+      <p:sp>
+        <p:nvSpPr>
+          <p:cNvPr id="19" name="TextBox 18"/>
           <p:cNvSpPr txBox="1"/>
           <p:nvPr/>
         </p:nvSpPr>
         <p:spPr>
           <a:xfrm>
-            <a:off x="8567928" y="3456432"/>
-            <a:ext cx="2560320" cy="411480"/>
+            <a:off x="8503919" y="3355848"/>
+            <a:ext cx="2651760" cy="566928"/>
           </a:xfrm>
           <a:prstGeom prst="rect">
             <a:avLst/>
@@ -4854,34 +5292,34 @@
           <a:noFill/>
         </p:spPr>
         <p:txBody>
-          <a:bodyPr wrap="square" lIns="18288" rIns="18288" anchor="ctr">
+          <a:bodyPr wrap="square" lIns="27432" rIns="27432" anchor="ctr">
             <a:spAutoFit/>
           </a:bodyPr>
           <a:lstStyle/>
           <a:p>
             <a:pPr algn="l"/>
             <a:r>
-              <a:rPr sz="2500" b="1">
-                <a:solidFill>
-                  <a:srgbClr val="F4E8EE"/>
+              <a:rPr sz="2000" b="1">
+                <a:solidFill>
+                  <a:srgbClr val="241C17"/>
                 </a:solidFill>
                 <a:latin typeface="Aptos Display"/>
               </a:rPr>
-              <a:t>Connect</a:t>
-            </a:r>
-          </a:p>
-        </p:txBody>
-      </p:sp>
-      <p:sp>
-        <p:nvSpPr>
-          <p:cNvPr id="18" name="TextBox 17"/>
+              <a:t>Beacons and legal support</a:t>
+            </a:r>
+          </a:p>
+        </p:txBody>
+      </p:sp>
+      <p:sp>
+        <p:nvSpPr>
+          <p:cNvPr id="20" name="TextBox 19"/>
           <p:cNvSpPr txBox="1"/>
           <p:nvPr/>
         </p:nvSpPr>
         <p:spPr>
           <a:xfrm>
-            <a:off x="8567928" y="4069080"/>
-            <a:ext cx="2560320" cy="685800"/>
+            <a:off x="8503919" y="4114800"/>
+            <a:ext cx="2670048" cy="713232"/>
           </a:xfrm>
           <a:prstGeom prst="rect">
             <a:avLst/>
@@ -4889,34 +5327,34 @@
           <a:noFill/>
         </p:spPr>
         <p:txBody>
-          <a:bodyPr wrap="square" lIns="18288" rIns="18288" anchor="ctr">
+          <a:bodyPr wrap="square" lIns="27432" rIns="27432" anchor="ctr">
             <a:spAutoFit/>
           </a:bodyPr>
           <a:lstStyle/>
           <a:p>
             <a:pPr algn="l"/>
             <a:r>
-              <a:rPr sz="1500" b="0">
-                <a:solidFill>
-                  <a:srgbClr val="F4E8EE"/>
+              <a:rPr sz="1400" b="0">
+                <a:solidFill>
+                  <a:srgbClr val="786B62"/>
                 </a:solidFill>
                 <a:latin typeface="Aptos"/>
               </a:rPr>
-              <a:t>Wellbeing signals, circles, meetups, DMs, and mutual aid.</a:t>
-            </a:r>
-          </a:p>
-        </p:txBody>
-      </p:sp>
-      <p:sp>
-        <p:nvSpPr>
-          <p:cNvPr id="19" name="TextBox 18"/>
+              <a:t>Safety beacons, rights guides, emergency hotlines, and support timers connect digital care to physical reality.</a:t>
+            </a:r>
+          </a:p>
+        </p:txBody>
+      </p:sp>
+      <p:sp>
+        <p:nvSpPr>
+          <p:cNvPr id="21" name="TextBox 20"/>
           <p:cNvSpPr txBox="1"/>
           <p:nvPr/>
         </p:nvSpPr>
         <p:spPr>
           <a:xfrm>
-            <a:off x="777240" y="5577840"/>
-            <a:ext cx="10698480" cy="411480"/>
+            <a:off x="749808" y="5715000"/>
+            <a:ext cx="10607040" cy="365760"/>
           </a:xfrm>
           <a:prstGeom prst="rect">
             <a:avLst/>
@@ -4924,7 +5362,7 @@
           <a:noFill/>
         </p:spPr>
         <p:txBody>
-          <a:bodyPr wrap="square" lIns="18288" rIns="18288" anchor="ctr">
+          <a:bodyPr wrap="square" lIns="27432" rIns="27432" anchor="ctr">
             <a:spAutoFit/>
           </a:bodyPr>
           <a:lstStyle/>
@@ -4933,81 +5371,11 @@
             <a:r>
               <a:rPr sz="1800" b="1">
                 <a:solidFill>
-                  <a:srgbClr val="F5C46B"/>
+                  <a:srgbClr val="43283A"/>
                 </a:solidFill>
                 <a:latin typeface="Aptos"/>
               </a:rPr>
-              <a:t>The product is not the number of modules. It is the moment a member finds her next useful action.</a:t>
-            </a:r>
-          </a:p>
-        </p:txBody>
-      </p:sp>
-      <p:sp>
-        <p:nvSpPr>
-          <p:cNvPr id="20" name="TextBox 19"/>
-          <p:cNvSpPr txBox="1"/>
-          <p:nvPr/>
-        </p:nvSpPr>
-        <p:spPr>
-          <a:xfrm>
-            <a:off x="658368" y="6473952"/>
-            <a:ext cx="3657600" cy="182880"/>
-          </a:xfrm>
-          <a:prstGeom prst="rect">
-            <a:avLst/>
-          </a:prstGeom>
-          <a:noFill/>
-        </p:spPr>
-        <p:txBody>
-          <a:bodyPr wrap="square" lIns="18288" rIns="18288" anchor="ctr">
-            <a:spAutoFit/>
-          </a:bodyPr>
-          <a:lstStyle/>
-          <a:p>
-            <a:pPr algn="l"/>
-            <a:r>
-              <a:rPr sz="900" b="0">
-                <a:solidFill>
-                  <a:srgbClr val="F4E8EE"/>
-                </a:solidFill>
-                <a:latin typeface="Aptos"/>
-              </a:rPr>
-              <a:t>LEI  /  Hackathon pitch</a:t>
-            </a:r>
-          </a:p>
-        </p:txBody>
-      </p:sp>
-      <p:sp>
-        <p:nvSpPr>
-          <p:cNvPr id="21" name="TextBox 20"/>
-          <p:cNvSpPr txBox="1"/>
-          <p:nvPr/>
-        </p:nvSpPr>
-        <p:spPr>
-          <a:xfrm>
-            <a:off x="11064240" y="6473952"/>
-            <a:ext cx="457200" cy="182880"/>
-          </a:xfrm>
-          <a:prstGeom prst="rect">
-            <a:avLst/>
-          </a:prstGeom>
-          <a:noFill/>
-        </p:spPr>
-        <p:txBody>
-          <a:bodyPr wrap="square" lIns="18288" rIns="18288" anchor="ctr">
-            <a:spAutoFit/>
-          </a:bodyPr>
-          <a:lstStyle/>
-          <a:p>
-            <a:pPr algn="r"/>
-            <a:r>
-              <a:rPr sz="900" b="1">
-                <a:solidFill>
-                  <a:srgbClr val="F5C46B"/>
-                </a:solidFill>
-                <a:latin typeface="Aptos"/>
-              </a:rPr>
-              <a:t>03</a:t>
+              <a:t>Meaningful connection is not a metric. It is a person knowing where to turn next.</a:t>
             </a:r>
           </a:p>
         </p:txBody>
@@ -5081,8 +5449,8 @@
         </p:nvSpPr>
         <p:spPr>
           <a:xfrm>
-            <a:off x="658368" y="438912"/>
-            <a:ext cx="4114800" cy="274320"/>
+            <a:off x="658368" y="384048"/>
+            <a:ext cx="5029200" cy="228600"/>
           </a:xfrm>
           <a:prstGeom prst="rect">
             <a:avLst/>
@@ -5090,7 +5458,7 @@
           <a:noFill/>
         </p:spPr>
         <p:txBody>
-          <a:bodyPr wrap="square" lIns="18288" rIns="18288" anchor="ctr">
+          <a:bodyPr wrap="square" lIns="27432" rIns="27432" anchor="ctr">
             <a:spAutoFit/>
           </a:bodyPr>
           <a:lstStyle/>
@@ -5099,11 +5467,11 @@
             <a:r>
               <a:rPr sz="1000" b="1">
                 <a:solidFill>
-                  <a:srgbClr val="875D78"/>
+                  <a:srgbClr val="F5C46B"/>
                 </a:solidFill>
                 <a:latin typeface="Aptos"/>
               </a:rPr>
-              <a:t>03  /  THE PRODUCT</a:t>
+              <a:t>04  /  TECHNICAL EDGE</a:t>
             </a:r>
           </a:p>
         </p:txBody>
@@ -5116,8 +5484,8 @@
         </p:nvSpPr>
         <p:spPr>
           <a:xfrm>
-            <a:off x="658368" y="768096"/>
-            <a:ext cx="10789920" cy="658368"/>
+            <a:off x="658368" y="713232"/>
+            <a:ext cx="10607040" cy="685800"/>
           </a:xfrm>
           <a:prstGeom prst="rect">
             <a:avLst/>
@@ -5125,20 +5493,20 @@
           <a:noFill/>
         </p:spPr>
         <p:txBody>
-          <a:bodyPr wrap="square" lIns="18288" rIns="18288" anchor="ctr">
+          <a:bodyPr wrap="square" lIns="27432" rIns="27432" anchor="ctr">
             <a:spAutoFit/>
           </a:bodyPr>
           <a:lstStyle/>
           <a:p>
             <a:pPr algn="l"/>
             <a:r>
-              <a:rPr sz="2800" b="1">
-                <a:solidFill>
-                  <a:srgbClr val="241C17"/>
+              <a:rPr sz="2900" b="1">
+                <a:solidFill>
+                  <a:srgbClr val="EEDCE6"/>
                 </a:solidFill>
                 <a:latin typeface="Aptos Display"/>
               </a:rPr>
-              <a:t>Our demo: one member, one connected journey</a:t>
+              <a:t>Trust is not a setting. It is the architecture.</a:t>
             </a:r>
           </a:p>
         </p:txBody>
@@ -5151,121 +5519,8 @@
         </p:nvSpPr>
         <p:spPr>
           <a:xfrm>
-            <a:off x="658368" y="1572768"/>
-            <a:ext cx="1005840" cy="36576"/>
-          </a:xfrm>
-          <a:prstGeom prst="rect">
-            <a:avLst/>
-          </a:prstGeom>
-          <a:solidFill>
-            <a:srgbClr val="875D78"/>
-          </a:solidFill>
-          <a:ln>
-            <a:noFill/>
-          </a:ln>
-        </p:spPr>
-        <p:style>
-          <a:lnRef idx="1">
-            <a:schemeClr val="accent1"/>
-          </a:lnRef>
-          <a:fillRef idx="3">
-            <a:schemeClr val="accent1"/>
-          </a:fillRef>
-          <a:effectRef idx="2">
-            <a:schemeClr val="accent1"/>
-          </a:effectRef>
-          <a:fontRef idx="minor">
-            <a:schemeClr val="lt1"/>
-          </a:fontRef>
-        </p:style>
-        <p:txBody>
-          <a:bodyPr rtlCol="0" anchor="ctr"/>
-          <a:lstStyle/>
-          <a:p>
-            <a:pPr algn="ctr"/>
-          </a:p>
-        </p:txBody>
-      </p:sp>
-      <p:sp>
-        <p:nvSpPr>
-          <p:cNvPr id="6" name="TextBox 5"/>
-          <p:cNvSpPr txBox="1"/>
-          <p:nvPr/>
-        </p:nvSpPr>
-        <p:spPr>
-          <a:xfrm>
-            <a:off x="731520" y="1920240"/>
-            <a:ext cx="10515600" cy="365760"/>
-          </a:xfrm>
-          <a:prstGeom prst="rect">
-            <a:avLst/>
-          </a:prstGeom>
-          <a:noFill/>
-        </p:spPr>
-        <p:txBody>
-          <a:bodyPr wrap="square" lIns="18288" rIns="18288" anchor="ctr">
-            <a:spAutoFit/>
-          </a:bodyPr>
-          <a:lstStyle/>
-          <a:p>
-            <a:pPr algn="l"/>
-            <a:r>
-              <a:rPr sz="2000" b="0">
-                <a:solidFill>
-                  <a:srgbClr val="786B62"/>
-                </a:solidFill>
-                <a:latin typeface="Aptos"/>
-              </a:rPr>
-              <a:t>Tell this story live instead of clicking every feature.</a:t>
-            </a:r>
-          </a:p>
-        </p:txBody>
-      </p:sp>
-      <p:sp>
-        <p:nvSpPr>
-          <p:cNvPr id="7" name="TextBox 6"/>
-          <p:cNvSpPr txBox="1"/>
-          <p:nvPr/>
-        </p:nvSpPr>
-        <p:spPr>
-          <a:xfrm>
-            <a:off x="749808" y="2834640"/>
-            <a:ext cx="548640" cy="365760"/>
-          </a:xfrm>
-          <a:prstGeom prst="rect">
-            <a:avLst/>
-          </a:prstGeom>
-          <a:noFill/>
-        </p:spPr>
-        <p:txBody>
-          <a:bodyPr wrap="square" lIns="18288" rIns="18288" anchor="ctr">
-            <a:spAutoFit/>
-          </a:bodyPr>
-          <a:lstStyle/>
-          <a:p>
-            <a:pPr algn="l"/>
-            <a:r>
-              <a:rPr sz="1500" b="1">
-                <a:solidFill>
-                  <a:srgbClr val="875D78"/>
-                </a:solidFill>
-                <a:latin typeface="Aptos"/>
-              </a:rPr>
-              <a:t>01</a:t>
-            </a:r>
-          </a:p>
-        </p:txBody>
-      </p:sp>
-      <p:sp>
-        <p:nvSpPr>
-          <p:cNvPr id="8" name="Rectangle 7"/>
-          <p:cNvSpPr/>
-          <p:nvPr/>
-        </p:nvSpPr>
-        <p:spPr>
-          <a:xfrm>
-            <a:off x="1408176" y="3017520"/>
-            <a:ext cx="1600200" cy="36576"/>
+            <a:off x="658368" y="1536192"/>
+            <a:ext cx="960120" cy="36576"/>
           </a:xfrm>
           <a:prstGeom prst="rect">
             <a:avLst/>
@@ -5301,14 +5556,14 @@
       </p:sp>
       <p:sp>
         <p:nvSpPr>
-          <p:cNvPr id="9" name="TextBox 8"/>
+          <p:cNvPr id="6" name="TextBox 5"/>
           <p:cNvSpPr txBox="1"/>
           <p:nvPr/>
         </p:nvSpPr>
         <p:spPr>
           <a:xfrm>
-            <a:off x="749808" y="3429000"/>
-            <a:ext cx="2240280" cy="384048"/>
+            <a:off x="658368" y="6473952"/>
+            <a:ext cx="3657600" cy="182880"/>
           </a:xfrm>
           <a:prstGeom prst="rect">
             <a:avLst/>
@@ -5316,34 +5571,34 @@
           <a:noFill/>
         </p:spPr>
         <p:txBody>
-          <a:bodyPr wrap="square" lIns="18288" rIns="18288" anchor="ctr">
+          <a:bodyPr wrap="square" lIns="27432" rIns="27432" anchor="ctr">
             <a:spAutoFit/>
           </a:bodyPr>
           <a:lstStyle/>
           <a:p>
             <a:pPr algn="l"/>
             <a:r>
-              <a:rPr sz="2100" b="1">
-                <a:solidFill>
-                  <a:srgbClr val="241C17"/>
+              <a:rPr sz="900" b="0">
+                <a:solidFill>
+                  <a:srgbClr val="EEDCE6"/>
                 </a:solidFill>
                 <a:latin typeface="Aptos"/>
               </a:rPr>
-              <a:t>Arrive</a:t>
-            </a:r>
-          </a:p>
-        </p:txBody>
-      </p:sp>
-      <p:sp>
-        <p:nvSpPr>
-          <p:cNvPr id="10" name="TextBox 9"/>
+              <a:t>LEI  /  Hackathon pitch</a:t>
+            </a:r>
+          </a:p>
+        </p:txBody>
+      </p:sp>
+      <p:sp>
+        <p:nvSpPr>
+          <p:cNvPr id="7" name="TextBox 6"/>
           <p:cNvSpPr txBox="1"/>
           <p:nvPr/>
         </p:nvSpPr>
         <p:spPr>
           <a:xfrm>
-            <a:off x="749808" y="3977639"/>
-            <a:ext cx="2240280" cy="960120"/>
+            <a:off x="11064240" y="6473952"/>
+            <a:ext cx="457200" cy="182880"/>
           </a:xfrm>
           <a:prstGeom prst="rect">
             <a:avLst/>
@@ -5351,34 +5606,34 @@
           <a:noFill/>
         </p:spPr>
         <p:txBody>
-          <a:bodyPr wrap="square" lIns="18288" rIns="18288" anchor="ctr">
+          <a:bodyPr wrap="square" lIns="27432" rIns="27432" anchor="ctr">
             <a:spAutoFit/>
           </a:bodyPr>
           <a:lstStyle/>
           <a:p>
-            <a:pPr algn="l"/>
-            <a:r>
-              <a:rPr sz="1500" b="0">
-                <a:solidFill>
-                  <a:srgbClr val="786B62"/>
+            <a:pPr algn="r"/>
+            <a:r>
+              <a:rPr sz="900" b="1">
+                <a:solidFill>
+                  <a:srgbClr val="F5C46B"/>
                 </a:solidFill>
                 <a:latin typeface="Aptos"/>
               </a:rPr>
-              <a:t>A welcoming gate asks what she needs today.</a:t>
-            </a:r>
-          </a:p>
-        </p:txBody>
-      </p:sp>
-      <p:sp>
-        <p:nvSpPr>
-          <p:cNvPr id="11" name="TextBox 10"/>
+              <a:t>04</a:t>
+            </a:r>
+          </a:p>
+        </p:txBody>
+      </p:sp>
+      <p:sp>
+        <p:nvSpPr>
+          <p:cNvPr id="8" name="TextBox 7"/>
           <p:cNvSpPr txBox="1"/>
           <p:nvPr/>
         </p:nvSpPr>
         <p:spPr>
           <a:xfrm>
-            <a:off x="3584448" y="2834640"/>
-            <a:ext cx="548640" cy="365760"/>
+            <a:off x="749808" y="1828800"/>
+            <a:ext cx="10607040" cy="438912"/>
           </a:xfrm>
           <a:prstGeom prst="rect">
             <a:avLst/>
@@ -5386,40 +5641,40 @@
           <a:noFill/>
         </p:spPr>
         <p:txBody>
-          <a:bodyPr wrap="square" lIns="18288" rIns="18288" anchor="ctr">
+          <a:bodyPr wrap="square" lIns="27432" rIns="27432" anchor="ctr">
             <a:spAutoFit/>
           </a:bodyPr>
           <a:lstStyle/>
           <a:p>
             <a:pPr algn="l"/>
             <a:r>
-              <a:rPr sz="1500" b="1">
-                <a:solidFill>
-                  <a:srgbClr val="875D78"/>
+              <a:rPr sz="1900" b="0">
+                <a:solidFill>
+                  <a:srgbClr val="241C17"/>
                 </a:solidFill>
                 <a:latin typeface="Aptos"/>
               </a:rPr>
-              <a:t>02</a:t>
-            </a:r>
-          </a:p>
-        </p:txBody>
-      </p:sp>
-      <p:sp>
-        <p:nvSpPr>
-          <p:cNvPr id="12" name="Rectangle 11"/>
+              <a:t>Lèi treats safety as the foundation that makes education, career growth, and connection possible.</a:t>
+            </a:r>
+          </a:p>
+        </p:txBody>
+      </p:sp>
+      <p:sp>
+        <p:nvSpPr>
+          <p:cNvPr id="9" name="Rounded Rectangle 8"/>
           <p:cNvSpPr/>
           <p:nvPr/>
         </p:nvSpPr>
         <p:spPr>
           <a:xfrm>
-            <a:off x="4242816" y="3017520"/>
-            <a:ext cx="1600200" cy="36576"/>
-          </a:xfrm>
-          <a:prstGeom prst="rect">
+            <a:off x="749808" y="2697480"/>
+            <a:ext cx="10424160" cy="749808"/>
+          </a:xfrm>
+          <a:prstGeom prst="roundRect">
             <a:avLst/>
           </a:prstGeom>
           <a:solidFill>
-            <a:srgbClr val="F5C46B"/>
+            <a:srgbClr val="FFFFFF"/>
           </a:solidFill>
           <a:ln>
             <a:noFill/>
@@ -5449,14 +5704,14 @@
       </p:sp>
       <p:sp>
         <p:nvSpPr>
-          <p:cNvPr id="13" name="TextBox 12"/>
+          <p:cNvPr id="10" name="TextBox 9"/>
           <p:cNvSpPr txBox="1"/>
           <p:nvPr/>
         </p:nvSpPr>
         <p:spPr>
           <a:xfrm>
-            <a:off x="3584448" y="3429000"/>
-            <a:ext cx="2240280" cy="384048"/>
+            <a:off x="1005840" y="2862072"/>
+            <a:ext cx="502920" cy="320040"/>
           </a:xfrm>
           <a:prstGeom prst="rect">
             <a:avLst/>
@@ -5464,34 +5719,34 @@
           <a:noFill/>
         </p:spPr>
         <p:txBody>
-          <a:bodyPr wrap="square" lIns="18288" rIns="18288" anchor="ctr">
+          <a:bodyPr wrap="square" lIns="27432" rIns="27432" anchor="ctr">
             <a:spAutoFit/>
           </a:bodyPr>
           <a:lstStyle/>
           <a:p>
             <a:pPr algn="l"/>
             <a:r>
-              <a:rPr sz="2100" b="1">
-                <a:solidFill>
-                  <a:srgbClr val="241C17"/>
+              <a:rPr sz="1500" b="1">
+                <a:solidFill>
+                  <a:srgbClr val="43283A"/>
                 </a:solidFill>
                 <a:latin typeface="Aptos"/>
               </a:rPr>
-              <a:t>Name the need</a:t>
-            </a:r>
-          </a:p>
-        </p:txBody>
-      </p:sp>
-      <p:sp>
-        <p:nvSpPr>
-          <p:cNvPr id="14" name="TextBox 13"/>
+              <a:t>01</a:t>
+            </a:r>
+          </a:p>
+        </p:txBody>
+      </p:sp>
+      <p:sp>
+        <p:nvSpPr>
+          <p:cNvPr id="11" name="TextBox 10"/>
           <p:cNvSpPr txBox="1"/>
           <p:nvPr/>
         </p:nvSpPr>
         <p:spPr>
           <a:xfrm>
-            <a:off x="3584448" y="3977639"/>
-            <a:ext cx="2240280" cy="960120"/>
+            <a:off x="1737360" y="2834640"/>
+            <a:ext cx="2743200" cy="274320"/>
           </a:xfrm>
           <a:prstGeom prst="rect">
             <a:avLst/>
@@ -5499,34 +5754,34 @@
           <a:noFill/>
         </p:spPr>
         <p:txBody>
-          <a:bodyPr wrap="square" lIns="18288" rIns="18288" anchor="ctr">
+          <a:bodyPr wrap="square" lIns="27432" rIns="27432" anchor="ctr">
             <a:spAutoFit/>
           </a:bodyPr>
           <a:lstStyle/>
           <a:p>
             <a:pPr algn="l"/>
             <a:r>
-              <a:rPr sz="1500" b="0">
-                <a:solidFill>
-                  <a:srgbClr val="786B62"/>
+              <a:rPr sz="1700" b="1">
+                <a:solidFill>
+                  <a:srgbClr val="241C17"/>
                 </a:solidFill>
                 <a:latin typeface="Aptos"/>
               </a:rPr>
-              <a:t>She selects ambitious, overwhelmed, or healing.</a:t>
-            </a:r>
-          </a:p>
-        </p:txBody>
-      </p:sp>
-      <p:sp>
-        <p:nvSpPr>
-          <p:cNvPr id="15" name="TextBox 14"/>
+              <a:t>Credential uniqueness</a:t>
+            </a:r>
+          </a:p>
+        </p:txBody>
+      </p:sp>
+      <p:sp>
+        <p:nvSpPr>
+          <p:cNvPr id="12" name="TextBox 11"/>
           <p:cNvSpPr txBox="1"/>
           <p:nvPr/>
         </p:nvSpPr>
         <p:spPr>
           <a:xfrm>
-            <a:off x="6419088" y="2834640"/>
-            <a:ext cx="548640" cy="365760"/>
+            <a:off x="4572000" y="2807208"/>
+            <a:ext cx="6080760" cy="365760"/>
           </a:xfrm>
           <a:prstGeom prst="rect">
             <a:avLst/>
@@ -5534,40 +5789,40 @@
           <a:noFill/>
         </p:spPr>
         <p:txBody>
-          <a:bodyPr wrap="square" lIns="18288" rIns="18288" anchor="ctr">
+          <a:bodyPr wrap="square" lIns="27432" rIns="27432" anchor="ctr">
             <a:spAutoFit/>
           </a:bodyPr>
           <a:lstStyle/>
           <a:p>
             <a:pPr algn="l"/>
             <a:r>
-              <a:rPr sz="1500" b="1">
-                <a:solidFill>
-                  <a:srgbClr val="875D78"/>
+              <a:rPr sz="1400" b="0">
+                <a:solidFill>
+                  <a:srgbClr val="786B62"/>
                 </a:solidFill>
                 <a:latin typeface="Aptos"/>
               </a:rPr>
-              <a:t>03</a:t>
-            </a:r>
-          </a:p>
-        </p:txBody>
-      </p:sp>
-      <p:sp>
-        <p:nvSpPr>
-          <p:cNvPr id="16" name="Rectangle 15"/>
+              <a:t>Phone and email indexing reduce burner accounts and duplicate signups.</a:t>
+            </a:r>
+          </a:p>
+        </p:txBody>
+      </p:sp>
+      <p:sp>
+        <p:nvSpPr>
+          <p:cNvPr id="13" name="Rounded Rectangle 12"/>
           <p:cNvSpPr/>
           <p:nvPr/>
         </p:nvSpPr>
         <p:spPr>
           <a:xfrm>
-            <a:off x="7077456" y="3017520"/>
-            <a:ext cx="1600200" cy="36576"/>
-          </a:xfrm>
-          <a:prstGeom prst="rect">
+            <a:off x="749808" y="3657600"/>
+            <a:ext cx="10424160" cy="749808"/>
+          </a:xfrm>
+          <a:prstGeom prst="roundRect">
             <a:avLst/>
           </a:prstGeom>
           <a:solidFill>
-            <a:srgbClr val="F5C46B"/>
+            <a:srgbClr val="FFFFFF"/>
           </a:solidFill>
           <a:ln>
             <a:noFill/>
@@ -5597,14 +5852,14 @@
       </p:sp>
       <p:sp>
         <p:nvSpPr>
-          <p:cNvPr id="17" name="TextBox 16"/>
+          <p:cNvPr id="14" name="TextBox 13"/>
           <p:cNvSpPr txBox="1"/>
           <p:nvPr/>
         </p:nvSpPr>
         <p:spPr>
           <a:xfrm>
-            <a:off x="6419088" y="3429000"/>
-            <a:ext cx="2240280" cy="384048"/>
+            <a:off x="1005840" y="3822191"/>
+            <a:ext cx="502920" cy="320040"/>
           </a:xfrm>
           <a:prstGeom prst="rect">
             <a:avLst/>
@@ -5612,34 +5867,34 @@
           <a:noFill/>
         </p:spPr>
         <p:txBody>
-          <a:bodyPr wrap="square" lIns="18288" rIns="18288" anchor="ctr">
+          <a:bodyPr wrap="square" lIns="27432" rIns="27432" anchor="ctr">
             <a:spAutoFit/>
           </a:bodyPr>
           <a:lstStyle/>
           <a:p>
             <a:pPr algn="l"/>
             <a:r>
-              <a:rPr sz="2100" b="1">
-                <a:solidFill>
-                  <a:srgbClr val="241C17"/>
+              <a:rPr sz="1500" b="1">
+                <a:solidFill>
+                  <a:srgbClr val="43283A"/>
                 </a:solidFill>
                 <a:latin typeface="Aptos"/>
               </a:rPr>
-              <a:t>Find support</a:t>
-            </a:r>
-          </a:p>
-        </p:txBody>
-      </p:sp>
-      <p:sp>
-        <p:nvSpPr>
-          <p:cNvPr id="18" name="TextBox 17"/>
+              <a:t>02</a:t>
+            </a:r>
+          </a:p>
+        </p:txBody>
+      </p:sp>
+      <p:sp>
+        <p:nvSpPr>
+          <p:cNvPr id="15" name="TextBox 14"/>
           <p:cNvSpPr txBox="1"/>
           <p:nvPr/>
         </p:nvSpPr>
         <p:spPr>
           <a:xfrm>
-            <a:off x="6419088" y="3977639"/>
-            <a:ext cx="2240280" cy="960120"/>
+            <a:off x="1737360" y="3794760"/>
+            <a:ext cx="2743200" cy="274320"/>
           </a:xfrm>
           <a:prstGeom prst="rect">
             <a:avLst/>
@@ -5647,34 +5902,34 @@
           <a:noFill/>
         </p:spPr>
         <p:txBody>
-          <a:bodyPr wrap="square" lIns="18288" rIns="18288" anchor="ctr">
+          <a:bodyPr wrap="square" lIns="27432" rIns="27432" anchor="ctr">
             <a:spAutoFit/>
           </a:bodyPr>
           <a:lstStyle/>
           <a:p>
             <a:pPr algn="l"/>
             <a:r>
-              <a:rPr sz="1500" b="0">
-                <a:solidFill>
-                  <a:srgbClr val="786B62"/>
+              <a:rPr sz="1700" b="1">
+                <a:solidFill>
+                  <a:srgbClr val="241C17"/>
                 </a:solidFill>
                 <a:latin typeface="Aptos"/>
               </a:rPr>
-              <a:t>She sees campus help, career guidance, and safe circles.</a:t>
-            </a:r>
-          </a:p>
-        </p:txBody>
-      </p:sp>
-      <p:sp>
-        <p:nvSpPr>
-          <p:cNvPr id="19" name="TextBox 18"/>
+              <a:t>Multi-factor onboarding</a:t>
+            </a:r>
+          </a:p>
+        </p:txBody>
+      </p:sp>
+      <p:sp>
+        <p:nvSpPr>
+          <p:cNvPr id="16" name="TextBox 15"/>
           <p:cNvSpPr txBox="1"/>
           <p:nvPr/>
         </p:nvSpPr>
         <p:spPr>
           <a:xfrm>
-            <a:off x="9253728" y="2834640"/>
-            <a:ext cx="548640" cy="365760"/>
+            <a:off x="4572000" y="3767328"/>
+            <a:ext cx="6080760" cy="365760"/>
           </a:xfrm>
           <a:prstGeom prst="rect">
             <a:avLst/>
@@ -5682,40 +5937,40 @@
           <a:noFill/>
         </p:spPr>
         <p:txBody>
-          <a:bodyPr wrap="square" lIns="18288" rIns="18288" anchor="ctr">
+          <a:bodyPr wrap="square" lIns="27432" rIns="27432" anchor="ctr">
             <a:spAutoFit/>
           </a:bodyPr>
           <a:lstStyle/>
           <a:p>
             <a:pPr algn="l"/>
             <a:r>
-              <a:rPr sz="1500" b="1">
-                <a:solidFill>
-                  <a:srgbClr val="875D78"/>
+              <a:rPr sz="1400" b="0">
+                <a:solidFill>
+                  <a:srgbClr val="786B62"/>
                 </a:solidFill>
                 <a:latin typeface="Aptos"/>
               </a:rPr>
-              <a:t>04</a:t>
-            </a:r>
-          </a:p>
-        </p:txBody>
-      </p:sp>
-      <p:sp>
-        <p:nvSpPr>
-          <p:cNvPr id="20" name="Rectangle 19"/>
+              <a:t>Camera liveness checks through MediaDevices API plus real 6-digit SMS verification in production.</a:t>
+            </a:r>
+          </a:p>
+        </p:txBody>
+      </p:sp>
+      <p:sp>
+        <p:nvSpPr>
+          <p:cNvPr id="17" name="Rounded Rectangle 16"/>
           <p:cNvSpPr/>
           <p:nvPr/>
         </p:nvSpPr>
         <p:spPr>
           <a:xfrm>
-            <a:off x="9912096" y="3017520"/>
-            <a:ext cx="1600200" cy="36576"/>
-          </a:xfrm>
-          <a:prstGeom prst="rect">
+            <a:off x="749808" y="4617720"/>
+            <a:ext cx="10424160" cy="749808"/>
+          </a:xfrm>
+          <a:prstGeom prst="roundRect">
             <a:avLst/>
           </a:prstGeom>
           <a:solidFill>
-            <a:srgbClr val="F5C46B"/>
+            <a:srgbClr val="FFFFFF"/>
           </a:solidFill>
           <a:ln>
             <a:noFill/>
@@ -5745,14 +6000,119 @@
       </p:sp>
       <p:sp>
         <p:nvSpPr>
+          <p:cNvPr id="18" name="TextBox 17"/>
+          <p:cNvSpPr txBox="1"/>
+          <p:nvPr/>
+        </p:nvSpPr>
+        <p:spPr>
+          <a:xfrm>
+            <a:off x="1005840" y="4782312"/>
+            <a:ext cx="502920" cy="320040"/>
+          </a:xfrm>
+          <a:prstGeom prst="rect">
+            <a:avLst/>
+          </a:prstGeom>
+          <a:noFill/>
+        </p:spPr>
+        <p:txBody>
+          <a:bodyPr wrap="square" lIns="27432" rIns="27432" anchor="ctr">
+            <a:spAutoFit/>
+          </a:bodyPr>
+          <a:lstStyle/>
+          <a:p>
+            <a:pPr algn="l"/>
+            <a:r>
+              <a:rPr sz="1500" b="1">
+                <a:solidFill>
+                  <a:srgbClr val="43283A"/>
+                </a:solidFill>
+                <a:latin typeface="Aptos"/>
+              </a:rPr>
+              <a:t>03</a:t>
+            </a:r>
+          </a:p>
+        </p:txBody>
+      </p:sp>
+      <p:sp>
+        <p:nvSpPr>
+          <p:cNvPr id="19" name="TextBox 18"/>
+          <p:cNvSpPr txBox="1"/>
+          <p:nvPr/>
+        </p:nvSpPr>
+        <p:spPr>
+          <a:xfrm>
+            <a:off x="1737360" y="4754880"/>
+            <a:ext cx="2743200" cy="274320"/>
+          </a:xfrm>
+          <a:prstGeom prst="rect">
+            <a:avLst/>
+          </a:prstGeom>
+          <a:noFill/>
+        </p:spPr>
+        <p:txBody>
+          <a:bodyPr wrap="square" lIns="27432" rIns="27432" anchor="ctr">
+            <a:spAutoFit/>
+          </a:bodyPr>
+          <a:lstStyle/>
+          <a:p>
+            <a:pPr algn="l"/>
+            <a:r>
+              <a:rPr sz="1700" b="1">
+                <a:solidFill>
+                  <a:srgbClr val="241C17"/>
+                </a:solidFill>
+                <a:latin typeface="Aptos"/>
+              </a:rPr>
+              <a:t>Spatial access control</a:t>
+            </a:r>
+          </a:p>
+        </p:txBody>
+      </p:sp>
+      <p:sp>
+        <p:nvSpPr>
+          <p:cNvPr id="20" name="TextBox 19"/>
+          <p:cNvSpPr txBox="1"/>
+          <p:nvPr/>
+        </p:nvSpPr>
+        <p:spPr>
+          <a:xfrm>
+            <a:off x="4572000" y="4727448"/>
+            <a:ext cx="6080760" cy="365760"/>
+          </a:xfrm>
+          <a:prstGeom prst="rect">
+            <a:avLst/>
+          </a:prstGeom>
+          <a:noFill/>
+        </p:spPr>
+        <p:txBody>
+          <a:bodyPr wrap="square" lIns="27432" rIns="27432" anchor="ctr">
+            <a:spAutoFit/>
+          </a:bodyPr>
+          <a:lstStyle/>
+          <a:p>
+            <a:pPr algn="l"/>
+            <a:r>
+              <a:rPr sz="1400" b="0">
+                <a:solidFill>
+                  <a:srgbClr val="786B62"/>
+                </a:solidFill>
+                <a:latin typeface="Aptos"/>
+              </a:rPr>
+              <a:t>Members choose a primary sanctuary space; cross-space access is locked behind an appeal workflow.</a:t>
+            </a:r>
+          </a:p>
+        </p:txBody>
+      </p:sp>
+      <p:sp>
+        <p:nvSpPr>
           <p:cNvPr id="21" name="TextBox 20"/>
           <p:cNvSpPr txBox="1"/>
           <p:nvPr/>
         </p:nvSpPr>
         <p:spPr>
           <a:xfrm>
-            <a:off x="9253728" y="3429000"/>
-            <a:ext cx="2240280" cy="384048"/>
+            <a:off x="749808" y="5806440"/>
+            <a:ext cx="10607040" cy="365760"/>
           </a:xfrm>
           <a:prstGeom prst="rect">
             <a:avLst/>
@@ -5760,160 +6120,20 @@
           <a:noFill/>
         </p:spPr>
         <p:txBody>
-          <a:bodyPr wrap="square" lIns="18288" rIns="18288" anchor="ctr">
+          <a:bodyPr wrap="square" lIns="27432" rIns="27432" anchor="ctr">
             <a:spAutoFit/>
           </a:bodyPr>
           <a:lstStyle/>
           <a:p>
             <a:pPr algn="l"/>
             <a:r>
-              <a:rPr sz="2100" b="1">
-                <a:solidFill>
-                  <a:srgbClr val="241C17"/>
+              <a:rPr sz="1800" b="1">
+                <a:solidFill>
+                  <a:srgbClr val="2D8A43"/>
                 </a:solidFill>
                 <a:latin typeface="Aptos"/>
               </a:rPr>
-              <a:t>Take action</a:t>
-            </a:r>
-          </a:p>
-        </p:txBody>
-      </p:sp>
-      <p:sp>
-        <p:nvSpPr>
-          <p:cNvPr id="22" name="TextBox 21"/>
-          <p:cNvSpPr txBox="1"/>
-          <p:nvPr/>
-        </p:nvSpPr>
-        <p:spPr>
-          <a:xfrm>
-            <a:off x="9253728" y="3977639"/>
-            <a:ext cx="2240280" cy="960120"/>
-          </a:xfrm>
-          <a:prstGeom prst="rect">
-            <a:avLst/>
-          </a:prstGeom>
-          <a:noFill/>
-        </p:spPr>
-        <p:txBody>
-          <a:bodyPr wrap="square" lIns="18288" rIns="18288" anchor="ctr">
-            <a:spAutoFit/>
-          </a:bodyPr>
-          <a:lstStyle/>
-          <a:p>
-            <a:pPr algn="l"/>
-            <a:r>
-              <a:rPr sz="1500" b="0">
-                <a:solidFill>
-                  <a:srgbClr val="786B62"/>
-                </a:solidFill>
-                <a:latin typeface="Aptos"/>
-              </a:rPr>
-              <a:t>She posts, joins, asks, learns, or connects.</a:t>
-            </a:r>
-          </a:p>
-        </p:txBody>
-      </p:sp>
-      <p:sp>
-        <p:nvSpPr>
-          <p:cNvPr id="23" name="TextBox 22"/>
-          <p:cNvSpPr txBox="1"/>
-          <p:nvPr/>
-        </p:nvSpPr>
-        <p:spPr>
-          <a:xfrm>
-            <a:off x="749808" y="5650992"/>
-            <a:ext cx="10698480" cy="384048"/>
-          </a:xfrm>
-          <a:prstGeom prst="rect">
-            <a:avLst/>
-          </a:prstGeom>
-          <a:noFill/>
-        </p:spPr>
-        <p:txBody>
-          <a:bodyPr wrap="square" lIns="18288" rIns="18288" anchor="ctr">
-            <a:spAutoFit/>
-          </a:bodyPr>
-          <a:lstStyle/>
-          <a:p>
-            <a:pPr algn="l"/>
-            <a:r>
-              <a:rPr sz="2000" b="1">
-                <a:solidFill>
-                  <a:srgbClr val="875D78"/>
-                </a:solidFill>
-                <a:latin typeface="Aptos"/>
-              </a:rPr>
-              <a:t>Judge takeaway: Lèi reduces the distance between vulnerability and opportunity.</a:t>
-            </a:r>
-          </a:p>
-        </p:txBody>
-      </p:sp>
-      <p:sp>
-        <p:nvSpPr>
-          <p:cNvPr id="24" name="TextBox 23"/>
-          <p:cNvSpPr txBox="1"/>
-          <p:nvPr/>
-        </p:nvSpPr>
-        <p:spPr>
-          <a:xfrm>
-            <a:off x="658368" y="6473952"/>
-            <a:ext cx="3657600" cy="182880"/>
-          </a:xfrm>
-          <a:prstGeom prst="rect">
-            <a:avLst/>
-          </a:prstGeom>
-          <a:noFill/>
-        </p:spPr>
-        <p:txBody>
-          <a:bodyPr wrap="square" lIns="18288" rIns="18288" anchor="ctr">
-            <a:spAutoFit/>
-          </a:bodyPr>
-          <a:lstStyle/>
-          <a:p>
-            <a:pPr algn="l"/>
-            <a:r>
-              <a:rPr sz="900" b="0">
-                <a:solidFill>
-                  <a:srgbClr val="786B62"/>
-                </a:solidFill>
-                <a:latin typeface="Aptos"/>
-              </a:rPr>
-              <a:t>LEI  /  Hackathon pitch</a:t>
-            </a:r>
-          </a:p>
-        </p:txBody>
-      </p:sp>
-      <p:sp>
-        <p:nvSpPr>
-          <p:cNvPr id="25" name="TextBox 24"/>
-          <p:cNvSpPr txBox="1"/>
-          <p:nvPr/>
-        </p:nvSpPr>
-        <p:spPr>
-          <a:xfrm>
-            <a:off x="11064240" y="6473952"/>
-            <a:ext cx="457200" cy="182880"/>
-          </a:xfrm>
-          <a:prstGeom prst="rect">
-            <a:avLst/>
-          </a:prstGeom>
-          <a:noFill/>
-        </p:spPr>
-        <p:txBody>
-          <a:bodyPr wrap="square" lIns="18288" rIns="18288" anchor="ctr">
-            <a:spAutoFit/>
-          </a:bodyPr>
-          <a:lstStyle/>
-          <a:p>
-            <a:pPr algn="r"/>
-            <a:r>
-              <a:rPr sz="900" b="1">
-                <a:solidFill>
-                  <a:srgbClr val="875D78"/>
-                </a:solidFill>
-                <a:latin typeface="Aptos"/>
-              </a:rPr>
-              <a:t>04</a:t>
+              <a:t>The technical edge is not surveillance. It is intentional boundaries that protect agency.</a:t>
             </a:r>
           </a:p>
         </p:txBody>
@@ -5981,86 +6201,274 @@
       </p:sp>
       <p:sp>
         <p:nvSpPr>
-          <p:cNvPr id="3" name="TextBox 2"/>
-          <p:cNvSpPr txBox="1"/>
-          <p:nvPr/>
-        </p:nvSpPr>
-        <p:spPr>
-          <a:xfrm>
-            <a:off x="658368" y="438912"/>
-            <a:ext cx="4114800" cy="274320"/>
-          </a:xfrm>
-          <a:prstGeom prst="rect">
-            <a:avLst/>
-          </a:prstGeom>
-          <a:noFill/>
-        </p:spPr>
-        <p:txBody>
-          <a:bodyPr wrap="square" lIns="18288" rIns="18288" anchor="ctr">
-            <a:spAutoFit/>
-          </a:bodyPr>
-          <a:lstStyle/>
-          <a:p>
-            <a:pPr algn="l"/>
-            <a:r>
-              <a:rPr sz="1000" b="1">
-                <a:solidFill>
-                  <a:srgbClr val="F5C46B"/>
-                </a:solidFill>
-                <a:latin typeface="Aptos"/>
-              </a:rPr>
-              <a:t>04  /  TRACK ALIGNMENT</a:t>
-            </a:r>
-          </a:p>
-        </p:txBody>
-      </p:sp>
-      <p:sp>
-        <p:nvSpPr>
-          <p:cNvPr id="4" name="TextBox 3"/>
-          <p:cNvSpPr txBox="1"/>
-          <p:nvPr/>
-        </p:nvSpPr>
-        <p:spPr>
-          <a:xfrm>
-            <a:off x="658368" y="768096"/>
-            <a:ext cx="10789920" cy="658368"/>
-          </a:xfrm>
-          <a:prstGeom prst="rect">
-            <a:avLst/>
-          </a:prstGeom>
-          <a:noFill/>
-        </p:spPr>
-        <p:txBody>
-          <a:bodyPr wrap="square" lIns="18288" rIns="18288" anchor="ctr">
-            <a:spAutoFit/>
-          </a:bodyPr>
-          <a:lstStyle/>
-          <a:p>
-            <a:pPr algn="l"/>
-            <a:r>
-              <a:rPr sz="2800" b="1">
-                <a:solidFill>
-                  <a:srgbClr val="F4E8EE"/>
-                </a:solidFill>
-                <a:latin typeface="Aptos Display"/>
-              </a:rPr>
-              <a:t>Built for the track, not adjacent to it</a:t>
-            </a:r>
-          </a:p>
-        </p:txBody>
-      </p:sp>
-      <p:sp>
-        <p:nvSpPr>
-          <p:cNvPr id="5" name="Rectangle 4"/>
+          <p:cNvPr id="3" name="Rounded Rectangle 2"/>
           <p:cNvSpPr/>
           <p:nvPr/>
         </p:nvSpPr>
         <p:spPr>
           <a:xfrm>
-            <a:off x="658368" y="1572768"/>
-            <a:ext cx="1005840" cy="36576"/>
-          </a:xfrm>
-          <a:prstGeom prst="rect">
+            <a:off x="8046720" y="-731520"/>
+            <a:ext cx="5120640" cy="6583680"/>
+          </a:xfrm>
+          <a:prstGeom prst="roundRect">
+            <a:avLst/>
+          </a:prstGeom>
+          <a:solidFill>
+            <a:srgbClr val="43283A"/>
+          </a:solidFill>
+          <a:ln>
+            <a:noFill/>
+          </a:ln>
+        </p:spPr>
+        <p:style>
+          <a:lnRef idx="1">
+            <a:schemeClr val="accent1"/>
+          </a:lnRef>
+          <a:fillRef idx="3">
+            <a:schemeClr val="accent1"/>
+          </a:fillRef>
+          <a:effectRef idx="2">
+            <a:schemeClr val="accent1"/>
+          </a:effectRef>
+          <a:fontRef idx="minor">
+            <a:schemeClr val="lt1"/>
+          </a:fontRef>
+        </p:style>
+        <p:txBody>
+          <a:bodyPr rtlCol="0" anchor="ctr"/>
+          <a:lstStyle/>
+          <a:p>
+            <a:pPr algn="ctr"/>
+          </a:p>
+        </p:txBody>
+      </p:sp>
+      <p:sp>
+        <p:nvSpPr>
+          <p:cNvPr id="4" name="Rounded Rectangle 3"/>
+          <p:cNvSpPr/>
+          <p:nvPr/>
+        </p:nvSpPr>
+        <p:spPr>
+          <a:xfrm rot="20760000">
+            <a:off x="19019520" y="51206400"/>
+            <a:ext cx="52669440" cy="115214400"/>
+          </a:xfrm>
+          <a:prstGeom prst="roundRect">
+            <a:avLst/>
+          </a:prstGeom>
+          <a:solidFill>
+            <a:srgbClr val="B98DA9"/>
+          </a:solidFill>
+          <a:ln>
+            <a:noFill/>
+          </a:ln>
+        </p:spPr>
+        <p:style>
+          <a:lnRef idx="1">
+            <a:schemeClr val="accent1"/>
+          </a:lnRef>
+          <a:fillRef idx="3">
+            <a:schemeClr val="accent1"/>
+          </a:fillRef>
+          <a:effectRef idx="2">
+            <a:schemeClr val="accent1"/>
+          </a:effectRef>
+          <a:fontRef idx="minor">
+            <a:schemeClr val="lt1"/>
+          </a:fontRef>
+        </p:style>
+        <p:txBody>
+          <a:bodyPr rtlCol="0" anchor="ctr"/>
+          <a:lstStyle/>
+          <a:p>
+            <a:pPr algn="ctr"/>
+          </a:p>
+        </p:txBody>
+      </p:sp>
+      <p:sp>
+        <p:nvSpPr>
+          <p:cNvPr id="5" name="Rounded Rectangle 4"/>
+          <p:cNvSpPr/>
+          <p:nvPr/>
+        </p:nvSpPr>
+        <p:spPr>
+          <a:xfrm rot="21180000">
+            <a:off x="42062400" y="14996159"/>
+            <a:ext cx="52669440" cy="115214400"/>
+          </a:xfrm>
+          <a:prstGeom prst="roundRect">
+            <a:avLst/>
+          </a:prstGeom>
+          <a:solidFill>
+            <a:srgbClr val="B98DA9"/>
+          </a:solidFill>
+          <a:ln>
+            <a:noFill/>
+          </a:ln>
+        </p:spPr>
+        <p:style>
+          <a:lnRef idx="1">
+            <a:schemeClr val="accent1"/>
+          </a:lnRef>
+          <a:fillRef idx="3">
+            <a:schemeClr val="accent1"/>
+          </a:fillRef>
+          <a:effectRef idx="2">
+            <a:schemeClr val="accent1"/>
+          </a:effectRef>
+          <a:fontRef idx="minor">
+            <a:schemeClr val="lt1"/>
+          </a:fontRef>
+        </p:style>
+        <p:txBody>
+          <a:bodyPr rtlCol="0" anchor="ctr"/>
+          <a:lstStyle/>
+          <a:p>
+            <a:pPr algn="ctr"/>
+          </a:p>
+        </p:txBody>
+      </p:sp>
+      <p:sp>
+        <p:nvSpPr>
+          <p:cNvPr id="6" name="Rounded Rectangle 5"/>
+          <p:cNvSpPr/>
+          <p:nvPr/>
+        </p:nvSpPr>
+        <p:spPr>
+          <a:xfrm>
+            <a:off x="65105280" y="-1463040"/>
+            <a:ext cx="52669440" cy="115214400"/>
+          </a:xfrm>
+          <a:prstGeom prst="roundRect">
+            <a:avLst/>
+          </a:prstGeom>
+          <a:solidFill>
+            <a:srgbClr val="B98DA9"/>
+          </a:solidFill>
+          <a:ln>
+            <a:noFill/>
+          </a:ln>
+        </p:spPr>
+        <p:style>
+          <a:lnRef idx="1">
+            <a:schemeClr val="accent1"/>
+          </a:lnRef>
+          <a:fillRef idx="3">
+            <a:schemeClr val="accent1"/>
+          </a:fillRef>
+          <a:effectRef idx="2">
+            <a:schemeClr val="accent1"/>
+          </a:effectRef>
+          <a:fontRef idx="minor">
+            <a:schemeClr val="lt1"/>
+          </a:fontRef>
+        </p:style>
+        <p:txBody>
+          <a:bodyPr rtlCol="0" anchor="ctr"/>
+          <a:lstStyle/>
+          <a:p>
+            <a:pPr algn="ctr"/>
+          </a:p>
+        </p:txBody>
+      </p:sp>
+      <p:sp>
+        <p:nvSpPr>
+          <p:cNvPr id="7" name="Rounded Rectangle 6"/>
+          <p:cNvSpPr/>
+          <p:nvPr/>
+        </p:nvSpPr>
+        <p:spPr>
+          <a:xfrm rot="420000">
+            <a:off x="88148160" y="14996159"/>
+            <a:ext cx="52669440" cy="115214400"/>
+          </a:xfrm>
+          <a:prstGeom prst="roundRect">
+            <a:avLst/>
+          </a:prstGeom>
+          <a:solidFill>
+            <a:srgbClr val="B98DA9"/>
+          </a:solidFill>
+          <a:ln>
+            <a:noFill/>
+          </a:ln>
+        </p:spPr>
+        <p:style>
+          <a:lnRef idx="1">
+            <a:schemeClr val="accent1"/>
+          </a:lnRef>
+          <a:fillRef idx="3">
+            <a:schemeClr val="accent1"/>
+          </a:fillRef>
+          <a:effectRef idx="2">
+            <a:schemeClr val="accent1"/>
+          </a:effectRef>
+          <a:fontRef idx="minor">
+            <a:schemeClr val="lt1"/>
+          </a:fontRef>
+        </p:style>
+        <p:txBody>
+          <a:bodyPr rtlCol="0" anchor="ctr"/>
+          <a:lstStyle/>
+          <a:p>
+            <a:pPr algn="ctr"/>
+          </a:p>
+        </p:txBody>
+      </p:sp>
+      <p:sp>
+        <p:nvSpPr>
+          <p:cNvPr id="8" name="Rounded Rectangle 7"/>
+          <p:cNvSpPr/>
+          <p:nvPr/>
+        </p:nvSpPr>
+        <p:spPr>
+          <a:xfrm rot="840000">
+            <a:off x="111191040" y="51206400"/>
+            <a:ext cx="52669440" cy="115214400"/>
+          </a:xfrm>
+          <a:prstGeom prst="roundRect">
+            <a:avLst/>
+          </a:prstGeom>
+          <a:solidFill>
+            <a:srgbClr val="B98DA9"/>
+          </a:solidFill>
+          <a:ln>
+            <a:noFill/>
+          </a:ln>
+        </p:spPr>
+        <p:style>
+          <a:lnRef idx="1">
+            <a:schemeClr val="accent1"/>
+          </a:lnRef>
+          <a:fillRef idx="3">
+            <a:schemeClr val="accent1"/>
+          </a:fillRef>
+          <a:effectRef idx="2">
+            <a:schemeClr val="accent1"/>
+          </a:effectRef>
+          <a:fontRef idx="minor">
+            <a:schemeClr val="lt1"/>
+          </a:fontRef>
+        </p:style>
+        <p:txBody>
+          <a:bodyPr rtlCol="0" anchor="ctr"/>
+          <a:lstStyle/>
+          <a:p>
+            <a:pPr algn="ctr"/>
+          </a:p>
+        </p:txBody>
+      </p:sp>
+      <p:sp>
+        <p:nvSpPr>
+          <p:cNvPr id="9" name="Rounded Rectangle 8"/>
+          <p:cNvSpPr/>
+          <p:nvPr/>
+        </p:nvSpPr>
+        <p:spPr>
+          <a:xfrm>
+            <a:off x="58521600" y="46268640"/>
+            <a:ext cx="65836800" cy="65836800"/>
+          </a:xfrm>
+          <a:prstGeom prst="roundRect">
             <a:avLst/>
           </a:prstGeom>
           <a:solidFill>
@@ -6094,125 +6502,20 @@
       </p:sp>
       <p:sp>
         <p:nvSpPr>
-          <p:cNvPr id="6" name="TextBox 5"/>
-          <p:cNvSpPr txBox="1"/>
-          <p:nvPr/>
-        </p:nvSpPr>
-        <p:spPr>
-          <a:xfrm>
-            <a:off x="777240" y="1965960"/>
-            <a:ext cx="1965960" cy="292608"/>
-          </a:xfrm>
-          <a:prstGeom prst="rect">
-            <a:avLst/>
-          </a:prstGeom>
-          <a:noFill/>
-        </p:spPr>
-        <p:txBody>
-          <a:bodyPr wrap="square" lIns="18288" rIns="18288" anchor="ctr">
-            <a:spAutoFit/>
-          </a:bodyPr>
-          <a:lstStyle/>
-          <a:p>
-            <a:pPr algn="l"/>
-            <a:r>
-              <a:rPr sz="1700" b="1">
-                <a:solidFill>
-                  <a:srgbClr val="F5C46B"/>
-                </a:solidFill>
-                <a:latin typeface="Aptos"/>
-              </a:rPr>
-              <a:t>Education</a:t>
-            </a:r>
-          </a:p>
-        </p:txBody>
-      </p:sp>
-      <p:sp>
-        <p:nvSpPr>
-          <p:cNvPr id="7" name="TextBox 6"/>
-          <p:cNvSpPr txBox="1"/>
-          <p:nvPr/>
-        </p:nvSpPr>
-        <p:spPr>
-          <a:xfrm>
-            <a:off x="2834640" y="1965960"/>
-            <a:ext cx="2926080" cy="292608"/>
-          </a:xfrm>
-          <a:prstGeom prst="rect">
-            <a:avLst/>
-          </a:prstGeom>
-          <a:noFill/>
-        </p:spPr>
-        <p:txBody>
-          <a:bodyPr wrap="square" lIns="18288" rIns="18288" anchor="ctr">
-            <a:spAutoFit/>
-          </a:bodyPr>
-          <a:lstStyle/>
-          <a:p>
-            <a:pPr algn="l"/>
-            <a:r>
-              <a:rPr sz="1800" b="1">
-                <a:solidFill>
-                  <a:srgbClr val="F4E8EE"/>
-                </a:solidFill>
-                <a:latin typeface="Aptos"/>
-              </a:rPr>
-              <a:t>Campus SOS + student networks</a:t>
-            </a:r>
-          </a:p>
-        </p:txBody>
-      </p:sp>
-      <p:sp>
-        <p:nvSpPr>
-          <p:cNvPr id="8" name="TextBox 7"/>
-          <p:cNvSpPr txBox="1"/>
-          <p:nvPr/>
-        </p:nvSpPr>
-        <p:spPr>
-          <a:xfrm>
-            <a:off x="5943600" y="1947672"/>
-            <a:ext cx="5212080" cy="502920"/>
-          </a:xfrm>
-          <a:prstGeom prst="rect">
-            <a:avLst/>
-          </a:prstGeom>
-          <a:noFill/>
-        </p:spPr>
-        <p:txBody>
-          <a:bodyPr wrap="square" lIns="18288" rIns="18288" anchor="ctr">
-            <a:spAutoFit/>
-          </a:bodyPr>
-          <a:lstStyle/>
-          <a:p>
-            <a:pPr algn="l"/>
-            <a:r>
-              <a:rPr sz="1500" b="0">
-                <a:solidFill>
-                  <a:srgbClr val="F4E8EE"/>
-                </a:solidFill>
-                <a:latin typeface="Aptos"/>
-              </a:rPr>
-              <a:t>A student can find immediate help, resources, and peers without leaving her trusted space.</a:t>
-            </a:r>
-          </a:p>
-        </p:txBody>
-      </p:sp>
-      <p:sp>
-        <p:nvSpPr>
-          <p:cNvPr id="9" name="Rectangle 8"/>
+          <p:cNvPr id="10" name="Rectangle 9"/>
           <p:cNvSpPr/>
           <p:nvPr/>
         </p:nvSpPr>
         <p:spPr>
-          <a:xfrm>
-            <a:off x="777240" y="2651760"/>
-            <a:ext cx="10378440" cy="18288"/>
+          <a:xfrm rot="21480000">
+            <a:off x="88148160" y="103875840"/>
+            <a:ext cx="6583680" cy="238658400"/>
           </a:xfrm>
           <a:prstGeom prst="rect">
             <a:avLst/>
           </a:prstGeom>
           <a:solidFill>
-            <a:srgbClr val="52394B"/>
+            <a:srgbClr val="5A3D52"/>
           </a:solidFill>
           <a:ln>
             <a:noFill/>
@@ -6242,14 +6545,14 @@
       </p:sp>
       <p:sp>
         <p:nvSpPr>
-          <p:cNvPr id="10" name="TextBox 9"/>
+          <p:cNvPr id="11" name="TextBox 10"/>
           <p:cNvSpPr txBox="1"/>
           <p:nvPr/>
         </p:nvSpPr>
         <p:spPr>
           <a:xfrm>
-            <a:off x="777240" y="3291839"/>
-            <a:ext cx="1965960" cy="292608"/>
+            <a:off x="777240" y="960120"/>
+            <a:ext cx="2743200" cy="411480"/>
           </a:xfrm>
           <a:prstGeom prst="rect">
             <a:avLst/>
@@ -6257,34 +6560,34 @@
           <a:noFill/>
         </p:spPr>
         <p:txBody>
-          <a:bodyPr wrap="square" lIns="18288" rIns="18288" anchor="ctr">
+          <a:bodyPr wrap="square" lIns="27432" rIns="27432" anchor="ctr">
             <a:spAutoFit/>
           </a:bodyPr>
           <a:lstStyle/>
           <a:p>
             <a:pPr algn="l"/>
             <a:r>
-              <a:rPr sz="1700" b="1">
+              <a:rPr sz="1800" b="1">
                 <a:solidFill>
                   <a:srgbClr val="F5C46B"/>
                 </a:solidFill>
                 <a:latin typeface="Aptos"/>
               </a:rPr>
-              <a:t>Career growth</a:t>
-            </a:r>
-          </a:p>
-        </p:txBody>
-      </p:sp>
-      <p:sp>
-        <p:nvSpPr>
-          <p:cNvPr id="11" name="TextBox 10"/>
+              <a:t>LÈI</a:t>
+            </a:r>
+          </a:p>
+        </p:txBody>
+      </p:sp>
+      <p:sp>
+        <p:nvSpPr>
+          <p:cNvPr id="12" name="TextBox 11"/>
           <p:cNvSpPr txBox="1"/>
           <p:nvPr/>
         </p:nvSpPr>
         <p:spPr>
           <a:xfrm>
-            <a:off x="2834640" y="3291839"/>
-            <a:ext cx="2926080" cy="292608"/>
+            <a:off x="777240" y="1828800"/>
+            <a:ext cx="6858000" cy="1188720"/>
           </a:xfrm>
           <a:prstGeom prst="rect">
             <a:avLst/>
@@ -6292,34 +6595,70 @@
           <a:noFill/>
         </p:spPr>
         <p:txBody>
-          <a:bodyPr wrap="square" lIns="18288" rIns="18288" anchor="ctr">
+          <a:bodyPr wrap="square" lIns="27432" rIns="27432" anchor="ctr">
             <a:spAutoFit/>
           </a:bodyPr>
           <a:lstStyle/>
           <a:p>
             <a:pPr algn="l"/>
             <a:r>
-              <a:rPr sz="1800" b="1">
-                <a:solidFill>
-                  <a:srgbClr val="F4E8EE"/>
+              <a:rPr sz="3700" b="1">
+                <a:solidFill>
+                  <a:srgbClr val="EEDCE6"/>
+                </a:solidFill>
+                <a:latin typeface="Aptos Display"/>
+              </a:rPr>
+              <a:t>Infrastructure for
+women's autonomy.</a:t>
+            </a:r>
+          </a:p>
+        </p:txBody>
+      </p:sp>
+      <p:sp>
+        <p:nvSpPr>
+          <p:cNvPr id="13" name="TextBox 12"/>
+          <p:cNvSpPr txBox="1"/>
+          <p:nvPr/>
+        </p:nvSpPr>
+        <p:spPr>
+          <a:xfrm>
+            <a:off x="822960" y="3749039"/>
+            <a:ext cx="6766560" cy="502920"/>
+          </a:xfrm>
+          <a:prstGeom prst="rect">
+            <a:avLst/>
+          </a:prstGeom>
+          <a:noFill/>
+        </p:spPr>
+        <p:txBody>
+          <a:bodyPr wrap="square" lIns="27432" rIns="27432" anchor="ctr">
+            <a:spAutoFit/>
+          </a:bodyPr>
+          <a:lstStyle/>
+          <a:p>
+            <a:pPr algn="l"/>
+            <a:r>
+              <a:rPr sz="2200" b="1">
+                <a:solidFill>
+                  <a:srgbClr val="F5C46B"/>
                 </a:solidFill>
                 <a:latin typeface="Aptos"/>
               </a:rPr>
-              <a:t>AI concierge + career feed</a:t>
-            </a:r>
-          </a:p>
-        </p:txBody>
-      </p:sp>
-      <p:sp>
-        <p:nvSpPr>
-          <p:cNvPr id="12" name="TextBox 11"/>
+              <a:t>When women are safe, supported, and connected, they change the world.</a:t>
+            </a:r>
+          </a:p>
+        </p:txBody>
+      </p:sp>
+      <p:sp>
+        <p:nvSpPr>
+          <p:cNvPr id="14" name="TextBox 13"/>
           <p:cNvSpPr txBox="1"/>
           <p:nvPr/>
         </p:nvSpPr>
         <p:spPr>
           <a:xfrm>
-            <a:off x="5943600" y="3273551"/>
-            <a:ext cx="5212080" cy="502920"/>
+            <a:off x="822960" y="4892040"/>
+            <a:ext cx="2743200" cy="411480"/>
           </a:xfrm>
           <a:prstGeom prst="rect">
             <a:avLst/>
@@ -6327,77 +6666,34 @@
           <a:noFill/>
         </p:spPr>
         <p:txBody>
-          <a:bodyPr wrap="square" lIns="18288" rIns="18288" anchor="ctr">
+          <a:bodyPr wrap="square" lIns="27432" rIns="27432" anchor="ctr">
             <a:spAutoFit/>
           </a:bodyPr>
           <a:lstStyle/>
           <a:p>
             <a:pPr algn="l"/>
             <a:r>
-              <a:rPr sz="1500" b="0">
-                <a:solidFill>
-                  <a:srgbClr val="F4E8EE"/>
+              <a:rPr sz="2000" b="0">
+                <a:solidFill>
+                  <a:srgbClr val="EEDCE6"/>
                 </a:solidFill>
                 <a:latin typeface="Aptos"/>
               </a:rPr>
-              <a:t>A member can turn a question into coaching, a conversation, or a concrete next step.</a:t>
-            </a:r>
-          </a:p>
-        </p:txBody>
-      </p:sp>
-      <p:sp>
-        <p:nvSpPr>
-          <p:cNvPr id="13" name="Rectangle 12"/>
-          <p:cNvSpPr/>
-          <p:nvPr/>
-        </p:nvSpPr>
-        <p:spPr>
-          <a:xfrm>
-            <a:off x="777240" y="3977639"/>
-            <a:ext cx="10378440" cy="18288"/>
-          </a:xfrm>
-          <a:prstGeom prst="rect">
-            <a:avLst/>
-          </a:prstGeom>
-          <a:solidFill>
-            <a:srgbClr val="52394B"/>
-          </a:solidFill>
-          <a:ln>
-            <a:noFill/>
-          </a:ln>
-        </p:spPr>
-        <p:style>
-          <a:lnRef idx="1">
-            <a:schemeClr val="accent1"/>
-          </a:lnRef>
-          <a:fillRef idx="3">
-            <a:schemeClr val="accent1"/>
-          </a:fillRef>
-          <a:effectRef idx="2">
-            <a:schemeClr val="accent1"/>
-          </a:effectRef>
-          <a:fontRef idx="minor">
-            <a:schemeClr val="lt1"/>
-          </a:fontRef>
-        </p:style>
-        <p:txBody>
-          <a:bodyPr rtlCol="0" anchor="ctr"/>
-          <a:lstStyle/>
-          <a:p>
-            <a:pPr algn="ctr"/>
-          </a:p>
-        </p:txBody>
-      </p:sp>
-      <p:sp>
-        <p:nvSpPr>
-          <p:cNvPr id="14" name="TextBox 13"/>
+              <a:t>Thank you.</a:t>
+            </a:r>
+          </a:p>
+        </p:txBody>
+      </p:sp>
+      <p:sp>
+        <p:nvSpPr>
+          <p:cNvPr id="15" name="TextBox 14"/>
           <p:cNvSpPr txBox="1"/>
           <p:nvPr/>
         </p:nvSpPr>
         <p:spPr>
           <a:xfrm>
-            <a:off x="777240" y="4617720"/>
-            <a:ext cx="1965960" cy="292608"/>
+            <a:off x="822960" y="5687568"/>
+            <a:ext cx="6858000" cy="256032"/>
           </a:xfrm>
           <a:prstGeom prst="rect">
             <a:avLst/>
@@ -6405,34 +6701,34 @@
           <a:noFill/>
         </p:spPr>
         <p:txBody>
-          <a:bodyPr wrap="square" lIns="18288" rIns="18288" anchor="ctr">
+          <a:bodyPr wrap="square" lIns="27432" rIns="27432" anchor="ctr">
             <a:spAutoFit/>
           </a:bodyPr>
           <a:lstStyle/>
           <a:p>
             <a:pPr algn="l"/>
             <a:r>
-              <a:rPr sz="1700" b="1">
-                <a:solidFill>
-                  <a:srgbClr val="F5C46B"/>
+              <a:rPr sz="1100" b="0">
+                <a:solidFill>
+                  <a:srgbClr val="EEDCE6"/>
                 </a:solidFill>
                 <a:latin typeface="Aptos"/>
               </a:rPr>
-              <a:t>Meaningful connections</a:t>
-            </a:r>
-          </a:p>
-        </p:txBody>
-      </p:sp>
-      <p:sp>
-        <p:nvSpPr>
-          <p:cNvPr id="15" name="TextBox 14"/>
+              <a:t>Live demo: pkyeibrewu1.github.io/LEI/?developer=1</a:t>
+            </a:r>
+          </a:p>
+        </p:txBody>
+      </p:sp>
+      <p:sp>
+        <p:nvSpPr>
+          <p:cNvPr id="16" name="TextBox 15"/>
           <p:cNvSpPr txBox="1"/>
           <p:nvPr/>
         </p:nvSpPr>
         <p:spPr>
           <a:xfrm>
-            <a:off x="2834640" y="4617720"/>
-            <a:ext cx="2926080" cy="292608"/>
+            <a:off x="658368" y="6473952"/>
+            <a:ext cx="3657600" cy="182880"/>
           </a:xfrm>
           <a:prstGeom prst="rect">
             <a:avLst/>
@@ -6440,164 +6736,16 @@
           <a:noFill/>
         </p:spPr>
         <p:txBody>
-          <a:bodyPr wrap="square" lIns="18288" rIns="18288" anchor="ctr">
+          <a:bodyPr wrap="square" lIns="27432" rIns="27432" anchor="ctr">
             <a:spAutoFit/>
           </a:bodyPr>
           <a:lstStyle/>
           <a:p>
             <a:pPr algn="l"/>
             <a:r>
-              <a:rPr sz="1800" b="1">
-                <a:solidFill>
-                  <a:srgbClr val="F4E8EE"/>
-                </a:solidFill>
-                <a:latin typeface="Aptos"/>
-              </a:rPr>
-              <a:t>Circles + wellbeing + meetups</a:t>
-            </a:r>
-          </a:p>
-        </p:txBody>
-      </p:sp>
-      <p:sp>
-        <p:nvSpPr>
-          <p:cNvPr id="16" name="TextBox 15"/>
-          <p:cNvSpPr txBox="1"/>
-          <p:nvPr/>
-        </p:nvSpPr>
-        <p:spPr>
-          <a:xfrm>
-            <a:off x="5943600" y="4599432"/>
-            <a:ext cx="5212080" cy="502920"/>
-          </a:xfrm>
-          <a:prstGeom prst="rect">
-            <a:avLst/>
-          </a:prstGeom>
-          <a:noFill/>
-        </p:spPr>
-        <p:txBody>
-          <a:bodyPr wrap="square" lIns="18288" rIns="18288" anchor="ctr">
-            <a:spAutoFit/>
-          </a:bodyPr>
-          <a:lstStyle/>
-          <a:p>
-            <a:pPr algn="l"/>
-            <a:r>
-              <a:rPr sz="1500" b="0">
-                <a:solidFill>
-                  <a:srgbClr val="F4E8EE"/>
-                </a:solidFill>
-                <a:latin typeface="Aptos"/>
-              </a:rPr>
-              <a:t>The platform makes connection contextual: who I am, what I need, and where I am today.</a:t>
-            </a:r>
-          </a:p>
-        </p:txBody>
-      </p:sp>
-      <p:sp>
-        <p:nvSpPr>
-          <p:cNvPr id="17" name="Rectangle 16"/>
-          <p:cNvSpPr/>
-          <p:nvPr/>
-        </p:nvSpPr>
-        <p:spPr>
-          <a:xfrm>
-            <a:off x="777240" y="5303520"/>
-            <a:ext cx="10378440" cy="18288"/>
-          </a:xfrm>
-          <a:prstGeom prst="rect">
-            <a:avLst/>
-          </a:prstGeom>
-          <a:solidFill>
-            <a:srgbClr val="52394B"/>
-          </a:solidFill>
-          <a:ln>
-            <a:noFill/>
-          </a:ln>
-        </p:spPr>
-        <p:style>
-          <a:lnRef idx="1">
-            <a:schemeClr val="accent1"/>
-          </a:lnRef>
-          <a:fillRef idx="3">
-            <a:schemeClr val="accent1"/>
-          </a:fillRef>
-          <a:effectRef idx="2">
-            <a:schemeClr val="accent1"/>
-          </a:effectRef>
-          <a:fontRef idx="minor">
-            <a:schemeClr val="lt1"/>
-          </a:fontRef>
-        </p:style>
-        <p:txBody>
-          <a:bodyPr rtlCol="0" anchor="ctr"/>
-          <a:lstStyle/>
-          <a:p>
-            <a:pPr algn="ctr"/>
-          </a:p>
-        </p:txBody>
-      </p:sp>
-      <p:sp>
-        <p:nvSpPr>
-          <p:cNvPr id="18" name="TextBox 17"/>
-          <p:cNvSpPr txBox="1"/>
-          <p:nvPr/>
-        </p:nvSpPr>
-        <p:spPr>
-          <a:xfrm>
-            <a:off x="777240" y="5989320"/>
-            <a:ext cx="10515600" cy="320040"/>
-          </a:xfrm>
-          <a:prstGeom prst="rect">
-            <a:avLst/>
-          </a:prstGeom>
-          <a:noFill/>
-        </p:spPr>
-        <p:txBody>
-          <a:bodyPr wrap="square" lIns="18288" rIns="18288" anchor="ctr">
-            <a:spAutoFit/>
-          </a:bodyPr>
-          <a:lstStyle/>
-          <a:p>
-            <a:pPr algn="l"/>
-            <a:r>
-              <a:rPr sz="1900" b="1">
-                <a:solidFill>
-                  <a:srgbClr val="F5C46B"/>
-                </a:solidFill>
-                <a:latin typeface="Aptos"/>
-              </a:rPr>
-              <a:t>A single experience connects all three outcomes.</a:t>
-            </a:r>
-          </a:p>
-        </p:txBody>
-      </p:sp>
-      <p:sp>
-        <p:nvSpPr>
-          <p:cNvPr id="19" name="TextBox 18"/>
-          <p:cNvSpPr txBox="1"/>
-          <p:nvPr/>
-        </p:nvSpPr>
-        <p:spPr>
-          <a:xfrm>
-            <a:off x="658368" y="6473952"/>
-            <a:ext cx="3657600" cy="182880"/>
-          </a:xfrm>
-          <a:prstGeom prst="rect">
-            <a:avLst/>
-          </a:prstGeom>
-          <a:noFill/>
-        </p:spPr>
-        <p:txBody>
-          <a:bodyPr wrap="square" lIns="18288" rIns="18288" anchor="ctr">
-            <a:spAutoFit/>
-          </a:bodyPr>
-          <a:lstStyle/>
-          <a:p>
-            <a:pPr algn="l"/>
-            <a:r>
               <a:rPr sz="900" b="0">
                 <a:solidFill>
-                  <a:srgbClr val="F4E8EE"/>
+                  <a:srgbClr val="EEDCE6"/>
                 </a:solidFill>
                 <a:latin typeface="Aptos"/>
               </a:rPr>
@@ -6608,7 +6756,7 @@
       </p:sp>
       <p:sp>
         <p:nvSpPr>
-          <p:cNvPr id="20" name="TextBox 19"/>
+          <p:cNvPr id="17" name="TextBox 16"/>
           <p:cNvSpPr txBox="1"/>
           <p:nvPr/>
         </p:nvSpPr>
@@ -6623,7 +6771,7 @@
           <a:noFill/>
         </p:spPr>
         <p:txBody>
-          <a:bodyPr wrap="square" lIns="18288" rIns="18288" anchor="ctr">
+          <a:bodyPr wrap="square" lIns="27432" rIns="27432" anchor="ctr">
             <a:spAutoFit/>
           </a:bodyPr>
           <a:lstStyle/>
@@ -6637,2369 +6785,6 @@
                 <a:latin typeface="Aptos"/>
               </a:rPr>
               <a:t>05</a:t>
-            </a:r>
-          </a:p>
-        </p:txBody>
-      </p:sp>
-    </p:spTree>
-  </p:cSld>
-  <p:clrMapOvr>
-    <a:masterClrMapping/>
-  </p:clrMapOvr>
-</p:sld>
-</file>
-
-<file path=ppt/slides/slide6.xml><?xml version="1.0" encoding="utf-8"?>
-<p:sld xmlns:a="http://schemas.openxmlformats.org/drawingml/2006/main" xmlns:p="http://schemas.openxmlformats.org/presentationml/2006/main" xmlns:r="http://schemas.openxmlformats.org/officeDocument/2006/relationships">
-  <p:cSld>
-    <p:spTree>
-      <p:nvGrpSpPr>
-        <p:cNvPr id="1" name=""/>
-        <p:cNvGrpSpPr/>
-        <p:nvPr/>
-      </p:nvGrpSpPr>
-      <p:grpSpPr/>
-      <p:sp>
-        <p:nvSpPr>
-          <p:cNvPr id="2" name="Rectangle 1"/>
-          <p:cNvSpPr/>
-          <p:nvPr/>
-        </p:nvSpPr>
-        <p:spPr>
-          <a:xfrm>
-            <a:off x="0" y="0"/>
-            <a:ext cx="12191695" cy="6858000"/>
-          </a:xfrm>
-          <a:prstGeom prst="rect">
-            <a:avLst/>
-          </a:prstGeom>
-          <a:solidFill>
-            <a:srgbClr val="FCFBF9"/>
-          </a:solidFill>
-          <a:ln>
-            <a:noFill/>
-          </a:ln>
-        </p:spPr>
-        <p:style>
-          <a:lnRef idx="1">
-            <a:schemeClr val="accent1"/>
-          </a:lnRef>
-          <a:fillRef idx="3">
-            <a:schemeClr val="accent1"/>
-          </a:fillRef>
-          <a:effectRef idx="2">
-            <a:schemeClr val="accent1"/>
-          </a:effectRef>
-          <a:fontRef idx="minor">
-            <a:schemeClr val="lt1"/>
-          </a:fontRef>
-        </p:style>
-        <p:txBody>
-          <a:bodyPr rtlCol="0" anchor="ctr"/>
-          <a:lstStyle/>
-          <a:p>
-            <a:pPr algn="ctr"/>
-          </a:p>
-        </p:txBody>
-      </p:sp>
-      <p:sp>
-        <p:nvSpPr>
-          <p:cNvPr id="3" name="TextBox 2"/>
-          <p:cNvSpPr txBox="1"/>
-          <p:nvPr/>
-        </p:nvSpPr>
-        <p:spPr>
-          <a:xfrm>
-            <a:off x="658368" y="438912"/>
-            <a:ext cx="4114800" cy="274320"/>
-          </a:xfrm>
-          <a:prstGeom prst="rect">
-            <a:avLst/>
-          </a:prstGeom>
-          <a:noFill/>
-        </p:spPr>
-        <p:txBody>
-          <a:bodyPr wrap="square" lIns="18288" rIns="18288" anchor="ctr">
-            <a:spAutoFit/>
-          </a:bodyPr>
-          <a:lstStyle/>
-          <a:p>
-            <a:pPr algn="l"/>
-            <a:r>
-              <a:rPr sz="1000" b="1">
-                <a:solidFill>
-                  <a:srgbClr val="875D78"/>
-                </a:solidFill>
-                <a:latin typeface="Aptos"/>
-              </a:rPr>
-              <a:t>05  /  WHY THIS CAN WORK</a:t>
-            </a:r>
-          </a:p>
-        </p:txBody>
-      </p:sp>
-      <p:sp>
-        <p:nvSpPr>
-          <p:cNvPr id="4" name="TextBox 3"/>
-          <p:cNvSpPr txBox="1"/>
-          <p:nvPr/>
-        </p:nvSpPr>
-        <p:spPr>
-          <a:xfrm>
-            <a:off x="658368" y="768096"/>
-            <a:ext cx="10789920" cy="658368"/>
-          </a:xfrm>
-          <a:prstGeom prst="rect">
-            <a:avLst/>
-          </a:prstGeom>
-          <a:noFill/>
-        </p:spPr>
-        <p:txBody>
-          <a:bodyPr wrap="square" lIns="18288" rIns="18288" anchor="ctr">
-            <a:spAutoFit/>
-          </a:bodyPr>
-          <a:lstStyle/>
-          <a:p>
-            <a:pPr algn="l"/>
-            <a:r>
-              <a:rPr sz="2800" b="1">
-                <a:solidFill>
-                  <a:srgbClr val="241C17"/>
-                </a:solidFill>
-                <a:latin typeface="Aptos Display"/>
-              </a:rPr>
-              <a:t>Trust is the product feature</a:t>
-            </a:r>
-          </a:p>
-        </p:txBody>
-      </p:sp>
-      <p:sp>
-        <p:nvSpPr>
-          <p:cNvPr id="5" name="Rectangle 4"/>
-          <p:cNvSpPr/>
-          <p:nvPr/>
-        </p:nvSpPr>
-        <p:spPr>
-          <a:xfrm>
-            <a:off x="658368" y="1572768"/>
-            <a:ext cx="1005840" cy="36576"/>
-          </a:xfrm>
-          <a:prstGeom prst="rect">
-            <a:avLst/>
-          </a:prstGeom>
-          <a:solidFill>
-            <a:srgbClr val="875D78"/>
-          </a:solidFill>
-          <a:ln>
-            <a:noFill/>
-          </a:ln>
-        </p:spPr>
-        <p:style>
-          <a:lnRef idx="1">
-            <a:schemeClr val="accent1"/>
-          </a:lnRef>
-          <a:fillRef idx="3">
-            <a:schemeClr val="accent1"/>
-          </a:fillRef>
-          <a:effectRef idx="2">
-            <a:schemeClr val="accent1"/>
-          </a:effectRef>
-          <a:fontRef idx="minor">
-            <a:schemeClr val="lt1"/>
-          </a:fontRef>
-        </p:style>
-        <p:txBody>
-          <a:bodyPr rtlCol="0" anchor="ctr"/>
-          <a:lstStyle/>
-          <a:p>
-            <a:pPr algn="ctr"/>
-          </a:p>
-        </p:txBody>
-      </p:sp>
-      <p:sp>
-        <p:nvSpPr>
-          <p:cNvPr id="6" name="Rounded Rectangle 5"/>
-          <p:cNvSpPr/>
-          <p:nvPr/>
-        </p:nvSpPr>
-        <p:spPr>
-          <a:xfrm>
-            <a:off x="777240" y="2057400"/>
-            <a:ext cx="4800600" cy="1234440"/>
-          </a:xfrm>
-          <a:prstGeom prst="roundRect">
-            <a:avLst/>
-          </a:prstGeom>
-          <a:solidFill>
-            <a:srgbClr val="FFFFFF"/>
-          </a:solidFill>
-          <a:ln>
-            <a:noFill/>
-          </a:ln>
-        </p:spPr>
-        <p:style>
-          <a:lnRef idx="1">
-            <a:schemeClr val="accent1"/>
-          </a:lnRef>
-          <a:fillRef idx="3">
-            <a:schemeClr val="accent1"/>
-          </a:fillRef>
-          <a:effectRef idx="2">
-            <a:schemeClr val="accent1"/>
-          </a:effectRef>
-          <a:fontRef idx="minor">
-            <a:schemeClr val="lt1"/>
-          </a:fontRef>
-        </p:style>
-        <p:txBody>
-          <a:bodyPr rtlCol="0" anchor="ctr"/>
-          <a:lstStyle/>
-          <a:p>
-            <a:pPr algn="ctr"/>
-          </a:p>
-        </p:txBody>
-      </p:sp>
-      <p:sp>
-        <p:nvSpPr>
-          <p:cNvPr id="7" name="TextBox 6"/>
-          <p:cNvSpPr txBox="1"/>
-          <p:nvPr/>
-        </p:nvSpPr>
-        <p:spPr>
-          <a:xfrm>
-            <a:off x="1005840" y="2258568"/>
-            <a:ext cx="4206240" cy="292608"/>
-          </a:xfrm>
-          <a:prstGeom prst="rect">
-            <a:avLst/>
-          </a:prstGeom>
-          <a:noFill/>
-        </p:spPr>
-        <p:txBody>
-          <a:bodyPr wrap="square" lIns="18288" rIns="18288" anchor="ctr">
-            <a:spAutoFit/>
-          </a:bodyPr>
-          <a:lstStyle/>
-          <a:p>
-            <a:pPr algn="l"/>
-            <a:r>
-              <a:rPr sz="1800" b="1">
-                <a:solidFill>
-                  <a:srgbClr val="241C17"/>
-                </a:solidFill>
-                <a:latin typeface="Aptos"/>
-              </a:rPr>
-              <a:t>Protected entry</a:t>
-            </a:r>
-          </a:p>
-        </p:txBody>
-      </p:sp>
-      <p:sp>
-        <p:nvSpPr>
-          <p:cNvPr id="8" name="TextBox 7"/>
-          <p:cNvSpPr txBox="1"/>
-          <p:nvPr/>
-        </p:nvSpPr>
-        <p:spPr>
-          <a:xfrm>
-            <a:off x="1005840" y="2642616"/>
-            <a:ext cx="4206240" cy="457200"/>
-          </a:xfrm>
-          <a:prstGeom prst="rect">
-            <a:avLst/>
-          </a:prstGeom>
-          <a:noFill/>
-        </p:spPr>
-        <p:txBody>
-          <a:bodyPr wrap="square" lIns="18288" rIns="18288" anchor="ctr">
-            <a:spAutoFit/>
-          </a:bodyPr>
-          <a:lstStyle/>
-          <a:p>
-            <a:pPr algn="l"/>
-            <a:r>
-              <a:rPr sz="1400" b="0">
-                <a:solidFill>
-                  <a:srgbClr val="786B62"/>
-                </a:solidFill>
-                <a:latin typeface="Aptos"/>
-              </a:rPr>
-              <a:t>A gated experience and community covenant make the first interaction feel intentional.</a:t>
-            </a:r>
-          </a:p>
-        </p:txBody>
-      </p:sp>
-      <p:sp>
-        <p:nvSpPr>
-          <p:cNvPr id="9" name="Rounded Rectangle 8"/>
-          <p:cNvSpPr/>
-          <p:nvPr/>
-        </p:nvSpPr>
-        <p:spPr>
-          <a:xfrm>
-            <a:off x="6263640" y="2057400"/>
-            <a:ext cx="4800600" cy="1234440"/>
-          </a:xfrm>
-          <a:prstGeom prst="roundRect">
-            <a:avLst/>
-          </a:prstGeom>
-          <a:solidFill>
-            <a:srgbClr val="FFFFFF"/>
-          </a:solidFill>
-          <a:ln>
-            <a:noFill/>
-          </a:ln>
-        </p:spPr>
-        <p:style>
-          <a:lnRef idx="1">
-            <a:schemeClr val="accent1"/>
-          </a:lnRef>
-          <a:fillRef idx="3">
-            <a:schemeClr val="accent1"/>
-          </a:fillRef>
-          <a:effectRef idx="2">
-            <a:schemeClr val="accent1"/>
-          </a:effectRef>
-          <a:fontRef idx="minor">
-            <a:schemeClr val="lt1"/>
-          </a:fontRef>
-        </p:style>
-        <p:txBody>
-          <a:bodyPr rtlCol="0" anchor="ctr"/>
-          <a:lstStyle/>
-          <a:p>
-            <a:pPr algn="ctr"/>
-          </a:p>
-        </p:txBody>
-      </p:sp>
-      <p:sp>
-        <p:nvSpPr>
-          <p:cNvPr id="10" name="TextBox 9"/>
-          <p:cNvSpPr txBox="1"/>
-          <p:nvPr/>
-        </p:nvSpPr>
-        <p:spPr>
-          <a:xfrm>
-            <a:off x="6492240" y="2258568"/>
-            <a:ext cx="4206240" cy="292608"/>
-          </a:xfrm>
-          <a:prstGeom prst="rect">
-            <a:avLst/>
-          </a:prstGeom>
-          <a:noFill/>
-        </p:spPr>
-        <p:txBody>
-          <a:bodyPr wrap="square" lIns="18288" rIns="18288" anchor="ctr">
-            <a:spAutoFit/>
-          </a:bodyPr>
-          <a:lstStyle/>
-          <a:p>
-            <a:pPr algn="l"/>
-            <a:r>
-              <a:rPr sz="1800" b="1">
-                <a:solidFill>
-                  <a:srgbClr val="241C17"/>
-                </a:solidFill>
-                <a:latin typeface="Aptos"/>
-              </a:rPr>
-              <a:t>Contextual spaces</a:t>
-            </a:r>
-          </a:p>
-        </p:txBody>
-      </p:sp>
-      <p:sp>
-        <p:nvSpPr>
-          <p:cNvPr id="11" name="TextBox 10"/>
-          <p:cNvSpPr txBox="1"/>
-          <p:nvPr/>
-        </p:nvSpPr>
-        <p:spPr>
-          <a:xfrm>
-            <a:off x="6492240" y="2642616"/>
-            <a:ext cx="4206240" cy="457200"/>
-          </a:xfrm>
-          <a:prstGeom prst="rect">
-            <a:avLst/>
-          </a:prstGeom>
-          <a:noFill/>
-        </p:spPr>
-        <p:txBody>
-          <a:bodyPr wrap="square" lIns="18288" rIns="18288" anchor="ctr">
-            <a:spAutoFit/>
-          </a:bodyPr>
-          <a:lstStyle/>
-          <a:p>
-            <a:pPr algn="l"/>
-            <a:r>
-              <a:rPr sz="1400" b="0">
-                <a:solidFill>
-                  <a:srgbClr val="786B62"/>
-                </a:solidFill>
-                <a:latin typeface="Aptos"/>
-              </a:rPr>
-              <a:t>Members choose the space that feels right while keeping a shared welcome realm.</a:t>
-            </a:r>
-          </a:p>
-        </p:txBody>
-      </p:sp>
-      <p:sp>
-        <p:nvSpPr>
-          <p:cNvPr id="12" name="Rounded Rectangle 11"/>
-          <p:cNvSpPr/>
-          <p:nvPr/>
-        </p:nvSpPr>
-        <p:spPr>
-          <a:xfrm>
-            <a:off x="777240" y="3840480"/>
-            <a:ext cx="4800600" cy="1234440"/>
-          </a:xfrm>
-          <a:prstGeom prst="roundRect">
-            <a:avLst/>
-          </a:prstGeom>
-          <a:solidFill>
-            <a:srgbClr val="FFFFFF"/>
-          </a:solidFill>
-          <a:ln>
-            <a:noFill/>
-          </a:ln>
-        </p:spPr>
-        <p:style>
-          <a:lnRef idx="1">
-            <a:schemeClr val="accent1"/>
-          </a:lnRef>
-          <a:fillRef idx="3">
-            <a:schemeClr val="accent1"/>
-          </a:fillRef>
-          <a:effectRef idx="2">
-            <a:schemeClr val="accent1"/>
-          </a:effectRef>
-          <a:fontRef idx="minor">
-            <a:schemeClr val="lt1"/>
-          </a:fontRef>
-        </p:style>
-        <p:txBody>
-          <a:bodyPr rtlCol="0" anchor="ctr"/>
-          <a:lstStyle/>
-          <a:p>
-            <a:pPr algn="ctr"/>
-          </a:p>
-        </p:txBody>
-      </p:sp>
-      <p:sp>
-        <p:nvSpPr>
-          <p:cNvPr id="13" name="TextBox 12"/>
-          <p:cNvSpPr txBox="1"/>
-          <p:nvPr/>
-        </p:nvSpPr>
-        <p:spPr>
-          <a:xfrm>
-            <a:off x="1005840" y="4041648"/>
-            <a:ext cx="4206240" cy="292608"/>
-          </a:xfrm>
-          <a:prstGeom prst="rect">
-            <a:avLst/>
-          </a:prstGeom>
-          <a:noFill/>
-        </p:spPr>
-        <p:txBody>
-          <a:bodyPr wrap="square" lIns="18288" rIns="18288" anchor="ctr">
-            <a:spAutoFit/>
-          </a:bodyPr>
-          <a:lstStyle/>
-          <a:p>
-            <a:pPr algn="l"/>
-            <a:r>
-              <a:rPr sz="1800" b="1">
-                <a:solidFill>
-                  <a:srgbClr val="241C17"/>
-                </a:solidFill>
-                <a:latin typeface="Aptos"/>
-              </a:rPr>
-              <a:t>Trauma-informed design</a:t>
-            </a:r>
-          </a:p>
-        </p:txBody>
-      </p:sp>
-      <p:sp>
-        <p:nvSpPr>
-          <p:cNvPr id="14" name="TextBox 13"/>
-          <p:cNvSpPr txBox="1"/>
-          <p:nvPr/>
-        </p:nvSpPr>
-        <p:spPr>
-          <a:xfrm>
-            <a:off x="1005840" y="4425696"/>
-            <a:ext cx="4206240" cy="457200"/>
-          </a:xfrm>
-          <a:prstGeom prst="rect">
-            <a:avLst/>
-          </a:prstGeom>
-          <a:noFill/>
-        </p:spPr>
-        <p:txBody>
-          <a:bodyPr wrap="square" lIns="18288" rIns="18288" anchor="ctr">
-            <a:spAutoFit/>
-          </a:bodyPr>
-          <a:lstStyle/>
-          <a:p>
-            <a:pPr algn="l"/>
-            <a:r>
-              <a:rPr sz="1400" b="0">
-                <a:solidFill>
-                  <a:srgbClr val="786B62"/>
-                </a:solidFill>
-                <a:latin typeface="Aptos"/>
-              </a:rPr>
-              <a:t>Wellbeing is a signal for support, not a label that changes her access or worth.</a:t>
-            </a:r>
-          </a:p>
-        </p:txBody>
-      </p:sp>
-      <p:sp>
-        <p:nvSpPr>
-          <p:cNvPr id="15" name="Rounded Rectangle 14"/>
-          <p:cNvSpPr/>
-          <p:nvPr/>
-        </p:nvSpPr>
-        <p:spPr>
-          <a:xfrm>
-            <a:off x="6263640" y="3840480"/>
-            <a:ext cx="4800600" cy="1234440"/>
-          </a:xfrm>
-          <a:prstGeom prst="roundRect">
-            <a:avLst/>
-          </a:prstGeom>
-          <a:solidFill>
-            <a:srgbClr val="FFFFFF"/>
-          </a:solidFill>
-          <a:ln>
-            <a:noFill/>
-          </a:ln>
-        </p:spPr>
-        <p:style>
-          <a:lnRef idx="1">
-            <a:schemeClr val="accent1"/>
-          </a:lnRef>
-          <a:fillRef idx="3">
-            <a:schemeClr val="accent1"/>
-          </a:fillRef>
-          <a:effectRef idx="2">
-            <a:schemeClr val="accent1"/>
-          </a:effectRef>
-          <a:fontRef idx="minor">
-            <a:schemeClr val="lt1"/>
-          </a:fontRef>
-        </p:style>
-        <p:txBody>
-          <a:bodyPr rtlCol="0" anchor="ctr"/>
-          <a:lstStyle/>
-          <a:p>
-            <a:pPr algn="ctr"/>
-          </a:p>
-        </p:txBody>
-      </p:sp>
-      <p:sp>
-        <p:nvSpPr>
-          <p:cNvPr id="16" name="TextBox 15"/>
-          <p:cNvSpPr txBox="1"/>
-          <p:nvPr/>
-        </p:nvSpPr>
-        <p:spPr>
-          <a:xfrm>
-            <a:off x="6492240" y="4041648"/>
-            <a:ext cx="4206240" cy="292608"/>
-          </a:xfrm>
-          <a:prstGeom prst="rect">
-            <a:avLst/>
-          </a:prstGeom>
-          <a:noFill/>
-        </p:spPr>
-        <p:txBody>
-          <a:bodyPr wrap="square" lIns="18288" rIns="18288" anchor="ctr">
-            <a:spAutoFit/>
-          </a:bodyPr>
-          <a:lstStyle/>
-          <a:p>
-            <a:pPr algn="l"/>
-            <a:r>
-              <a:rPr sz="1800" b="1">
-                <a:solidFill>
-                  <a:srgbClr val="241C17"/>
-                </a:solidFill>
-                <a:latin typeface="Aptos"/>
-              </a:rPr>
-              <a:t>Safety by default</a:t>
-            </a:r>
-          </a:p>
-        </p:txBody>
-      </p:sp>
-      <p:sp>
-        <p:nvSpPr>
-          <p:cNvPr id="17" name="TextBox 16"/>
-          <p:cNvSpPr txBox="1"/>
-          <p:nvPr/>
-        </p:nvSpPr>
-        <p:spPr>
-          <a:xfrm>
-            <a:off x="6492240" y="4425696"/>
-            <a:ext cx="4206240" cy="457200"/>
-          </a:xfrm>
-          <a:prstGeom prst="rect">
-            <a:avLst/>
-          </a:prstGeom>
-          <a:noFill/>
-        </p:spPr>
-        <p:txBody>
-          <a:bodyPr wrap="square" lIns="18288" rIns="18288" anchor="ctr">
-            <a:spAutoFit/>
-          </a:bodyPr>
-          <a:lstStyle/>
-          <a:p>
-            <a:pPr algn="l"/>
-            <a:r>
-              <a:rPr sz="1400" b="0">
-                <a:solidFill>
-                  <a:srgbClr val="786B62"/>
-                </a:solidFill>
-                <a:latin typeface="Aptos"/>
-              </a:rPr>
-              <a:t>SOS, reporting, age gates, and privacy controls turn belonging into infrastructure.</a:t>
-            </a:r>
-          </a:p>
-        </p:txBody>
-      </p:sp>
-      <p:sp>
-        <p:nvSpPr>
-          <p:cNvPr id="18" name="TextBox 17"/>
-          <p:cNvSpPr txBox="1"/>
-          <p:nvPr/>
-        </p:nvSpPr>
-        <p:spPr>
-          <a:xfrm>
-            <a:off x="777240" y="5897880"/>
-            <a:ext cx="10515600" cy="365760"/>
-          </a:xfrm>
-          <a:prstGeom prst="rect">
-            <a:avLst/>
-          </a:prstGeom>
-          <a:noFill/>
-        </p:spPr>
-        <p:txBody>
-          <a:bodyPr wrap="square" lIns="18288" rIns="18288" anchor="ctr">
-            <a:spAutoFit/>
-          </a:bodyPr>
-          <a:lstStyle/>
-          <a:p>
-            <a:pPr algn="l"/>
-            <a:r>
-              <a:rPr sz="1900" b="1">
-                <a:solidFill>
-                  <a:srgbClr val="875D78"/>
-                </a:solidFill>
-                <a:latin typeface="Aptos"/>
-              </a:rPr>
-              <a:t>We are designing for the moment someone decides whether it is safe to stay.</a:t>
-            </a:r>
-          </a:p>
-        </p:txBody>
-      </p:sp>
-      <p:sp>
-        <p:nvSpPr>
-          <p:cNvPr id="19" name="TextBox 18"/>
-          <p:cNvSpPr txBox="1"/>
-          <p:nvPr/>
-        </p:nvSpPr>
-        <p:spPr>
-          <a:xfrm>
-            <a:off x="658368" y="6473952"/>
-            <a:ext cx="3657600" cy="182880"/>
-          </a:xfrm>
-          <a:prstGeom prst="rect">
-            <a:avLst/>
-          </a:prstGeom>
-          <a:noFill/>
-        </p:spPr>
-        <p:txBody>
-          <a:bodyPr wrap="square" lIns="18288" rIns="18288" anchor="ctr">
-            <a:spAutoFit/>
-          </a:bodyPr>
-          <a:lstStyle/>
-          <a:p>
-            <a:pPr algn="l"/>
-            <a:r>
-              <a:rPr sz="900" b="0">
-                <a:solidFill>
-                  <a:srgbClr val="786B62"/>
-                </a:solidFill>
-                <a:latin typeface="Aptos"/>
-              </a:rPr>
-              <a:t>LEI  /  Hackathon pitch</a:t>
-            </a:r>
-          </a:p>
-        </p:txBody>
-      </p:sp>
-      <p:sp>
-        <p:nvSpPr>
-          <p:cNvPr id="20" name="TextBox 19"/>
-          <p:cNvSpPr txBox="1"/>
-          <p:nvPr/>
-        </p:nvSpPr>
-        <p:spPr>
-          <a:xfrm>
-            <a:off x="11064240" y="6473952"/>
-            <a:ext cx="457200" cy="182880"/>
-          </a:xfrm>
-          <a:prstGeom prst="rect">
-            <a:avLst/>
-          </a:prstGeom>
-          <a:noFill/>
-        </p:spPr>
-        <p:txBody>
-          <a:bodyPr wrap="square" lIns="18288" rIns="18288" anchor="ctr">
-            <a:spAutoFit/>
-          </a:bodyPr>
-          <a:lstStyle/>
-          <a:p>
-            <a:pPr algn="r"/>
-            <a:r>
-              <a:rPr sz="900" b="1">
-                <a:solidFill>
-                  <a:srgbClr val="875D78"/>
-                </a:solidFill>
-                <a:latin typeface="Aptos"/>
-              </a:rPr>
-              <a:t>06</a:t>
-            </a:r>
-          </a:p>
-        </p:txBody>
-      </p:sp>
-    </p:spTree>
-  </p:cSld>
-  <p:clrMapOvr>
-    <a:masterClrMapping/>
-  </p:clrMapOvr>
-</p:sld>
-</file>
-
-<file path=ppt/slides/slide7.xml><?xml version="1.0" encoding="utf-8"?>
-<p:sld xmlns:a="http://schemas.openxmlformats.org/drawingml/2006/main" xmlns:p="http://schemas.openxmlformats.org/presentationml/2006/main" xmlns:r="http://schemas.openxmlformats.org/officeDocument/2006/relationships">
-  <p:cSld>
-    <p:spTree>
-      <p:nvGrpSpPr>
-        <p:cNvPr id="1" name=""/>
-        <p:cNvGrpSpPr/>
-        <p:nvPr/>
-      </p:nvGrpSpPr>
-      <p:grpSpPr/>
-      <p:sp>
-        <p:nvSpPr>
-          <p:cNvPr id="2" name="Rectangle 1"/>
-          <p:cNvSpPr/>
-          <p:nvPr/>
-        </p:nvSpPr>
-        <p:spPr>
-          <a:xfrm>
-            <a:off x="0" y="0"/>
-            <a:ext cx="12191695" cy="6858000"/>
-          </a:xfrm>
-          <a:prstGeom prst="rect">
-            <a:avLst/>
-          </a:prstGeom>
-          <a:solidFill>
-            <a:srgbClr val="FCFBF9"/>
-          </a:solidFill>
-          <a:ln>
-            <a:noFill/>
-          </a:ln>
-        </p:spPr>
-        <p:style>
-          <a:lnRef idx="1">
-            <a:schemeClr val="accent1"/>
-          </a:lnRef>
-          <a:fillRef idx="3">
-            <a:schemeClr val="accent1"/>
-          </a:fillRef>
-          <a:effectRef idx="2">
-            <a:schemeClr val="accent1"/>
-          </a:effectRef>
-          <a:fontRef idx="minor">
-            <a:schemeClr val="lt1"/>
-          </a:fontRef>
-        </p:style>
-        <p:txBody>
-          <a:bodyPr rtlCol="0" anchor="ctr"/>
-          <a:lstStyle/>
-          <a:p>
-            <a:pPr algn="ctr"/>
-          </a:p>
-        </p:txBody>
-      </p:sp>
-      <p:sp>
-        <p:nvSpPr>
-          <p:cNvPr id="3" name="TextBox 2"/>
-          <p:cNvSpPr txBox="1"/>
-          <p:nvPr/>
-        </p:nvSpPr>
-        <p:spPr>
-          <a:xfrm>
-            <a:off x="658368" y="438912"/>
-            <a:ext cx="4114800" cy="274320"/>
-          </a:xfrm>
-          <a:prstGeom prst="rect">
-            <a:avLst/>
-          </a:prstGeom>
-          <a:noFill/>
-        </p:spPr>
-        <p:txBody>
-          <a:bodyPr wrap="square" lIns="18288" rIns="18288" anchor="ctr">
-            <a:spAutoFit/>
-          </a:bodyPr>
-          <a:lstStyle/>
-          <a:p>
-            <a:pPr algn="l"/>
-            <a:r>
-              <a:rPr sz="1000" b="1">
-                <a:solidFill>
-                  <a:srgbClr val="875D78"/>
-                </a:solidFill>
-                <a:latin typeface="Aptos"/>
-              </a:rPr>
-              <a:t>06  /  IMPACT</a:t>
-            </a:r>
-          </a:p>
-        </p:txBody>
-      </p:sp>
-      <p:sp>
-        <p:nvSpPr>
-          <p:cNvPr id="4" name="TextBox 3"/>
-          <p:cNvSpPr txBox="1"/>
-          <p:nvPr/>
-        </p:nvSpPr>
-        <p:spPr>
-          <a:xfrm>
-            <a:off x="658368" y="768096"/>
-            <a:ext cx="10789920" cy="658368"/>
-          </a:xfrm>
-          <a:prstGeom prst="rect">
-            <a:avLst/>
-          </a:prstGeom>
-          <a:noFill/>
-        </p:spPr>
-        <p:txBody>
-          <a:bodyPr wrap="square" lIns="18288" rIns="18288" anchor="ctr">
-            <a:spAutoFit/>
-          </a:bodyPr>
-          <a:lstStyle/>
-          <a:p>
-            <a:pPr algn="l"/>
-            <a:r>
-              <a:rPr sz="2800" b="1">
-                <a:solidFill>
-                  <a:srgbClr val="241C17"/>
-                </a:solidFill>
-                <a:latin typeface="Aptos Display"/>
-              </a:rPr>
-              <a:t>We will measure movement, not vanity metrics</a:t>
-            </a:r>
-          </a:p>
-        </p:txBody>
-      </p:sp>
-      <p:sp>
-        <p:nvSpPr>
-          <p:cNvPr id="5" name="Rectangle 4"/>
-          <p:cNvSpPr/>
-          <p:nvPr/>
-        </p:nvSpPr>
-        <p:spPr>
-          <a:xfrm>
-            <a:off x="658368" y="1572768"/>
-            <a:ext cx="1005840" cy="36576"/>
-          </a:xfrm>
-          <a:prstGeom prst="rect">
-            <a:avLst/>
-          </a:prstGeom>
-          <a:solidFill>
-            <a:srgbClr val="875D78"/>
-          </a:solidFill>
-          <a:ln>
-            <a:noFill/>
-          </a:ln>
-        </p:spPr>
-        <p:style>
-          <a:lnRef idx="1">
-            <a:schemeClr val="accent1"/>
-          </a:lnRef>
-          <a:fillRef idx="3">
-            <a:schemeClr val="accent1"/>
-          </a:fillRef>
-          <a:effectRef idx="2">
-            <a:schemeClr val="accent1"/>
-          </a:effectRef>
-          <a:fontRef idx="minor">
-            <a:schemeClr val="lt1"/>
-          </a:fontRef>
-        </p:style>
-        <p:txBody>
-          <a:bodyPr rtlCol="0" anchor="ctr"/>
-          <a:lstStyle/>
-          <a:p>
-            <a:pPr algn="ctr"/>
-          </a:p>
-        </p:txBody>
-      </p:sp>
-      <p:sp>
-        <p:nvSpPr>
-          <p:cNvPr id="6" name="TextBox 5"/>
-          <p:cNvSpPr txBox="1"/>
-          <p:nvPr/>
-        </p:nvSpPr>
-        <p:spPr>
-          <a:xfrm>
-            <a:off x="731520" y="1874519"/>
-            <a:ext cx="10789920" cy="502920"/>
-          </a:xfrm>
-          <a:prstGeom prst="rect">
-            <a:avLst/>
-          </a:prstGeom>
-          <a:noFill/>
-        </p:spPr>
-        <p:txBody>
-          <a:bodyPr wrap="square" lIns="18288" rIns="18288" anchor="ctr">
-            <a:spAutoFit/>
-          </a:bodyPr>
-          <a:lstStyle/>
-          <a:p>
-            <a:pPr algn="l"/>
-            <a:r>
-              <a:rPr sz="1900" b="0">
-                <a:solidFill>
-                  <a:srgbClr val="241C17"/>
-                </a:solidFill>
-                <a:latin typeface="Aptos"/>
-              </a:rPr>
-              <a:t>A pilot with campuses and women-led communities can measure whether Lèi creates real momentum:</a:t>
-            </a:r>
-          </a:p>
-        </p:txBody>
-      </p:sp>
-      <p:sp>
-        <p:nvSpPr>
-          <p:cNvPr id="7" name="Rounded Rectangle 6"/>
-          <p:cNvSpPr/>
-          <p:nvPr/>
-        </p:nvSpPr>
-        <p:spPr>
-          <a:xfrm>
-            <a:off x="749808" y="2834640"/>
-            <a:ext cx="2468880" cy="1828800"/>
-          </a:xfrm>
-          <a:prstGeom prst="roundRect">
-            <a:avLst/>
-          </a:prstGeom>
-          <a:solidFill>
-            <a:srgbClr val="FFFFFF"/>
-          </a:solidFill>
-          <a:ln>
-            <a:noFill/>
-          </a:ln>
-        </p:spPr>
-        <p:style>
-          <a:lnRef idx="1">
-            <a:schemeClr val="accent1"/>
-          </a:lnRef>
-          <a:fillRef idx="3">
-            <a:schemeClr val="accent1"/>
-          </a:fillRef>
-          <a:effectRef idx="2">
-            <a:schemeClr val="accent1"/>
-          </a:effectRef>
-          <a:fontRef idx="minor">
-            <a:schemeClr val="lt1"/>
-          </a:fontRef>
-        </p:style>
-        <p:txBody>
-          <a:bodyPr rtlCol="0" anchor="ctr"/>
-          <a:lstStyle/>
-          <a:p>
-            <a:pPr algn="ctr"/>
-          </a:p>
-        </p:txBody>
-      </p:sp>
-      <p:sp>
-        <p:nvSpPr>
-          <p:cNvPr id="8" name="TextBox 7"/>
-          <p:cNvSpPr txBox="1"/>
-          <p:nvPr/>
-        </p:nvSpPr>
-        <p:spPr>
-          <a:xfrm>
-            <a:off x="978407" y="3154680"/>
-            <a:ext cx="2011680" cy="320040"/>
-          </a:xfrm>
-          <a:prstGeom prst="rect">
-            <a:avLst/>
-          </a:prstGeom>
-          <a:noFill/>
-        </p:spPr>
-        <p:txBody>
-          <a:bodyPr wrap="square" lIns="18288" rIns="18288" anchor="ctr">
-            <a:spAutoFit/>
-          </a:bodyPr>
-          <a:lstStyle/>
-          <a:p>
-            <a:pPr algn="l"/>
-            <a:r>
-              <a:rPr sz="1800" b="1">
-                <a:solidFill>
-                  <a:srgbClr val="875D78"/>
-                </a:solidFill>
-                <a:latin typeface="Aptos"/>
-              </a:rPr>
-              <a:t>Access</a:t>
-            </a:r>
-          </a:p>
-        </p:txBody>
-      </p:sp>
-      <p:sp>
-        <p:nvSpPr>
-          <p:cNvPr id="9" name="TextBox 8"/>
-          <p:cNvSpPr txBox="1"/>
-          <p:nvPr/>
-        </p:nvSpPr>
-        <p:spPr>
-          <a:xfrm>
-            <a:off x="978407" y="3703320"/>
-            <a:ext cx="1965960" cy="594360"/>
-          </a:xfrm>
-          <a:prstGeom prst="rect">
-            <a:avLst/>
-          </a:prstGeom>
-          <a:noFill/>
-        </p:spPr>
-        <p:txBody>
-          <a:bodyPr wrap="square" lIns="18288" rIns="18288" anchor="ctr">
-            <a:spAutoFit/>
-          </a:bodyPr>
-          <a:lstStyle/>
-          <a:p>
-            <a:pPr algn="l"/>
-            <a:r>
-              <a:rPr sz="1600" b="0">
-                <a:solidFill>
-                  <a:srgbClr val="241C17"/>
-                </a:solidFill>
-                <a:latin typeface="Aptos"/>
-              </a:rPr>
-              <a:t>time to first useful resource</a:t>
-            </a:r>
-          </a:p>
-        </p:txBody>
-      </p:sp>
-      <p:sp>
-        <p:nvSpPr>
-          <p:cNvPr id="10" name="Rounded Rectangle 9"/>
-          <p:cNvSpPr/>
-          <p:nvPr/>
-        </p:nvSpPr>
-        <p:spPr>
-          <a:xfrm>
-            <a:off x="3584448" y="2834640"/>
-            <a:ext cx="2468880" cy="1828800"/>
-          </a:xfrm>
-          <a:prstGeom prst="roundRect">
-            <a:avLst/>
-          </a:prstGeom>
-          <a:solidFill>
-            <a:srgbClr val="FFFFFF"/>
-          </a:solidFill>
-          <a:ln>
-            <a:noFill/>
-          </a:ln>
-        </p:spPr>
-        <p:style>
-          <a:lnRef idx="1">
-            <a:schemeClr val="accent1"/>
-          </a:lnRef>
-          <a:fillRef idx="3">
-            <a:schemeClr val="accent1"/>
-          </a:fillRef>
-          <a:effectRef idx="2">
-            <a:schemeClr val="accent1"/>
-          </a:effectRef>
-          <a:fontRef idx="minor">
-            <a:schemeClr val="lt1"/>
-          </a:fontRef>
-        </p:style>
-        <p:txBody>
-          <a:bodyPr rtlCol="0" anchor="ctr"/>
-          <a:lstStyle/>
-          <a:p>
-            <a:pPr algn="ctr"/>
-          </a:p>
-        </p:txBody>
-      </p:sp>
-      <p:sp>
-        <p:nvSpPr>
-          <p:cNvPr id="11" name="TextBox 10"/>
-          <p:cNvSpPr txBox="1"/>
-          <p:nvPr/>
-        </p:nvSpPr>
-        <p:spPr>
-          <a:xfrm>
-            <a:off x="3813048" y="3154680"/>
-            <a:ext cx="2011680" cy="320040"/>
-          </a:xfrm>
-          <a:prstGeom prst="rect">
-            <a:avLst/>
-          </a:prstGeom>
-          <a:noFill/>
-        </p:spPr>
-        <p:txBody>
-          <a:bodyPr wrap="square" lIns="18288" rIns="18288" anchor="ctr">
-            <a:spAutoFit/>
-          </a:bodyPr>
-          <a:lstStyle/>
-          <a:p>
-            <a:pPr algn="l"/>
-            <a:r>
-              <a:rPr sz="1800" b="1">
-                <a:solidFill>
-                  <a:srgbClr val="875D78"/>
-                </a:solidFill>
-                <a:latin typeface="Aptos"/>
-              </a:rPr>
-              <a:t>Growth</a:t>
-            </a:r>
-          </a:p>
-        </p:txBody>
-      </p:sp>
-      <p:sp>
-        <p:nvSpPr>
-          <p:cNvPr id="12" name="TextBox 11"/>
-          <p:cNvSpPr txBox="1"/>
-          <p:nvPr/>
-        </p:nvSpPr>
-        <p:spPr>
-          <a:xfrm>
-            <a:off x="3813048" y="3703320"/>
-            <a:ext cx="1965960" cy="594360"/>
-          </a:xfrm>
-          <a:prstGeom prst="rect">
-            <a:avLst/>
-          </a:prstGeom>
-          <a:noFill/>
-        </p:spPr>
-        <p:txBody>
-          <a:bodyPr wrap="square" lIns="18288" rIns="18288" anchor="ctr">
-            <a:spAutoFit/>
-          </a:bodyPr>
-          <a:lstStyle/>
-          <a:p>
-            <a:pPr algn="l"/>
-            <a:r>
-              <a:rPr sz="1600" b="0">
-                <a:solidFill>
-                  <a:srgbClr val="241C17"/>
-                </a:solidFill>
-                <a:latin typeface="Aptos"/>
-              </a:rPr>
-              <a:t>career actions started per member</a:t>
-            </a:r>
-          </a:p>
-        </p:txBody>
-      </p:sp>
-      <p:sp>
-        <p:nvSpPr>
-          <p:cNvPr id="13" name="Rounded Rectangle 12"/>
-          <p:cNvSpPr/>
-          <p:nvPr/>
-        </p:nvSpPr>
-        <p:spPr>
-          <a:xfrm>
-            <a:off x="6419088" y="2834640"/>
-            <a:ext cx="2468880" cy="1828800"/>
-          </a:xfrm>
-          <a:prstGeom prst="roundRect">
-            <a:avLst/>
-          </a:prstGeom>
-          <a:solidFill>
-            <a:srgbClr val="FFFFFF"/>
-          </a:solidFill>
-          <a:ln>
-            <a:noFill/>
-          </a:ln>
-        </p:spPr>
-        <p:style>
-          <a:lnRef idx="1">
-            <a:schemeClr val="accent1"/>
-          </a:lnRef>
-          <a:fillRef idx="3">
-            <a:schemeClr val="accent1"/>
-          </a:fillRef>
-          <a:effectRef idx="2">
-            <a:schemeClr val="accent1"/>
-          </a:effectRef>
-          <a:fontRef idx="minor">
-            <a:schemeClr val="lt1"/>
-          </a:fontRef>
-        </p:style>
-        <p:txBody>
-          <a:bodyPr rtlCol="0" anchor="ctr"/>
-          <a:lstStyle/>
-          <a:p>
-            <a:pPr algn="ctr"/>
-          </a:p>
-        </p:txBody>
-      </p:sp>
-      <p:sp>
-        <p:nvSpPr>
-          <p:cNvPr id="14" name="TextBox 13"/>
-          <p:cNvSpPr txBox="1"/>
-          <p:nvPr/>
-        </p:nvSpPr>
-        <p:spPr>
-          <a:xfrm>
-            <a:off x="6647688" y="3154680"/>
-            <a:ext cx="2011680" cy="320040"/>
-          </a:xfrm>
-          <a:prstGeom prst="rect">
-            <a:avLst/>
-          </a:prstGeom>
-          <a:noFill/>
-        </p:spPr>
-        <p:txBody>
-          <a:bodyPr wrap="square" lIns="18288" rIns="18288" anchor="ctr">
-            <a:spAutoFit/>
-          </a:bodyPr>
-          <a:lstStyle/>
-          <a:p>
-            <a:pPr algn="l"/>
-            <a:r>
-              <a:rPr sz="1800" b="1">
-                <a:solidFill>
-                  <a:srgbClr val="875D78"/>
-                </a:solidFill>
-                <a:latin typeface="Aptos"/>
-              </a:rPr>
-              <a:t>Connection</a:t>
-            </a:r>
-          </a:p>
-        </p:txBody>
-      </p:sp>
-      <p:sp>
-        <p:nvSpPr>
-          <p:cNvPr id="15" name="TextBox 14"/>
-          <p:cNvSpPr txBox="1"/>
-          <p:nvPr/>
-        </p:nvSpPr>
-        <p:spPr>
-          <a:xfrm>
-            <a:off x="6647688" y="3703320"/>
-            <a:ext cx="1965960" cy="594360"/>
-          </a:xfrm>
-          <a:prstGeom prst="rect">
-            <a:avLst/>
-          </a:prstGeom>
-          <a:noFill/>
-        </p:spPr>
-        <p:txBody>
-          <a:bodyPr wrap="square" lIns="18288" rIns="18288" anchor="ctr">
-            <a:spAutoFit/>
-          </a:bodyPr>
-          <a:lstStyle/>
-          <a:p>
-            <a:pPr algn="l"/>
-            <a:r>
-              <a:rPr sz="1600" b="0">
-                <a:solidFill>
-                  <a:srgbClr val="241C17"/>
-                </a:solidFill>
-                <a:latin typeface="Aptos"/>
-              </a:rPr>
-              <a:t>meaningful replies and repeat participation</a:t>
-            </a:r>
-          </a:p>
-        </p:txBody>
-      </p:sp>
-      <p:sp>
-        <p:nvSpPr>
-          <p:cNvPr id="16" name="Rounded Rectangle 15"/>
-          <p:cNvSpPr/>
-          <p:nvPr/>
-        </p:nvSpPr>
-        <p:spPr>
-          <a:xfrm>
-            <a:off x="9253728" y="2834640"/>
-            <a:ext cx="2468880" cy="1828800"/>
-          </a:xfrm>
-          <a:prstGeom prst="roundRect">
-            <a:avLst/>
-          </a:prstGeom>
-          <a:solidFill>
-            <a:srgbClr val="FFFFFF"/>
-          </a:solidFill>
-          <a:ln>
-            <a:noFill/>
-          </a:ln>
-        </p:spPr>
-        <p:style>
-          <a:lnRef idx="1">
-            <a:schemeClr val="accent1"/>
-          </a:lnRef>
-          <a:fillRef idx="3">
-            <a:schemeClr val="accent1"/>
-          </a:fillRef>
-          <a:effectRef idx="2">
-            <a:schemeClr val="accent1"/>
-          </a:effectRef>
-          <a:fontRef idx="minor">
-            <a:schemeClr val="lt1"/>
-          </a:fontRef>
-        </p:style>
-        <p:txBody>
-          <a:bodyPr rtlCol="0" anchor="ctr"/>
-          <a:lstStyle/>
-          <a:p>
-            <a:pPr algn="ctr"/>
-          </a:p>
-        </p:txBody>
-      </p:sp>
-      <p:sp>
-        <p:nvSpPr>
-          <p:cNvPr id="17" name="TextBox 16"/>
-          <p:cNvSpPr txBox="1"/>
-          <p:nvPr/>
-        </p:nvSpPr>
-        <p:spPr>
-          <a:xfrm>
-            <a:off x="9482328" y="3154680"/>
-            <a:ext cx="2011680" cy="320040"/>
-          </a:xfrm>
-          <a:prstGeom prst="rect">
-            <a:avLst/>
-          </a:prstGeom>
-          <a:noFill/>
-        </p:spPr>
-        <p:txBody>
-          <a:bodyPr wrap="square" lIns="18288" rIns="18288" anchor="ctr">
-            <a:spAutoFit/>
-          </a:bodyPr>
-          <a:lstStyle/>
-          <a:p>
-            <a:pPr algn="l"/>
-            <a:r>
-              <a:rPr sz="1800" b="1">
-                <a:solidFill>
-                  <a:srgbClr val="875D78"/>
-                </a:solidFill>
-                <a:latin typeface="Aptos"/>
-              </a:rPr>
-              <a:t>Safety</a:t>
-            </a:r>
-          </a:p>
-        </p:txBody>
-      </p:sp>
-      <p:sp>
-        <p:nvSpPr>
-          <p:cNvPr id="18" name="TextBox 17"/>
-          <p:cNvSpPr txBox="1"/>
-          <p:nvPr/>
-        </p:nvSpPr>
-        <p:spPr>
-          <a:xfrm>
-            <a:off x="9482328" y="3703320"/>
-            <a:ext cx="1965960" cy="594360"/>
-          </a:xfrm>
-          <a:prstGeom prst="rect">
-            <a:avLst/>
-          </a:prstGeom>
-          <a:noFill/>
-        </p:spPr>
-        <p:txBody>
-          <a:bodyPr wrap="square" lIns="18288" rIns="18288" anchor="ctr">
-            <a:spAutoFit/>
-          </a:bodyPr>
-          <a:lstStyle/>
-          <a:p>
-            <a:pPr algn="l"/>
-            <a:r>
-              <a:rPr sz="1600" b="0">
-                <a:solidFill>
-                  <a:srgbClr val="241C17"/>
-                </a:solidFill>
-                <a:latin typeface="Aptos"/>
-              </a:rPr>
-              <a:t>resolved SOS and support requests</a:t>
-            </a:r>
-          </a:p>
-        </p:txBody>
-      </p:sp>
-      <p:sp>
-        <p:nvSpPr>
-          <p:cNvPr id="19" name="TextBox 18"/>
-          <p:cNvSpPr txBox="1"/>
-          <p:nvPr/>
-        </p:nvSpPr>
-        <p:spPr>
-          <a:xfrm>
-            <a:off x="749808" y="5486400"/>
-            <a:ext cx="10698480" cy="502920"/>
-          </a:xfrm>
-          <a:prstGeom prst="rect">
-            <a:avLst/>
-          </a:prstGeom>
-          <a:noFill/>
-        </p:spPr>
-        <p:txBody>
-          <a:bodyPr wrap="square" lIns="18288" rIns="18288" anchor="ctr">
-            <a:spAutoFit/>
-          </a:bodyPr>
-          <a:lstStyle/>
-          <a:p>
-            <a:pPr algn="l"/>
-            <a:r>
-              <a:rPr sz="2000" b="1">
-                <a:solidFill>
-                  <a:srgbClr val="2D8A43"/>
-                </a:solidFill>
-                <a:latin typeface="Aptos"/>
-              </a:rPr>
-              <a:t>North star: more women leave each interaction with a person, resource, or action that moves them forward.</a:t>
-            </a:r>
-          </a:p>
-        </p:txBody>
-      </p:sp>
-      <p:sp>
-        <p:nvSpPr>
-          <p:cNvPr id="20" name="TextBox 19"/>
-          <p:cNvSpPr txBox="1"/>
-          <p:nvPr/>
-        </p:nvSpPr>
-        <p:spPr>
-          <a:xfrm>
-            <a:off x="658368" y="6473952"/>
-            <a:ext cx="3657600" cy="182880"/>
-          </a:xfrm>
-          <a:prstGeom prst="rect">
-            <a:avLst/>
-          </a:prstGeom>
-          <a:noFill/>
-        </p:spPr>
-        <p:txBody>
-          <a:bodyPr wrap="square" lIns="18288" rIns="18288" anchor="ctr">
-            <a:spAutoFit/>
-          </a:bodyPr>
-          <a:lstStyle/>
-          <a:p>
-            <a:pPr algn="l"/>
-            <a:r>
-              <a:rPr sz="900" b="0">
-                <a:solidFill>
-                  <a:srgbClr val="786B62"/>
-                </a:solidFill>
-                <a:latin typeface="Aptos"/>
-              </a:rPr>
-              <a:t>LEI  /  Hackathon pitch</a:t>
-            </a:r>
-          </a:p>
-        </p:txBody>
-      </p:sp>
-      <p:sp>
-        <p:nvSpPr>
-          <p:cNvPr id="21" name="TextBox 20"/>
-          <p:cNvSpPr txBox="1"/>
-          <p:nvPr/>
-        </p:nvSpPr>
-        <p:spPr>
-          <a:xfrm>
-            <a:off x="11064240" y="6473952"/>
-            <a:ext cx="457200" cy="182880"/>
-          </a:xfrm>
-          <a:prstGeom prst="rect">
-            <a:avLst/>
-          </a:prstGeom>
-          <a:noFill/>
-        </p:spPr>
-        <p:txBody>
-          <a:bodyPr wrap="square" lIns="18288" rIns="18288" anchor="ctr">
-            <a:spAutoFit/>
-          </a:bodyPr>
-          <a:lstStyle/>
-          <a:p>
-            <a:pPr algn="r"/>
-            <a:r>
-              <a:rPr sz="900" b="1">
-                <a:solidFill>
-                  <a:srgbClr val="875D78"/>
-                </a:solidFill>
-                <a:latin typeface="Aptos"/>
-              </a:rPr>
-              <a:t>07</a:t>
-            </a:r>
-          </a:p>
-        </p:txBody>
-      </p:sp>
-    </p:spTree>
-  </p:cSld>
-  <p:clrMapOvr>
-    <a:masterClrMapping/>
-  </p:clrMapOvr>
-</p:sld>
-</file>
-
-<file path=ppt/slides/slide8.xml><?xml version="1.0" encoding="utf-8"?>
-<p:sld xmlns:a="http://schemas.openxmlformats.org/drawingml/2006/main" xmlns:p="http://schemas.openxmlformats.org/presentationml/2006/main" xmlns:r="http://schemas.openxmlformats.org/officeDocument/2006/relationships">
-  <p:cSld>
-    <p:spTree>
-      <p:nvGrpSpPr>
-        <p:cNvPr id="1" name=""/>
-        <p:cNvGrpSpPr/>
-        <p:nvPr/>
-      </p:nvGrpSpPr>
-      <p:grpSpPr/>
-      <p:sp>
-        <p:nvSpPr>
-          <p:cNvPr id="2" name="Rectangle 1"/>
-          <p:cNvSpPr/>
-          <p:nvPr/>
-        </p:nvSpPr>
-        <p:spPr>
-          <a:xfrm>
-            <a:off x="0" y="0"/>
-            <a:ext cx="12191695" cy="6858000"/>
-          </a:xfrm>
-          <a:prstGeom prst="rect">
-            <a:avLst/>
-          </a:prstGeom>
-          <a:solidFill>
-            <a:srgbClr val="120B10"/>
-          </a:solidFill>
-          <a:ln>
-            <a:noFill/>
-          </a:ln>
-        </p:spPr>
-        <p:style>
-          <a:lnRef idx="1">
-            <a:schemeClr val="accent1"/>
-          </a:lnRef>
-          <a:fillRef idx="3">
-            <a:schemeClr val="accent1"/>
-          </a:fillRef>
-          <a:effectRef idx="2">
-            <a:schemeClr val="accent1"/>
-          </a:effectRef>
-          <a:fontRef idx="minor">
-            <a:schemeClr val="lt1"/>
-          </a:fontRef>
-        </p:style>
-        <p:txBody>
-          <a:bodyPr rtlCol="0" anchor="ctr"/>
-          <a:lstStyle/>
-          <a:p>
-            <a:pPr algn="ctr"/>
-          </a:p>
-        </p:txBody>
-      </p:sp>
-      <p:sp>
-        <p:nvSpPr>
-          <p:cNvPr id="3" name="TextBox 2"/>
-          <p:cNvSpPr txBox="1"/>
-          <p:nvPr/>
-        </p:nvSpPr>
-        <p:spPr>
-          <a:xfrm>
-            <a:off x="658368" y="438912"/>
-            <a:ext cx="4114800" cy="274320"/>
-          </a:xfrm>
-          <a:prstGeom prst="rect">
-            <a:avLst/>
-          </a:prstGeom>
-          <a:noFill/>
-        </p:spPr>
-        <p:txBody>
-          <a:bodyPr wrap="square" lIns="18288" rIns="18288" anchor="ctr">
-            <a:spAutoFit/>
-          </a:bodyPr>
-          <a:lstStyle/>
-          <a:p>
-            <a:pPr algn="l"/>
-            <a:r>
-              <a:rPr sz="1000" b="1">
-                <a:solidFill>
-                  <a:srgbClr val="F5C46B"/>
-                </a:solidFill>
-                <a:latin typeface="Aptos"/>
-              </a:rPr>
-              <a:t>07  /  WHAT COMES NEXT</a:t>
-            </a:r>
-          </a:p>
-        </p:txBody>
-      </p:sp>
-      <p:sp>
-        <p:nvSpPr>
-          <p:cNvPr id="4" name="TextBox 3"/>
-          <p:cNvSpPr txBox="1"/>
-          <p:nvPr/>
-        </p:nvSpPr>
-        <p:spPr>
-          <a:xfrm>
-            <a:off x="658368" y="768096"/>
-            <a:ext cx="10789920" cy="658368"/>
-          </a:xfrm>
-          <a:prstGeom prst="rect">
-            <a:avLst/>
-          </a:prstGeom>
-          <a:noFill/>
-        </p:spPr>
-        <p:txBody>
-          <a:bodyPr wrap="square" lIns="18288" rIns="18288" anchor="ctr">
-            <a:spAutoFit/>
-          </a:bodyPr>
-          <a:lstStyle/>
-          <a:p>
-            <a:pPr algn="l"/>
-            <a:r>
-              <a:rPr sz="2800" b="1">
-                <a:solidFill>
-                  <a:srgbClr val="F4E8EE"/>
-                </a:solidFill>
-                <a:latin typeface="Aptos Display"/>
-              </a:rPr>
-              <a:t>The prototype proves the direction</a:t>
-            </a:r>
-          </a:p>
-        </p:txBody>
-      </p:sp>
-      <p:sp>
-        <p:nvSpPr>
-          <p:cNvPr id="5" name="Rectangle 4"/>
-          <p:cNvSpPr/>
-          <p:nvPr/>
-        </p:nvSpPr>
-        <p:spPr>
-          <a:xfrm>
-            <a:off x="658368" y="1572768"/>
-            <a:ext cx="1005840" cy="36576"/>
-          </a:xfrm>
-          <a:prstGeom prst="rect">
-            <a:avLst/>
-          </a:prstGeom>
-          <a:solidFill>
-            <a:srgbClr val="F5C46B"/>
-          </a:solidFill>
-          <a:ln>
-            <a:noFill/>
-          </a:ln>
-        </p:spPr>
-        <p:style>
-          <a:lnRef idx="1">
-            <a:schemeClr val="accent1"/>
-          </a:lnRef>
-          <a:fillRef idx="3">
-            <a:schemeClr val="accent1"/>
-          </a:fillRef>
-          <a:effectRef idx="2">
-            <a:schemeClr val="accent1"/>
-          </a:effectRef>
-          <a:fontRef idx="minor">
-            <a:schemeClr val="lt1"/>
-          </a:fontRef>
-        </p:style>
-        <p:txBody>
-          <a:bodyPr rtlCol="0" anchor="ctr"/>
-          <a:lstStyle/>
-          <a:p>
-            <a:pPr algn="ctr"/>
-          </a:p>
-        </p:txBody>
-      </p:sp>
-      <p:sp>
-        <p:nvSpPr>
-          <p:cNvPr id="6" name="TextBox 5"/>
-          <p:cNvSpPr txBox="1"/>
-          <p:nvPr/>
-        </p:nvSpPr>
-        <p:spPr>
-          <a:xfrm>
-            <a:off x="777240" y="2148840"/>
-            <a:ext cx="2468880" cy="274320"/>
-          </a:xfrm>
-          <a:prstGeom prst="rect">
-            <a:avLst/>
-          </a:prstGeom>
-          <a:noFill/>
-        </p:spPr>
-        <p:txBody>
-          <a:bodyPr wrap="square" lIns="18288" rIns="18288" anchor="ctr">
-            <a:spAutoFit/>
-          </a:bodyPr>
-          <a:lstStyle/>
-          <a:p>
-            <a:pPr algn="l"/>
-            <a:r>
-              <a:rPr sz="1100" b="1">
-                <a:solidFill>
-                  <a:srgbClr val="F5C46B"/>
-                </a:solidFill>
-                <a:latin typeface="Aptos"/>
-              </a:rPr>
-              <a:t>NOW</a:t>
-            </a:r>
-          </a:p>
-        </p:txBody>
-      </p:sp>
-      <p:sp>
-        <p:nvSpPr>
-          <p:cNvPr id="7" name="TextBox 6"/>
-          <p:cNvSpPr txBox="1"/>
-          <p:nvPr/>
-        </p:nvSpPr>
-        <p:spPr>
-          <a:xfrm>
-            <a:off x="777240" y="2606040"/>
-            <a:ext cx="2834640" cy="685800"/>
-          </a:xfrm>
-          <a:prstGeom prst="rect">
-            <a:avLst/>
-          </a:prstGeom>
-          <a:noFill/>
-        </p:spPr>
-        <p:txBody>
-          <a:bodyPr wrap="square" lIns="18288" rIns="18288" anchor="ctr">
-            <a:spAutoFit/>
-          </a:bodyPr>
-          <a:lstStyle/>
-          <a:p>
-            <a:pPr algn="l"/>
-            <a:r>
-              <a:rPr sz="2300" b="1">
-                <a:solidFill>
-                  <a:srgbClr val="F4E8EE"/>
-                </a:solidFill>
-                <a:latin typeface="Aptos Display"/>
-              </a:rPr>
-              <a:t>Interactive sanctuary prototype</a:t>
-            </a:r>
-          </a:p>
-        </p:txBody>
-      </p:sp>
-      <p:sp>
-        <p:nvSpPr>
-          <p:cNvPr id="8" name="TextBox 7"/>
-          <p:cNvSpPr txBox="1"/>
-          <p:nvPr/>
-        </p:nvSpPr>
-        <p:spPr>
-          <a:xfrm>
-            <a:off x="777240" y="3703320"/>
-            <a:ext cx="2880360" cy="1005840"/>
-          </a:xfrm>
-          <a:prstGeom prst="rect">
-            <a:avLst/>
-          </a:prstGeom>
-          <a:noFill/>
-        </p:spPr>
-        <p:txBody>
-          <a:bodyPr wrap="square" lIns="18288" rIns="18288" anchor="ctr">
-            <a:spAutoFit/>
-          </a:bodyPr>
-          <a:lstStyle/>
-          <a:p>
-            <a:pPr algn="l"/>
-            <a:r>
-              <a:rPr sz="1500" b="0">
-                <a:solidFill>
-                  <a:srgbClr val="F4E8EE"/>
-                </a:solidFill>
-                <a:latin typeface="Aptos"/>
-              </a:rPr>
-              <a:t>Validate the journey and emotional language with real members.</a:t>
-            </a:r>
-          </a:p>
-        </p:txBody>
-      </p:sp>
-      <p:sp>
-        <p:nvSpPr>
-          <p:cNvPr id="9" name="TextBox 8"/>
-          <p:cNvSpPr txBox="1"/>
-          <p:nvPr/>
-        </p:nvSpPr>
-        <p:spPr>
-          <a:xfrm>
-            <a:off x="4526279" y="2148840"/>
-            <a:ext cx="2468880" cy="274320"/>
-          </a:xfrm>
-          <a:prstGeom prst="rect">
-            <a:avLst/>
-          </a:prstGeom>
-          <a:noFill/>
-        </p:spPr>
-        <p:txBody>
-          <a:bodyPr wrap="square" lIns="18288" rIns="18288" anchor="ctr">
-            <a:spAutoFit/>
-          </a:bodyPr>
-          <a:lstStyle/>
-          <a:p>
-            <a:pPr algn="l"/>
-            <a:r>
-              <a:rPr sz="1100" b="1">
-                <a:solidFill>
-                  <a:srgbClr val="F5C46B"/>
-                </a:solidFill>
-                <a:latin typeface="Aptos"/>
-              </a:rPr>
-              <a:t>NEXT</a:t>
-            </a:r>
-          </a:p>
-        </p:txBody>
-      </p:sp>
-      <p:sp>
-        <p:nvSpPr>
-          <p:cNvPr id="10" name="TextBox 9"/>
-          <p:cNvSpPr txBox="1"/>
-          <p:nvPr/>
-        </p:nvSpPr>
-        <p:spPr>
-          <a:xfrm>
-            <a:off x="4526279" y="2606040"/>
-            <a:ext cx="2834640" cy="685800"/>
-          </a:xfrm>
-          <a:prstGeom prst="rect">
-            <a:avLst/>
-          </a:prstGeom>
-          <a:noFill/>
-        </p:spPr>
-        <p:txBody>
-          <a:bodyPr wrap="square" lIns="18288" rIns="18288" anchor="ctr">
-            <a:spAutoFit/>
-          </a:bodyPr>
-          <a:lstStyle/>
-          <a:p>
-            <a:pPr algn="l"/>
-            <a:r>
-              <a:rPr sz="2300" b="1">
-                <a:solidFill>
-                  <a:srgbClr val="F4E8EE"/>
-                </a:solidFill>
-                <a:latin typeface="Aptos Display"/>
-              </a:rPr>
-              <a:t>Campus and career pilots</a:t>
-            </a:r>
-          </a:p>
-        </p:txBody>
-      </p:sp>
-      <p:sp>
-        <p:nvSpPr>
-          <p:cNvPr id="11" name="TextBox 10"/>
-          <p:cNvSpPr txBox="1"/>
-          <p:nvPr/>
-        </p:nvSpPr>
-        <p:spPr>
-          <a:xfrm>
-            <a:off x="4526279" y="3703320"/>
-            <a:ext cx="2880360" cy="1005840"/>
-          </a:xfrm>
-          <a:prstGeom prst="rect">
-            <a:avLst/>
-          </a:prstGeom>
-          <a:noFill/>
-        </p:spPr>
-        <p:txBody>
-          <a:bodyPr wrap="square" lIns="18288" rIns="18288" anchor="ctr">
-            <a:spAutoFit/>
-          </a:bodyPr>
-          <a:lstStyle/>
-          <a:p>
-            <a:pPr algn="l"/>
-            <a:r>
-              <a:rPr sz="1500" b="0">
-                <a:solidFill>
-                  <a:srgbClr val="F4E8EE"/>
-                </a:solidFill>
-                <a:latin typeface="Aptos"/>
-              </a:rPr>
-              <a:t>Partner with one campus and one women-led career community.</a:t>
-            </a:r>
-          </a:p>
-        </p:txBody>
-      </p:sp>
-      <p:sp>
-        <p:nvSpPr>
-          <p:cNvPr id="12" name="TextBox 11"/>
-          <p:cNvSpPr txBox="1"/>
-          <p:nvPr/>
-        </p:nvSpPr>
-        <p:spPr>
-          <a:xfrm>
-            <a:off x="8275319" y="2148840"/>
-            <a:ext cx="2468880" cy="274320"/>
-          </a:xfrm>
-          <a:prstGeom prst="rect">
-            <a:avLst/>
-          </a:prstGeom>
-          <a:noFill/>
-        </p:spPr>
-        <p:txBody>
-          <a:bodyPr wrap="square" lIns="18288" rIns="18288" anchor="ctr">
-            <a:spAutoFit/>
-          </a:bodyPr>
-          <a:lstStyle/>
-          <a:p>
-            <a:pPr algn="l"/>
-            <a:r>
-              <a:rPr sz="1100" b="1">
-                <a:solidFill>
-                  <a:srgbClr val="F5C46B"/>
-                </a:solidFill>
-                <a:latin typeface="Aptos"/>
-              </a:rPr>
-              <a:t>THEN</a:t>
-            </a:r>
-          </a:p>
-        </p:txBody>
-      </p:sp>
-      <p:sp>
-        <p:nvSpPr>
-          <p:cNvPr id="13" name="TextBox 12"/>
-          <p:cNvSpPr txBox="1"/>
-          <p:nvPr/>
-        </p:nvSpPr>
-        <p:spPr>
-          <a:xfrm>
-            <a:off x="8275319" y="2606040"/>
-            <a:ext cx="2834640" cy="685800"/>
-          </a:xfrm>
-          <a:prstGeom prst="rect">
-            <a:avLst/>
-          </a:prstGeom>
-          <a:noFill/>
-        </p:spPr>
-        <p:txBody>
-          <a:bodyPr wrap="square" lIns="18288" rIns="18288" anchor="ctr">
-            <a:spAutoFit/>
-          </a:bodyPr>
-          <a:lstStyle/>
-          <a:p>
-            <a:pPr algn="l"/>
-            <a:r>
-              <a:rPr sz="2300" b="1">
-                <a:solidFill>
-                  <a:srgbClr val="F4E8EE"/>
-                </a:solidFill>
-                <a:latin typeface="Aptos Display"/>
-              </a:rPr>
-              <a:t>Trusted opportunity graph</a:t>
-            </a:r>
-          </a:p>
-        </p:txBody>
-      </p:sp>
-      <p:sp>
-        <p:nvSpPr>
-          <p:cNvPr id="14" name="TextBox 13"/>
-          <p:cNvSpPr txBox="1"/>
-          <p:nvPr/>
-        </p:nvSpPr>
-        <p:spPr>
-          <a:xfrm>
-            <a:off x="8275319" y="3703320"/>
-            <a:ext cx="2880360" cy="1005840"/>
-          </a:xfrm>
-          <a:prstGeom prst="rect">
-            <a:avLst/>
-          </a:prstGeom>
-          <a:noFill/>
-        </p:spPr>
-        <p:txBody>
-          <a:bodyPr wrap="square" lIns="18288" rIns="18288" anchor="ctr">
-            <a:spAutoFit/>
-          </a:bodyPr>
-          <a:lstStyle/>
-          <a:p>
-            <a:pPr algn="l"/>
-            <a:r>
-              <a:rPr sz="1500" b="0">
-                <a:solidFill>
-                  <a:srgbClr val="F4E8EE"/>
-                </a:solidFill>
-                <a:latin typeface="Aptos"/>
-              </a:rPr>
-              <a:t>Connect needs to mentors, resources, events, and measurable outcomes.</a:t>
-            </a:r>
-          </a:p>
-        </p:txBody>
-      </p:sp>
-      <p:sp>
-        <p:nvSpPr>
-          <p:cNvPr id="15" name="TextBox 14"/>
-          <p:cNvSpPr txBox="1"/>
-          <p:nvPr/>
-        </p:nvSpPr>
-        <p:spPr>
-          <a:xfrm>
-            <a:off x="777240" y="5623560"/>
-            <a:ext cx="10607040" cy="502920"/>
-          </a:xfrm>
-          <a:prstGeom prst="rect">
-            <a:avLst/>
-          </a:prstGeom>
-          <a:noFill/>
-        </p:spPr>
-        <p:txBody>
-          <a:bodyPr wrap="square" lIns="18288" rIns="18288" anchor="ctr">
-            <a:spAutoFit/>
-          </a:bodyPr>
-          <a:lstStyle/>
-          <a:p>
-            <a:pPr algn="l"/>
-            <a:r>
-              <a:rPr sz="1900" b="1">
-                <a:solidFill>
-                  <a:srgbClr val="F5C46B"/>
-                </a:solidFill>
-                <a:latin typeface="Aptos"/>
-              </a:rPr>
-              <a:t>We are not asking women to find their way through another platform. We are building a place that helps them move.</a:t>
-            </a:r>
-          </a:p>
-        </p:txBody>
-      </p:sp>
-      <p:sp>
-        <p:nvSpPr>
-          <p:cNvPr id="16" name="TextBox 15"/>
-          <p:cNvSpPr txBox="1"/>
-          <p:nvPr/>
-        </p:nvSpPr>
-        <p:spPr>
-          <a:xfrm>
-            <a:off x="658368" y="6473952"/>
-            <a:ext cx="3657600" cy="182880"/>
-          </a:xfrm>
-          <a:prstGeom prst="rect">
-            <a:avLst/>
-          </a:prstGeom>
-          <a:noFill/>
-        </p:spPr>
-        <p:txBody>
-          <a:bodyPr wrap="square" lIns="18288" rIns="18288" anchor="ctr">
-            <a:spAutoFit/>
-          </a:bodyPr>
-          <a:lstStyle/>
-          <a:p>
-            <a:pPr algn="l"/>
-            <a:r>
-              <a:rPr sz="900" b="0">
-                <a:solidFill>
-                  <a:srgbClr val="F4E8EE"/>
-                </a:solidFill>
-                <a:latin typeface="Aptos"/>
-              </a:rPr>
-              <a:t>LEI  /  Hackathon pitch</a:t>
-            </a:r>
-          </a:p>
-        </p:txBody>
-      </p:sp>
-      <p:sp>
-        <p:nvSpPr>
-          <p:cNvPr id="17" name="TextBox 16"/>
-          <p:cNvSpPr txBox="1"/>
-          <p:nvPr/>
-        </p:nvSpPr>
-        <p:spPr>
-          <a:xfrm>
-            <a:off x="11064240" y="6473952"/>
-            <a:ext cx="457200" cy="182880"/>
-          </a:xfrm>
-          <a:prstGeom prst="rect">
-            <a:avLst/>
-          </a:prstGeom>
-          <a:noFill/>
-        </p:spPr>
-        <p:txBody>
-          <a:bodyPr wrap="square" lIns="18288" rIns="18288" anchor="ctr">
-            <a:spAutoFit/>
-          </a:bodyPr>
-          <a:lstStyle/>
-          <a:p>
-            <a:pPr algn="r"/>
-            <a:r>
-              <a:rPr sz="900" b="1">
-                <a:solidFill>
-                  <a:srgbClr val="F5C46B"/>
-                </a:solidFill>
-                <a:latin typeface="Aptos"/>
-              </a:rPr>
-              <a:t>08</a:t>
-            </a:r>
-          </a:p>
-        </p:txBody>
-      </p:sp>
-    </p:spTree>
-  </p:cSld>
-  <p:clrMapOvr>
-    <a:masterClrMapping/>
-  </p:clrMapOvr>
-</p:sld>
-</file>
-
-<file path=ppt/slides/slide9.xml><?xml version="1.0" encoding="utf-8"?>
-<p:sld xmlns:a="http://schemas.openxmlformats.org/drawingml/2006/main" xmlns:p="http://schemas.openxmlformats.org/presentationml/2006/main" xmlns:r="http://schemas.openxmlformats.org/officeDocument/2006/relationships">
-  <p:cSld>
-    <p:spTree>
-      <p:nvGrpSpPr>
-        <p:cNvPr id="1" name=""/>
-        <p:cNvGrpSpPr/>
-        <p:nvPr/>
-      </p:nvGrpSpPr>
-      <p:grpSpPr/>
-      <p:sp>
-        <p:nvSpPr>
-          <p:cNvPr id="2" name="Rectangle 1"/>
-          <p:cNvSpPr/>
-          <p:nvPr/>
-        </p:nvSpPr>
-        <p:spPr>
-          <a:xfrm>
-            <a:off x="0" y="0"/>
-            <a:ext cx="12191695" cy="6858000"/>
-          </a:xfrm>
-          <a:prstGeom prst="rect">
-            <a:avLst/>
-          </a:prstGeom>
-          <a:solidFill>
-            <a:srgbClr val="120B10"/>
-          </a:solidFill>
-          <a:ln>
-            <a:noFill/>
-          </a:ln>
-        </p:spPr>
-        <p:style>
-          <a:lnRef idx="1">
-            <a:schemeClr val="accent1"/>
-          </a:lnRef>
-          <a:fillRef idx="3">
-            <a:schemeClr val="accent1"/>
-          </a:fillRef>
-          <a:effectRef idx="2">
-            <a:schemeClr val="accent1"/>
-          </a:effectRef>
-          <a:fontRef idx="minor">
-            <a:schemeClr val="lt1"/>
-          </a:fontRef>
-        </p:style>
-        <p:txBody>
-          <a:bodyPr rtlCol="0" anchor="ctr"/>
-          <a:lstStyle/>
-          <a:p>
-            <a:pPr algn="ctr"/>
-          </a:p>
-        </p:txBody>
-      </p:sp>
-      <p:sp>
-        <p:nvSpPr>
-          <p:cNvPr id="3" name="TextBox 2"/>
-          <p:cNvSpPr txBox="1"/>
-          <p:nvPr/>
-        </p:nvSpPr>
-        <p:spPr>
-          <a:xfrm>
-            <a:off x="777240" y="1143000"/>
-            <a:ext cx="2743200" cy="457200"/>
-          </a:xfrm>
-          <a:prstGeom prst="rect">
-            <a:avLst/>
-          </a:prstGeom>
-          <a:noFill/>
-        </p:spPr>
-        <p:txBody>
-          <a:bodyPr wrap="square" lIns="18288" rIns="18288" anchor="ctr">
-            <a:spAutoFit/>
-          </a:bodyPr>
-          <a:lstStyle/>
-          <a:p>
-            <a:pPr algn="l"/>
-            <a:r>
-              <a:rPr sz="1700" b="1">
-                <a:solidFill>
-                  <a:srgbClr val="F5C46B"/>
-                </a:solidFill>
-                <a:latin typeface="Aptos"/>
-              </a:rPr>
-              <a:t>LEI</a:t>
-            </a:r>
-          </a:p>
-        </p:txBody>
-      </p:sp>
-      <p:sp>
-        <p:nvSpPr>
-          <p:cNvPr id="4" name="TextBox 3"/>
-          <p:cNvSpPr txBox="1"/>
-          <p:nvPr/>
-        </p:nvSpPr>
-        <p:spPr>
-          <a:xfrm>
-            <a:off x="777240" y="2057400"/>
-            <a:ext cx="8412480" cy="1463040"/>
-          </a:xfrm>
-          <a:prstGeom prst="rect">
-            <a:avLst/>
-          </a:prstGeom>
-          <a:noFill/>
-        </p:spPr>
-        <p:txBody>
-          <a:bodyPr wrap="square" lIns="18288" rIns="18288" anchor="ctr">
-            <a:spAutoFit/>
-          </a:bodyPr>
-          <a:lstStyle/>
-          <a:p>
-            <a:pPr algn="l"/>
-            <a:r>
-              <a:rPr sz="3600" b="1">
-                <a:solidFill>
-                  <a:srgbClr val="F4E8EE"/>
-                </a:solidFill>
-                <a:latin typeface="Aptos Display"/>
-              </a:rPr>
-              <a:t>Everything for HER.
-Connect. Discover. Grow.</a:t>
-            </a:r>
-          </a:p>
-        </p:txBody>
-      </p:sp>
-      <p:sp>
-        <p:nvSpPr>
-          <p:cNvPr id="5" name="TextBox 4"/>
-          <p:cNvSpPr txBox="1"/>
-          <p:nvPr/>
-        </p:nvSpPr>
-        <p:spPr>
-          <a:xfrm>
-            <a:off x="822960" y="4251960"/>
-            <a:ext cx="6858000" cy="411480"/>
-          </a:xfrm>
-          <a:prstGeom prst="rect">
-            <a:avLst/>
-          </a:prstGeom>
-          <a:noFill/>
-        </p:spPr>
-        <p:txBody>
-          <a:bodyPr wrap="square" lIns="18288" rIns="18288" anchor="ctr">
-            <a:spAutoFit/>
-          </a:bodyPr>
-          <a:lstStyle/>
-          <a:p>
-            <a:pPr algn="l"/>
-            <a:r>
-              <a:rPr sz="2100" b="0">
-                <a:solidFill>
-                  <a:srgbClr val="F5C46B"/>
-                </a:solidFill>
-                <a:latin typeface="Aptos"/>
-              </a:rPr>
-              <a:t>A protected ecosystem for the next step.</a:t>
-            </a:r>
-          </a:p>
-        </p:txBody>
-      </p:sp>
-      <p:sp>
-        <p:nvSpPr>
-          <p:cNvPr id="6" name="TextBox 5"/>
-          <p:cNvSpPr txBox="1"/>
-          <p:nvPr/>
-        </p:nvSpPr>
-        <p:spPr>
-          <a:xfrm>
-            <a:off x="822960" y="5669280"/>
-            <a:ext cx="7132320" cy="274320"/>
-          </a:xfrm>
-          <a:prstGeom prst="rect">
-            <a:avLst/>
-          </a:prstGeom>
-          <a:noFill/>
-        </p:spPr>
-        <p:txBody>
-          <a:bodyPr wrap="square" lIns="18288" rIns="18288" anchor="ctr">
-            <a:spAutoFit/>
-          </a:bodyPr>
-          <a:lstStyle/>
-          <a:p>
-            <a:pPr algn="l"/>
-            <a:r>
-              <a:rPr sz="1200" b="0">
-                <a:solidFill>
-                  <a:srgbClr val="F4E8EE"/>
-                </a:solidFill>
-                <a:latin typeface="Aptos"/>
-              </a:rPr>
-              <a:t>Live demo: pkyeibrewu1.github.io/LEI/?developer=1</a:t>
-            </a:r>
-          </a:p>
-        </p:txBody>
-      </p:sp>
-      <p:sp>
-        <p:nvSpPr>
-          <p:cNvPr id="7" name="TextBox 6"/>
-          <p:cNvSpPr txBox="1"/>
-          <p:nvPr/>
-        </p:nvSpPr>
-        <p:spPr>
-          <a:xfrm>
-            <a:off x="658368" y="6473952"/>
-            <a:ext cx="3657600" cy="182880"/>
-          </a:xfrm>
-          <a:prstGeom prst="rect">
-            <a:avLst/>
-          </a:prstGeom>
-          <a:noFill/>
-        </p:spPr>
-        <p:txBody>
-          <a:bodyPr wrap="square" lIns="18288" rIns="18288" anchor="ctr">
-            <a:spAutoFit/>
-          </a:bodyPr>
-          <a:lstStyle/>
-          <a:p>
-            <a:pPr algn="l"/>
-            <a:r>
-              <a:rPr sz="900" b="0">
-                <a:solidFill>
-                  <a:srgbClr val="F4E8EE"/>
-                </a:solidFill>
-                <a:latin typeface="Aptos"/>
-              </a:rPr>
-              <a:t>LEI  /  Hackathon pitch</a:t>
-            </a:r>
-          </a:p>
-        </p:txBody>
-      </p:sp>
-      <p:sp>
-        <p:nvSpPr>
-          <p:cNvPr id="8" name="TextBox 7"/>
-          <p:cNvSpPr txBox="1"/>
-          <p:nvPr/>
-        </p:nvSpPr>
-        <p:spPr>
-          <a:xfrm>
-            <a:off x="11064240" y="6473952"/>
-            <a:ext cx="457200" cy="182880"/>
-          </a:xfrm>
-          <a:prstGeom prst="rect">
-            <a:avLst/>
-          </a:prstGeom>
-          <a:noFill/>
-        </p:spPr>
-        <p:txBody>
-          <a:bodyPr wrap="square" lIns="18288" rIns="18288" anchor="ctr">
-            <a:spAutoFit/>
-          </a:bodyPr>
-          <a:lstStyle/>
-          <a:p>
-            <a:pPr algn="r"/>
-            <a:r>
-              <a:rPr sz="900" b="1">
-                <a:solidFill>
-                  <a:srgbClr val="F5C46B"/>
-                </a:solidFill>
-                <a:latin typeface="Aptos"/>
-              </a:rPr>
-              <a:t>09</a:t>
             </a:r>
           </a:p>
         </p:txBody>
